--- a/docs/design/软件界面设计.pptx
+++ b/docs/design/软件界面设计.pptx
@@ -2,10 +2,15 @@
 <file path=ppt/presentation.xml><?xml version="1.0" encoding="utf-8"?>
 <p:presentation xmlns:a="http://schemas.openxmlformats.org/drawingml/2006/main" xmlns:r="http://schemas.openxmlformats.org/officeDocument/2006/relationships" xmlns:p="http://schemas.openxmlformats.org/presentationml/2006/main" saveSubsetFonts="1">
   <p:sldMasterIdLst>
-    <p:sldMasterId id="2147483648" r:id="rId1"/>
+    <p:sldMasterId id="2147483660" r:id="rId1"/>
+    <p:sldMasterId id="2147483648" r:id="rId2"/>
   </p:sldMasterIdLst>
+  <p:notesMasterIdLst>
+    <p:notesMasterId r:id="rId5"/>
+  </p:notesMasterIdLst>
   <p:sldIdLst>
-    <p:sldId id="256" r:id="rId2"/>
+    <p:sldId id="258" r:id="rId3"/>
+    <p:sldId id="257" r:id="rId4"/>
   </p:sldIdLst>
   <p:sldSz cx="12192000" cy="6858000"/>
   <p:notesSz cx="6858000" cy="9144000"/>
@@ -104,7 +109,529 @@
       </a:defRPr>
     </a:lvl9pPr>
   </p:defaultTextStyle>
+  <p:extLst>
+    <p:ext uri="{EFAFB233-063F-42B5-8137-9DF3F51BA10A}">
+      <p15:sldGuideLst xmlns:p15="http://schemas.microsoft.com/office/powerpoint/2012/main"/>
+    </p:ext>
+  </p:extLst>
 </p:presentation>
+</file>
+
+<file path=ppt/notesMasters/notesMaster1.xml><?xml version="1.0" encoding="utf-8"?>
+<p:notesMaster xmlns:a="http://schemas.openxmlformats.org/drawingml/2006/main" xmlns:r="http://schemas.openxmlformats.org/officeDocument/2006/relationships" xmlns:p="http://schemas.openxmlformats.org/presentationml/2006/main">
+  <p:cSld>
+    <p:bg>
+      <p:bgRef idx="1001">
+        <a:schemeClr val="bg1"/>
+      </p:bgRef>
+    </p:bg>
+    <p:spTree>
+      <p:nvGrpSpPr>
+        <p:cNvPr id="1" name=""/>
+        <p:cNvGrpSpPr/>
+        <p:nvPr/>
+      </p:nvGrpSpPr>
+      <p:grpSpPr>
+        <a:xfrm>
+          <a:off x="0" y="0"/>
+          <a:ext cx="0" cy="0"/>
+          <a:chOff x="0" y="0"/>
+          <a:chExt cx="0" cy="0"/>
+        </a:xfrm>
+      </p:grpSpPr>
+      <p:sp>
+        <p:nvSpPr>
+          <p:cNvPr id="2" name="页眉占位符 1"/>
+          <p:cNvSpPr>
+            <a:spLocks noGrp="1"/>
+          </p:cNvSpPr>
+          <p:nvPr>
+            <p:ph type="hdr" sz="quarter"/>
+          </p:nvPr>
+        </p:nvSpPr>
+        <p:spPr>
+          <a:xfrm>
+            <a:off x="0" y="0"/>
+            <a:ext cx="2971800" cy="458788"/>
+          </a:xfrm>
+          <a:prstGeom prst="rect">
+            <a:avLst/>
+          </a:prstGeom>
+        </p:spPr>
+        <p:txBody>
+          <a:bodyPr vert="horz" lIns="91440" tIns="45720" rIns="91440" bIns="45720" rtlCol="0"/>
+          <a:lstStyle>
+            <a:lvl1pPr algn="l">
+              <a:defRPr sz="1200"/>
+            </a:lvl1pPr>
+          </a:lstStyle>
+          <a:p>
+            <a:endParaRPr lang="zh-CN" altLang="en-US"/>
+          </a:p>
+        </p:txBody>
+      </p:sp>
+      <p:sp>
+        <p:nvSpPr>
+          <p:cNvPr id="3" name="日期占位符 2"/>
+          <p:cNvSpPr>
+            <a:spLocks noGrp="1"/>
+          </p:cNvSpPr>
+          <p:nvPr>
+            <p:ph type="dt" idx="1"/>
+          </p:nvPr>
+        </p:nvSpPr>
+        <p:spPr>
+          <a:xfrm>
+            <a:off x="3884613" y="0"/>
+            <a:ext cx="2971800" cy="458788"/>
+          </a:xfrm>
+          <a:prstGeom prst="rect">
+            <a:avLst/>
+          </a:prstGeom>
+        </p:spPr>
+        <p:txBody>
+          <a:bodyPr vert="horz" lIns="91440" tIns="45720" rIns="91440" bIns="45720" rtlCol="0"/>
+          <a:lstStyle>
+            <a:lvl1pPr algn="r">
+              <a:defRPr sz="1200"/>
+            </a:lvl1pPr>
+          </a:lstStyle>
+          <a:p>
+            <a:fld id="{9B683DD4-A1B8-4C6A-88F5-2A8ED6508784}" type="datetimeFigureOut">
+              <a:rPr lang="zh-CN" altLang="en-US" smtClean="0"/>
+              <a:t>2026/5/28</a:t>
+            </a:fld>
+            <a:endParaRPr lang="zh-CN" altLang="en-US"/>
+          </a:p>
+        </p:txBody>
+      </p:sp>
+      <p:sp>
+        <p:nvSpPr>
+          <p:cNvPr id="4" name="幻灯片图像占位符 3"/>
+          <p:cNvSpPr>
+            <a:spLocks noGrp="1" noRot="1" noChangeAspect="1"/>
+          </p:cNvSpPr>
+          <p:nvPr>
+            <p:ph type="sldImg" idx="2"/>
+          </p:nvPr>
+        </p:nvSpPr>
+        <p:spPr>
+          <a:xfrm>
+            <a:off x="685800" y="1143000"/>
+            <a:ext cx="5486400" cy="3086100"/>
+          </a:xfrm>
+          <a:prstGeom prst="rect">
+            <a:avLst/>
+          </a:prstGeom>
+          <a:noFill/>
+          <a:ln w="12700">
+            <a:solidFill>
+              <a:prstClr val="black"/>
+            </a:solidFill>
+          </a:ln>
+        </p:spPr>
+        <p:txBody>
+          <a:bodyPr vert="horz" lIns="91440" tIns="45720" rIns="91440" bIns="45720" rtlCol="0" anchor="ctr"/>
+          <a:lstStyle/>
+          <a:p>
+            <a:endParaRPr lang="zh-CN" altLang="en-US"/>
+          </a:p>
+        </p:txBody>
+      </p:sp>
+      <p:sp>
+        <p:nvSpPr>
+          <p:cNvPr id="5" name="备注占位符 4"/>
+          <p:cNvSpPr>
+            <a:spLocks noGrp="1"/>
+          </p:cNvSpPr>
+          <p:nvPr>
+            <p:ph type="body" sz="quarter" idx="3"/>
+          </p:nvPr>
+        </p:nvSpPr>
+        <p:spPr>
+          <a:xfrm>
+            <a:off x="685800" y="4400550"/>
+            <a:ext cx="5486400" cy="3600450"/>
+          </a:xfrm>
+          <a:prstGeom prst="rect">
+            <a:avLst/>
+          </a:prstGeom>
+        </p:spPr>
+        <p:txBody>
+          <a:bodyPr vert="horz" lIns="91440" tIns="45720" rIns="91440" bIns="45720" rtlCol="0"/>
+          <a:lstStyle/>
+          <a:p>
+            <a:pPr lvl="0"/>
+            <a:r>
+              <a:rPr lang="zh-CN" altLang="en-US"/>
+              <a:t>单击此处编辑母版文本样式</a:t>
+            </a:r>
+          </a:p>
+          <a:p>
+            <a:pPr lvl="1"/>
+            <a:r>
+              <a:rPr lang="zh-CN" altLang="en-US"/>
+              <a:t>二级</a:t>
+            </a:r>
+          </a:p>
+          <a:p>
+            <a:pPr lvl="2"/>
+            <a:r>
+              <a:rPr lang="zh-CN" altLang="en-US"/>
+              <a:t>三级</a:t>
+            </a:r>
+          </a:p>
+          <a:p>
+            <a:pPr lvl="3"/>
+            <a:r>
+              <a:rPr lang="zh-CN" altLang="en-US"/>
+              <a:t>四级</a:t>
+            </a:r>
+          </a:p>
+          <a:p>
+            <a:pPr lvl="4"/>
+            <a:r>
+              <a:rPr lang="zh-CN" altLang="en-US"/>
+              <a:t>五级</a:t>
+            </a:r>
+          </a:p>
+        </p:txBody>
+      </p:sp>
+      <p:sp>
+        <p:nvSpPr>
+          <p:cNvPr id="6" name="页脚占位符 5"/>
+          <p:cNvSpPr>
+            <a:spLocks noGrp="1"/>
+          </p:cNvSpPr>
+          <p:nvPr>
+            <p:ph type="ftr" sz="quarter" idx="4"/>
+          </p:nvPr>
+        </p:nvSpPr>
+        <p:spPr>
+          <a:xfrm>
+            <a:off x="0" y="8685213"/>
+            <a:ext cx="2971800" cy="458787"/>
+          </a:xfrm>
+          <a:prstGeom prst="rect">
+            <a:avLst/>
+          </a:prstGeom>
+        </p:spPr>
+        <p:txBody>
+          <a:bodyPr vert="horz" lIns="91440" tIns="45720" rIns="91440" bIns="45720" rtlCol="0" anchor="b"/>
+          <a:lstStyle>
+            <a:lvl1pPr algn="l">
+              <a:defRPr sz="1200"/>
+            </a:lvl1pPr>
+          </a:lstStyle>
+          <a:p>
+            <a:endParaRPr lang="zh-CN" altLang="en-US"/>
+          </a:p>
+        </p:txBody>
+      </p:sp>
+      <p:sp>
+        <p:nvSpPr>
+          <p:cNvPr id="7" name="灯片编号占位符 6"/>
+          <p:cNvSpPr>
+            <a:spLocks noGrp="1"/>
+          </p:cNvSpPr>
+          <p:nvPr>
+            <p:ph type="sldNum" sz="quarter" idx="5"/>
+          </p:nvPr>
+        </p:nvSpPr>
+        <p:spPr>
+          <a:xfrm>
+            <a:off x="3884613" y="8685213"/>
+            <a:ext cx="2971800" cy="458787"/>
+          </a:xfrm>
+          <a:prstGeom prst="rect">
+            <a:avLst/>
+          </a:prstGeom>
+        </p:spPr>
+        <p:txBody>
+          <a:bodyPr vert="horz" lIns="91440" tIns="45720" rIns="91440" bIns="45720" rtlCol="0" anchor="b"/>
+          <a:lstStyle>
+            <a:lvl1pPr algn="r">
+              <a:defRPr sz="1200"/>
+            </a:lvl1pPr>
+          </a:lstStyle>
+          <a:p>
+            <a:fld id="{905DAC7A-F20D-49C8-A8BA-54352F970F57}" type="slidenum">
+              <a:rPr lang="zh-CN" altLang="en-US" smtClean="0"/>
+              <a:t>‹#›</a:t>
+            </a:fld>
+            <a:endParaRPr lang="zh-CN" altLang="en-US"/>
+          </a:p>
+        </p:txBody>
+      </p:sp>
+    </p:spTree>
+    <p:extLst>
+      <p:ext uri="{BB962C8B-B14F-4D97-AF65-F5344CB8AC3E}">
+        <p14:creationId xmlns:p14="http://schemas.microsoft.com/office/powerpoint/2010/main" val="4005840702"/>
+      </p:ext>
+    </p:extLst>
+  </p:cSld>
+  <p:clrMap bg1="lt1" tx1="dk1" bg2="lt2" tx2="dk2" accent1="accent1" accent2="accent2" accent3="accent3" accent4="accent4" accent5="accent5" accent6="accent6" hlink="hlink" folHlink="folHlink"/>
+  <p:notesStyle>
+    <a:lvl1pPr marL="0" algn="l" defTabSz="914400" rtl="0" eaLnBrk="1" latinLnBrk="0" hangingPunct="1">
+      <a:defRPr sz="1200" kern="1200">
+        <a:solidFill>
+          <a:schemeClr val="tx1"/>
+        </a:solidFill>
+        <a:latin typeface="+mn-lt"/>
+        <a:ea typeface="+mn-ea"/>
+        <a:cs typeface="+mn-cs"/>
+      </a:defRPr>
+    </a:lvl1pPr>
+    <a:lvl2pPr marL="457200" algn="l" defTabSz="914400" rtl="0" eaLnBrk="1" latinLnBrk="0" hangingPunct="1">
+      <a:defRPr sz="1200" kern="1200">
+        <a:solidFill>
+          <a:schemeClr val="tx1"/>
+        </a:solidFill>
+        <a:latin typeface="+mn-lt"/>
+        <a:ea typeface="+mn-ea"/>
+        <a:cs typeface="+mn-cs"/>
+      </a:defRPr>
+    </a:lvl2pPr>
+    <a:lvl3pPr marL="914400" algn="l" defTabSz="914400" rtl="0" eaLnBrk="1" latinLnBrk="0" hangingPunct="1">
+      <a:defRPr sz="1200" kern="1200">
+        <a:solidFill>
+          <a:schemeClr val="tx1"/>
+        </a:solidFill>
+        <a:latin typeface="+mn-lt"/>
+        <a:ea typeface="+mn-ea"/>
+        <a:cs typeface="+mn-cs"/>
+      </a:defRPr>
+    </a:lvl3pPr>
+    <a:lvl4pPr marL="1371600" algn="l" defTabSz="914400" rtl="0" eaLnBrk="1" latinLnBrk="0" hangingPunct="1">
+      <a:defRPr sz="1200" kern="1200">
+        <a:solidFill>
+          <a:schemeClr val="tx1"/>
+        </a:solidFill>
+        <a:latin typeface="+mn-lt"/>
+        <a:ea typeface="+mn-ea"/>
+        <a:cs typeface="+mn-cs"/>
+      </a:defRPr>
+    </a:lvl4pPr>
+    <a:lvl5pPr marL="1828800" algn="l" defTabSz="914400" rtl="0" eaLnBrk="1" latinLnBrk="0" hangingPunct="1">
+      <a:defRPr sz="1200" kern="1200">
+        <a:solidFill>
+          <a:schemeClr val="tx1"/>
+        </a:solidFill>
+        <a:latin typeface="+mn-lt"/>
+        <a:ea typeface="+mn-ea"/>
+        <a:cs typeface="+mn-cs"/>
+      </a:defRPr>
+    </a:lvl5pPr>
+    <a:lvl6pPr marL="2286000" algn="l" defTabSz="914400" rtl="0" eaLnBrk="1" latinLnBrk="0" hangingPunct="1">
+      <a:defRPr sz="1200" kern="1200">
+        <a:solidFill>
+          <a:schemeClr val="tx1"/>
+        </a:solidFill>
+        <a:latin typeface="+mn-lt"/>
+        <a:ea typeface="+mn-ea"/>
+        <a:cs typeface="+mn-cs"/>
+      </a:defRPr>
+    </a:lvl6pPr>
+    <a:lvl7pPr marL="2743200" algn="l" defTabSz="914400" rtl="0" eaLnBrk="1" latinLnBrk="0" hangingPunct="1">
+      <a:defRPr sz="1200" kern="1200">
+        <a:solidFill>
+          <a:schemeClr val="tx1"/>
+        </a:solidFill>
+        <a:latin typeface="+mn-lt"/>
+        <a:ea typeface="+mn-ea"/>
+        <a:cs typeface="+mn-cs"/>
+      </a:defRPr>
+    </a:lvl7pPr>
+    <a:lvl8pPr marL="3200400" algn="l" defTabSz="914400" rtl="0" eaLnBrk="1" latinLnBrk="0" hangingPunct="1">
+      <a:defRPr sz="1200" kern="1200">
+        <a:solidFill>
+          <a:schemeClr val="tx1"/>
+        </a:solidFill>
+        <a:latin typeface="+mn-lt"/>
+        <a:ea typeface="+mn-ea"/>
+        <a:cs typeface="+mn-cs"/>
+      </a:defRPr>
+    </a:lvl8pPr>
+    <a:lvl9pPr marL="3657600" algn="l" defTabSz="914400" rtl="0" eaLnBrk="1" latinLnBrk="0" hangingPunct="1">
+      <a:defRPr sz="1200" kern="1200">
+        <a:solidFill>
+          <a:schemeClr val="tx1"/>
+        </a:solidFill>
+        <a:latin typeface="+mn-lt"/>
+        <a:ea typeface="+mn-ea"/>
+        <a:cs typeface="+mn-cs"/>
+      </a:defRPr>
+    </a:lvl9pPr>
+  </p:notesStyle>
+</p:notesMaster>
+</file>
+
+<file path=ppt/notesSlides/notesSlide1.xml><?xml version="1.0" encoding="utf-8"?>
+<p:notes xmlns:a="http://schemas.openxmlformats.org/drawingml/2006/main" xmlns:r="http://schemas.openxmlformats.org/officeDocument/2006/relationships" xmlns:p="http://schemas.openxmlformats.org/presentationml/2006/main">
+  <p:cSld>
+    <p:spTree>
+      <p:nvGrpSpPr>
+        <p:cNvPr id="1" name=""/>
+        <p:cNvGrpSpPr/>
+        <p:nvPr/>
+      </p:nvGrpSpPr>
+      <p:grpSpPr>
+        <a:xfrm>
+          <a:off x="0" y="0"/>
+          <a:ext cx="0" cy="0"/>
+          <a:chOff x="0" y="0"/>
+          <a:chExt cx="0" cy="0"/>
+        </a:xfrm>
+      </p:grpSpPr>
+      <p:sp>
+        <p:nvSpPr>
+          <p:cNvPr id="2" name="Slide Image Placeholder 1"/>
+          <p:cNvSpPr>
+            <a:spLocks noGrp="1" noRot="1" noChangeAspect="1"/>
+          </p:cNvSpPr>
+          <p:nvPr>
+            <p:ph type="sldImg"/>
+          </p:nvPr>
+        </p:nvSpPr>
+        <p:spPr/>
+      </p:sp>
+      <p:sp>
+        <p:nvSpPr>
+          <p:cNvPr id="3" name="Notes Placeholder 2"/>
+          <p:cNvSpPr>
+            <a:spLocks noGrp="1"/>
+          </p:cNvSpPr>
+          <p:nvPr>
+            <p:ph type="body" idx="1"/>
+          </p:nvPr>
+        </p:nvSpPr>
+        <p:spPr/>
+        <p:txBody>
+          <a:bodyPr/>
+          <a:lstStyle/>
+          <a:p>
+            <a:endParaRPr lang="en-US" dirty="0"/>
+          </a:p>
+        </p:txBody>
+      </p:sp>
+      <p:sp>
+        <p:nvSpPr>
+          <p:cNvPr id="4" name="Slide Number Placeholder 3"/>
+          <p:cNvSpPr>
+            <a:spLocks noGrp="1"/>
+          </p:cNvSpPr>
+          <p:nvPr>
+            <p:ph type="sldNum" sz="quarter" idx="10"/>
+          </p:nvPr>
+        </p:nvSpPr>
+        <p:spPr/>
+        <p:txBody>
+          <a:bodyPr/>
+          <a:lstStyle/>
+          <a:p>
+            <a:fld id="{F7021451-1387-4CA6-816F-3879F97B5CBC}" type="slidenum">
+              <a:rPr lang="en-US"/>
+              <a:t>1</a:t>
+            </a:fld>
+            <a:endParaRPr lang="en-US"/>
+          </a:p>
+        </p:txBody>
+      </p:sp>
+    </p:spTree>
+    <p:extLst>
+      <p:ext uri="{BB962C8B-B14F-4D97-AF65-F5344CB8AC3E}">
+        <p14:creationId xmlns:p14="http://schemas.microsoft.com/office/powerpoint/2010/main" val="1616031105"/>
+      </p:ext>
+    </p:extLst>
+  </p:cSld>
+  <p:clrMapOvr>
+    <a:masterClrMapping/>
+  </p:clrMapOvr>
+</p:notes>
+</file>
+
+<file path=ppt/notesSlides/notesSlide2.xml><?xml version="1.0" encoding="utf-8"?>
+<p:notes xmlns:a="http://schemas.openxmlformats.org/drawingml/2006/main" xmlns:r="http://schemas.openxmlformats.org/officeDocument/2006/relationships" xmlns:p="http://schemas.openxmlformats.org/presentationml/2006/main">
+  <p:cSld>
+    <p:spTree>
+      <p:nvGrpSpPr>
+        <p:cNvPr id="1" name=""/>
+        <p:cNvGrpSpPr/>
+        <p:nvPr/>
+      </p:nvGrpSpPr>
+      <p:grpSpPr>
+        <a:xfrm>
+          <a:off x="0" y="0"/>
+          <a:ext cx="0" cy="0"/>
+          <a:chOff x="0" y="0"/>
+          <a:chExt cx="0" cy="0"/>
+        </a:xfrm>
+      </p:grpSpPr>
+      <p:sp>
+        <p:nvSpPr>
+          <p:cNvPr id="2" name="Slide Image Placeholder 1"/>
+          <p:cNvSpPr>
+            <a:spLocks noGrp="1" noRot="1" noChangeAspect="1"/>
+          </p:cNvSpPr>
+          <p:nvPr>
+            <p:ph type="sldImg"/>
+          </p:nvPr>
+        </p:nvSpPr>
+        <p:spPr/>
+      </p:sp>
+      <p:sp>
+        <p:nvSpPr>
+          <p:cNvPr id="3" name="Notes Placeholder 2"/>
+          <p:cNvSpPr>
+            <a:spLocks noGrp="1"/>
+          </p:cNvSpPr>
+          <p:nvPr>
+            <p:ph type="body" idx="1"/>
+          </p:nvPr>
+        </p:nvSpPr>
+        <p:spPr/>
+        <p:txBody>
+          <a:bodyPr/>
+          <a:lstStyle/>
+          <a:p>
+            <a:endParaRPr lang="en-US" dirty="0"/>
+          </a:p>
+        </p:txBody>
+      </p:sp>
+      <p:sp>
+        <p:nvSpPr>
+          <p:cNvPr id="4" name="Slide Number Placeholder 3"/>
+          <p:cNvSpPr>
+            <a:spLocks noGrp="1"/>
+          </p:cNvSpPr>
+          <p:nvPr>
+            <p:ph type="sldNum" sz="quarter" idx="10"/>
+          </p:nvPr>
+        </p:nvSpPr>
+        <p:spPr/>
+        <p:txBody>
+          <a:bodyPr/>
+          <a:lstStyle/>
+          <a:p>
+            <a:fld id="{F7021451-1387-4CA6-816F-3879F97B5CBC}" type="slidenum">
+              <a:rPr lang="en-US"/>
+              <a:t>2</a:t>
+            </a:fld>
+            <a:endParaRPr lang="en-US"/>
+          </a:p>
+        </p:txBody>
+      </p:sp>
+    </p:spTree>
+    <p:extLst>
+      <p:ext uri="{BB962C8B-B14F-4D97-AF65-F5344CB8AC3E}">
+        <p14:creationId xmlns:p14="http://schemas.microsoft.com/office/powerpoint/2010/main" val="1024086991"/>
+      </p:ext>
+    </p:extLst>
+  </p:cSld>
+  <p:clrMapOvr>
+    <a:masterClrMapping/>
+  </p:clrMapOvr>
+</p:notes>
 </file>
 
 <file path=ppt/slideLayouts/slideLayout1.xml><?xml version="1.0" encoding="utf-8"?>
@@ -726,6 +1253,36 @@
         <p14:creationId xmlns:p14="http://schemas.microsoft.com/office/powerpoint/2010/main" val="2289793850"/>
       </p:ext>
     </p:extLst>
+  </p:cSld>
+  <p:clrMapOvr>
+    <a:masterClrMapping/>
+  </p:clrMapOvr>
+</p:sldLayout>
+</file>
+
+<file path=ppt/slideLayouts/slideLayout12.xml><?xml version="1.0" encoding="utf-8"?>
+<p:sldLayout xmlns:a="http://schemas.openxmlformats.org/drawingml/2006/main" xmlns:r="http://schemas.openxmlformats.org/officeDocument/2006/relationships" xmlns:p="http://schemas.openxmlformats.org/presentationml/2006/main" preserve="1">
+  <p:cSld name="DEFAULT">
+    <p:bg>
+      <p:bgRef idx="1001">
+        <a:schemeClr val="bg1"/>
+      </p:bgRef>
+    </p:bg>
+    <p:spTree>
+      <p:nvGrpSpPr>
+        <p:cNvPr id="1" name=""/>
+        <p:cNvGrpSpPr/>
+        <p:nvPr/>
+      </p:nvGrpSpPr>
+      <p:grpSpPr>
+        <a:xfrm>
+          <a:off x="0" y="0"/>
+          <a:ext cx="0" cy="0"/>
+          <a:chOff x="0" y="0"/>
+          <a:chExt cx="0" cy="0"/>
+        </a:xfrm>
+      </p:grpSpPr>
+    </p:spTree>
   </p:cSld>
   <p:clrMapOvr>
     <a:masterClrMapping/>
@@ -3009,7 +3566,7 @@
   </p:cSld>
   <p:clrMap bg1="lt1" tx1="dk1" bg2="lt2" tx2="dk2" accent1="accent1" accent2="accent2" accent3="accent3" accent4="accent4" accent5="accent5" accent6="accent6" hlink="hlink" folHlink="folHlink"/>
   <p:sldLayoutIdLst>
-    <p:sldLayoutId id="2147483649" r:id="rId1"/>
+    <p:sldLayoutId id="2147483661" r:id="rId1"/>
     <p:sldLayoutId id="2147483650" r:id="rId2"/>
     <p:sldLayoutId id="2147483651" r:id="rId3"/>
     <p:sldLayoutId id="2147483652" r:id="rId4"/>
@@ -3208,6 +3765,288 @@
     <p:otherStyle>
       <a:defPPr>
         <a:defRPr lang="zh-CN"/>
+      </a:defPPr>
+      <a:lvl1pPr marL="0" algn="l" defTabSz="914400" rtl="0" eaLnBrk="1" latinLnBrk="0" hangingPunct="1">
+        <a:defRPr sz="1800" kern="1200">
+          <a:solidFill>
+            <a:schemeClr val="tx1"/>
+          </a:solidFill>
+          <a:latin typeface="+mn-lt"/>
+          <a:ea typeface="+mn-ea"/>
+          <a:cs typeface="+mn-cs"/>
+        </a:defRPr>
+      </a:lvl1pPr>
+      <a:lvl2pPr marL="457200" algn="l" defTabSz="914400" rtl="0" eaLnBrk="1" latinLnBrk="0" hangingPunct="1">
+        <a:defRPr sz="1800" kern="1200">
+          <a:solidFill>
+            <a:schemeClr val="tx1"/>
+          </a:solidFill>
+          <a:latin typeface="+mn-lt"/>
+          <a:ea typeface="+mn-ea"/>
+          <a:cs typeface="+mn-cs"/>
+        </a:defRPr>
+      </a:lvl2pPr>
+      <a:lvl3pPr marL="914400" algn="l" defTabSz="914400" rtl="0" eaLnBrk="1" latinLnBrk="0" hangingPunct="1">
+        <a:defRPr sz="1800" kern="1200">
+          <a:solidFill>
+            <a:schemeClr val="tx1"/>
+          </a:solidFill>
+          <a:latin typeface="+mn-lt"/>
+          <a:ea typeface="+mn-ea"/>
+          <a:cs typeface="+mn-cs"/>
+        </a:defRPr>
+      </a:lvl3pPr>
+      <a:lvl4pPr marL="1371600" algn="l" defTabSz="914400" rtl="0" eaLnBrk="1" latinLnBrk="0" hangingPunct="1">
+        <a:defRPr sz="1800" kern="1200">
+          <a:solidFill>
+            <a:schemeClr val="tx1"/>
+          </a:solidFill>
+          <a:latin typeface="+mn-lt"/>
+          <a:ea typeface="+mn-ea"/>
+          <a:cs typeface="+mn-cs"/>
+        </a:defRPr>
+      </a:lvl4pPr>
+      <a:lvl5pPr marL="1828800" algn="l" defTabSz="914400" rtl="0" eaLnBrk="1" latinLnBrk="0" hangingPunct="1">
+        <a:defRPr sz="1800" kern="1200">
+          <a:solidFill>
+            <a:schemeClr val="tx1"/>
+          </a:solidFill>
+          <a:latin typeface="+mn-lt"/>
+          <a:ea typeface="+mn-ea"/>
+          <a:cs typeface="+mn-cs"/>
+        </a:defRPr>
+      </a:lvl5pPr>
+      <a:lvl6pPr marL="2286000" algn="l" defTabSz="914400" rtl="0" eaLnBrk="1" latinLnBrk="0" hangingPunct="1">
+        <a:defRPr sz="1800" kern="1200">
+          <a:solidFill>
+            <a:schemeClr val="tx1"/>
+          </a:solidFill>
+          <a:latin typeface="+mn-lt"/>
+          <a:ea typeface="+mn-ea"/>
+          <a:cs typeface="+mn-cs"/>
+        </a:defRPr>
+      </a:lvl6pPr>
+      <a:lvl7pPr marL="2743200" algn="l" defTabSz="914400" rtl="0" eaLnBrk="1" latinLnBrk="0" hangingPunct="1">
+        <a:defRPr sz="1800" kern="1200">
+          <a:solidFill>
+            <a:schemeClr val="tx1"/>
+          </a:solidFill>
+          <a:latin typeface="+mn-lt"/>
+          <a:ea typeface="+mn-ea"/>
+          <a:cs typeface="+mn-cs"/>
+        </a:defRPr>
+      </a:lvl7pPr>
+      <a:lvl8pPr marL="3200400" algn="l" defTabSz="914400" rtl="0" eaLnBrk="1" latinLnBrk="0" hangingPunct="1">
+        <a:defRPr sz="1800" kern="1200">
+          <a:solidFill>
+            <a:schemeClr val="tx1"/>
+          </a:solidFill>
+          <a:latin typeface="+mn-lt"/>
+          <a:ea typeface="+mn-ea"/>
+          <a:cs typeface="+mn-cs"/>
+        </a:defRPr>
+      </a:lvl8pPr>
+      <a:lvl9pPr marL="3657600" algn="l" defTabSz="914400" rtl="0" eaLnBrk="1" latinLnBrk="0" hangingPunct="1">
+        <a:defRPr sz="1800" kern="1200">
+          <a:solidFill>
+            <a:schemeClr val="tx1"/>
+          </a:solidFill>
+          <a:latin typeface="+mn-lt"/>
+          <a:ea typeface="+mn-ea"/>
+          <a:cs typeface="+mn-cs"/>
+        </a:defRPr>
+      </a:lvl9pPr>
+    </p:otherStyle>
+  </p:txStyles>
+</p:sldMaster>
+</file>
+
+<file path=ppt/slideMasters/slideMaster2.xml><?xml version="1.0" encoding="utf-8"?>
+<p:sldMaster xmlns:a="http://schemas.openxmlformats.org/drawingml/2006/main" xmlns:r="http://schemas.openxmlformats.org/officeDocument/2006/relationships" xmlns:p="http://schemas.openxmlformats.org/presentationml/2006/main">
+  <p:cSld>
+    <p:bg>
+      <p:bgRef idx="1001">
+        <a:schemeClr val="bg1"/>
+      </p:bgRef>
+    </p:bg>
+    <p:spTree>
+      <p:nvGrpSpPr>
+        <p:cNvPr id="1" name=""/>
+        <p:cNvGrpSpPr/>
+        <p:nvPr/>
+      </p:nvGrpSpPr>
+      <p:grpSpPr>
+        <a:xfrm>
+          <a:off x="0" y="0"/>
+          <a:ext cx="0" cy="0"/>
+          <a:chOff x="0" y="0"/>
+          <a:chExt cx="0" cy="0"/>
+        </a:xfrm>
+      </p:grpSpPr>
+    </p:spTree>
+  </p:cSld>
+  <p:clrMap bg1="lt1" tx1="dk1" bg2="lt2" tx2="dk2" accent1="accent1" accent2="accent2" accent3="accent3" accent4="accent4" accent5="accent5" accent6="accent6" hlink="hlink" folHlink="folHlink"/>
+  <p:sldLayoutIdLst>
+    <p:sldLayoutId id="2147483649" r:id="rId1"/>
+  </p:sldLayoutIdLst>
+  <p:hf sldNum="0" hdr="0" ftr="0" dt="0"/>
+  <p:txStyles>
+    <p:titleStyle>
+      <a:lvl1pPr algn="ctr" defTabSz="914400" rtl="0" eaLnBrk="1" latinLnBrk="0" hangingPunct="1">
+        <a:spcBef>
+          <a:spcPct val="0"/>
+        </a:spcBef>
+        <a:buNone/>
+        <a:defRPr sz="4400" kern="1200">
+          <a:solidFill>
+            <a:schemeClr val="tx1"/>
+          </a:solidFill>
+          <a:latin typeface="+mj-lt"/>
+          <a:ea typeface="+mj-ea"/>
+          <a:cs typeface="+mj-cs"/>
+        </a:defRPr>
+      </a:lvl1pPr>
+    </p:titleStyle>
+    <p:bodyStyle>
+      <a:lvl1pPr marL="342900" indent="-342900" algn="l" defTabSz="914400" rtl="0" eaLnBrk="1" latinLnBrk="0" hangingPunct="1">
+        <a:spcBef>
+          <a:spcPct val="20000"/>
+        </a:spcBef>
+        <a:buFont typeface="Arial" pitchFamily="34" charset="0"/>
+        <a:buChar char="•"/>
+        <a:defRPr sz="3200" kern="1200">
+          <a:solidFill>
+            <a:schemeClr val="tx1"/>
+          </a:solidFill>
+          <a:latin typeface="+mn-lt"/>
+          <a:ea typeface="+mn-ea"/>
+          <a:cs typeface="+mn-cs"/>
+        </a:defRPr>
+      </a:lvl1pPr>
+      <a:lvl2pPr marL="742950" indent="-285750" algn="l" defTabSz="914400" rtl="0" eaLnBrk="1" latinLnBrk="0" hangingPunct="1">
+        <a:spcBef>
+          <a:spcPct val="20000"/>
+        </a:spcBef>
+        <a:buFont typeface="Arial" pitchFamily="34" charset="0"/>
+        <a:buChar char="–"/>
+        <a:defRPr sz="2800" kern="1200">
+          <a:solidFill>
+            <a:schemeClr val="tx1"/>
+          </a:solidFill>
+          <a:latin typeface="+mn-lt"/>
+          <a:ea typeface="+mn-ea"/>
+          <a:cs typeface="+mn-cs"/>
+        </a:defRPr>
+      </a:lvl2pPr>
+      <a:lvl3pPr marL="1143000" indent="-228600" algn="l" defTabSz="914400" rtl="0" eaLnBrk="1" latinLnBrk="0" hangingPunct="1">
+        <a:spcBef>
+          <a:spcPct val="20000"/>
+        </a:spcBef>
+        <a:buFont typeface="Arial" pitchFamily="34" charset="0"/>
+        <a:buChar char="•"/>
+        <a:defRPr sz="2400" kern="1200">
+          <a:solidFill>
+            <a:schemeClr val="tx1"/>
+          </a:solidFill>
+          <a:latin typeface="+mn-lt"/>
+          <a:ea typeface="+mn-ea"/>
+          <a:cs typeface="+mn-cs"/>
+        </a:defRPr>
+      </a:lvl3pPr>
+      <a:lvl4pPr marL="1600200" indent="-228600" algn="l" defTabSz="914400" rtl="0" eaLnBrk="1" latinLnBrk="0" hangingPunct="1">
+        <a:spcBef>
+          <a:spcPct val="20000"/>
+        </a:spcBef>
+        <a:buFont typeface="Arial" pitchFamily="34" charset="0"/>
+        <a:buChar char="–"/>
+        <a:defRPr sz="2000" kern="1200">
+          <a:solidFill>
+            <a:schemeClr val="tx1"/>
+          </a:solidFill>
+          <a:latin typeface="+mn-lt"/>
+          <a:ea typeface="+mn-ea"/>
+          <a:cs typeface="+mn-cs"/>
+        </a:defRPr>
+      </a:lvl4pPr>
+      <a:lvl5pPr marL="2057400" indent="-228600" algn="l" defTabSz="914400" rtl="0" eaLnBrk="1" latinLnBrk="0" hangingPunct="1">
+        <a:spcBef>
+          <a:spcPct val="20000"/>
+        </a:spcBef>
+        <a:buFont typeface="Arial" pitchFamily="34" charset="0"/>
+        <a:buChar char="»"/>
+        <a:defRPr sz="2000" kern="1200">
+          <a:solidFill>
+            <a:schemeClr val="tx1"/>
+          </a:solidFill>
+          <a:latin typeface="+mn-lt"/>
+          <a:ea typeface="+mn-ea"/>
+          <a:cs typeface="+mn-cs"/>
+        </a:defRPr>
+      </a:lvl5pPr>
+      <a:lvl6pPr marL="2514600" indent="-228600" algn="l" defTabSz="914400" rtl="0" eaLnBrk="1" latinLnBrk="0" hangingPunct="1">
+        <a:spcBef>
+          <a:spcPct val="20000"/>
+        </a:spcBef>
+        <a:buFont typeface="Arial" pitchFamily="34" charset="0"/>
+        <a:buChar char="•"/>
+        <a:defRPr sz="2000" kern="1200">
+          <a:solidFill>
+            <a:schemeClr val="tx1"/>
+          </a:solidFill>
+          <a:latin typeface="+mn-lt"/>
+          <a:ea typeface="+mn-ea"/>
+          <a:cs typeface="+mn-cs"/>
+        </a:defRPr>
+      </a:lvl6pPr>
+      <a:lvl7pPr marL="2971800" indent="-228600" algn="l" defTabSz="914400" rtl="0" eaLnBrk="1" latinLnBrk="0" hangingPunct="1">
+        <a:spcBef>
+          <a:spcPct val="20000"/>
+        </a:spcBef>
+        <a:buFont typeface="Arial" pitchFamily="34" charset="0"/>
+        <a:buChar char="•"/>
+        <a:defRPr sz="2000" kern="1200">
+          <a:solidFill>
+            <a:schemeClr val="tx1"/>
+          </a:solidFill>
+          <a:latin typeface="+mn-lt"/>
+          <a:ea typeface="+mn-ea"/>
+          <a:cs typeface="+mn-cs"/>
+        </a:defRPr>
+      </a:lvl7pPr>
+      <a:lvl8pPr marL="3429000" indent="-228600" algn="l" defTabSz="914400" rtl="0" eaLnBrk="1" latinLnBrk="0" hangingPunct="1">
+        <a:spcBef>
+          <a:spcPct val="20000"/>
+        </a:spcBef>
+        <a:buFont typeface="Arial" pitchFamily="34" charset="0"/>
+        <a:buChar char="•"/>
+        <a:defRPr sz="2000" kern="1200">
+          <a:solidFill>
+            <a:schemeClr val="tx1"/>
+          </a:solidFill>
+          <a:latin typeface="+mn-lt"/>
+          <a:ea typeface="+mn-ea"/>
+          <a:cs typeface="+mn-cs"/>
+        </a:defRPr>
+      </a:lvl8pPr>
+      <a:lvl9pPr marL="3886200" indent="-228600" algn="l" defTabSz="914400" rtl="0" eaLnBrk="1" latinLnBrk="0" hangingPunct="1">
+        <a:spcBef>
+          <a:spcPct val="20000"/>
+        </a:spcBef>
+        <a:buFont typeface="Arial" pitchFamily="34" charset="0"/>
+        <a:buChar char="•"/>
+        <a:defRPr sz="2000" kern="1200">
+          <a:solidFill>
+            <a:schemeClr val="tx1"/>
+          </a:solidFill>
+          <a:latin typeface="+mn-lt"/>
+          <a:ea typeface="+mn-ea"/>
+          <a:cs typeface="+mn-cs"/>
+        </a:defRPr>
+      </a:lvl9pPr>
+    </p:bodyStyle>
+    <p:otherStyle>
+      <a:defPPr>
+        <a:defRPr lang="en-US"/>
       </a:defPPr>
       <a:lvl1pPr marL="0" algn="l" defTabSz="914400" rtl="0" eaLnBrk="1" latinLnBrk="0" hangingPunct="1">
         <a:defRPr sz="1800" kern="1200">
@@ -3321,10 +4160,5546 @@
           <a:chExt cx="0" cy="0"/>
         </a:xfrm>
       </p:grpSpPr>
+      <p:sp>
+        <p:nvSpPr>
+          <p:cNvPr id="2" name="Shape 0"/>
+          <p:cNvSpPr/>
+          <p:nvPr/>
+        </p:nvSpPr>
+        <p:spPr>
+          <a:xfrm>
+            <a:off x="0" y="0"/>
+            <a:ext cx="12191695" cy="6858000"/>
+          </a:xfrm>
+          <a:prstGeom prst="rect">
+            <a:avLst/>
+          </a:prstGeom>
+          <a:solidFill>
+            <a:srgbClr val="F3F7FC"/>
+          </a:solidFill>
+          <a:ln w="12700">
+            <a:solidFill>
+              <a:srgbClr val="FFFFFF">
+                <a:alpha val="0"/>
+              </a:srgbClr>
+            </a:solidFill>
+            <a:prstDash val="solid"/>
+          </a:ln>
+        </p:spPr>
+      </p:sp>
+      <p:sp>
+        <p:nvSpPr>
+          <p:cNvPr id="3" name="Shape 1"/>
+          <p:cNvSpPr/>
+          <p:nvPr/>
+        </p:nvSpPr>
+        <p:spPr>
+          <a:xfrm>
+            <a:off x="0" y="0"/>
+            <a:ext cx="12191695" cy="457200"/>
+          </a:xfrm>
+          <a:prstGeom prst="rect">
+            <a:avLst/>
+          </a:prstGeom>
+          <a:solidFill>
+            <a:srgbClr val="F9FCFF"/>
+          </a:solidFill>
+          <a:ln w="12700">
+            <a:solidFill>
+              <a:srgbClr val="FFFFFF">
+                <a:alpha val="0"/>
+              </a:srgbClr>
+            </a:solidFill>
+            <a:prstDash val="solid"/>
+          </a:ln>
+        </p:spPr>
+      </p:sp>
+      <p:sp>
+        <p:nvSpPr>
+          <p:cNvPr id="4" name="Shape 2"/>
+          <p:cNvSpPr/>
+          <p:nvPr/>
+        </p:nvSpPr>
+        <p:spPr>
+          <a:xfrm>
+            <a:off x="0" y="452437"/>
+            <a:ext cx="12191695" cy="0"/>
+          </a:xfrm>
+          <a:prstGeom prst="line">
+            <a:avLst/>
+          </a:prstGeom>
+          <a:solidFill>
+            <a:srgbClr val="FFFFFF">
+              <a:alpha val="0"/>
+            </a:srgbClr>
+          </a:solidFill>
+          <a:ln w="9525">
+            <a:solidFill>
+              <a:srgbClr val="D8E4F4"/>
+            </a:solidFill>
+            <a:prstDash val="solid"/>
+          </a:ln>
+        </p:spPr>
+      </p:sp>
+      <p:sp>
+        <p:nvSpPr>
+          <p:cNvPr id="5" name="Text 3"/>
+          <p:cNvSpPr/>
+          <p:nvPr/>
+        </p:nvSpPr>
+        <p:spPr>
+          <a:xfrm>
+            <a:off x="552436" y="123825"/>
+            <a:ext cx="1257269" cy="152400"/>
+          </a:xfrm>
+          <a:prstGeom prst="rect">
+            <a:avLst/>
+          </a:prstGeom>
+          <a:noFill/>
+          <a:ln/>
+        </p:spPr>
+        <p:txBody>
+          <a:bodyPr wrap="square" lIns="0" tIns="0" rIns="0" bIns="0" rtlCol="0" anchor="t">
+            <a:normAutofit fontScale="92500"/>
+          </a:bodyPr>
+          <a:lstStyle/>
+          <a:p>
+            <a:pPr marL="0" indent="0" algn="l">
+              <a:buNone/>
+            </a:pPr>
+            <a:r>
+              <a:rPr lang="en-US" sz="900" b="1" dirty="0">
+                <a:solidFill>
+                  <a:srgbClr val="172033"/>
+                </a:solidFill>
+                <a:latin typeface="Microsoft YaHei" pitchFamily="34" charset="0"/>
+                <a:ea typeface="Microsoft YaHei" pitchFamily="34" charset="-122"/>
+                <a:cs typeface="Microsoft YaHei" pitchFamily="34" charset="-120"/>
+              </a:rPr>
+              <a:t>本地机器人数字孪生工具</a:t>
+            </a:r>
+            <a:endParaRPr lang="en-US" sz="900" dirty="0"/>
+          </a:p>
+        </p:txBody>
+      </p:sp>
+      <p:sp>
+        <p:nvSpPr>
+          <p:cNvPr id="6" name="Text 4"/>
+          <p:cNvSpPr/>
+          <p:nvPr/>
+        </p:nvSpPr>
+        <p:spPr>
+          <a:xfrm>
+            <a:off x="2343091" y="142875"/>
+            <a:ext cx="228594" cy="152400"/>
+          </a:xfrm>
+          <a:prstGeom prst="rect">
+            <a:avLst/>
+          </a:prstGeom>
+          <a:noFill/>
+          <a:ln/>
+        </p:spPr>
+        <p:txBody>
+          <a:bodyPr wrap="square" lIns="0" tIns="0" rIns="0" bIns="0" rtlCol="0" anchor="t">
+            <a:normAutofit fontScale="92500"/>
+          </a:bodyPr>
+          <a:lstStyle/>
+          <a:p>
+            <a:pPr marL="0" indent="0" algn="l">
+              <a:buNone/>
+            </a:pPr>
+            <a:r>
+              <a:rPr lang="en-US" sz="900" b="1" dirty="0">
+                <a:solidFill>
+                  <a:srgbClr val="29364B"/>
+                </a:solidFill>
+                <a:latin typeface="Microsoft YaHei" pitchFamily="34" charset="0"/>
+                <a:ea typeface="Microsoft YaHei" pitchFamily="34" charset="-122"/>
+                <a:cs typeface="Microsoft YaHei" pitchFamily="34" charset="-120"/>
+              </a:rPr>
+              <a:t>文件</a:t>
+            </a:r>
+            <a:endParaRPr lang="en-US" sz="900" dirty="0"/>
+          </a:p>
+        </p:txBody>
+      </p:sp>
+      <p:sp>
+        <p:nvSpPr>
+          <p:cNvPr id="7" name="Text 5"/>
+          <p:cNvSpPr/>
+          <p:nvPr/>
+        </p:nvSpPr>
+        <p:spPr>
+          <a:xfrm>
+            <a:off x="3047924" y="142875"/>
+            <a:ext cx="228594" cy="152400"/>
+          </a:xfrm>
+          <a:prstGeom prst="rect">
+            <a:avLst/>
+          </a:prstGeom>
+          <a:noFill/>
+          <a:ln/>
+        </p:spPr>
+        <p:txBody>
+          <a:bodyPr wrap="square" lIns="0" tIns="0" rIns="0" bIns="0" rtlCol="0" anchor="t">
+            <a:normAutofit fontScale="92500"/>
+          </a:bodyPr>
+          <a:lstStyle/>
+          <a:p>
+            <a:pPr marL="0" indent="0" algn="l">
+              <a:buNone/>
+            </a:pPr>
+            <a:r>
+              <a:rPr lang="en-US" sz="900" b="1" dirty="0">
+                <a:solidFill>
+                  <a:srgbClr val="29364B"/>
+                </a:solidFill>
+                <a:latin typeface="Microsoft YaHei" pitchFamily="34" charset="0"/>
+                <a:ea typeface="Microsoft YaHei" pitchFamily="34" charset="-122"/>
+                <a:cs typeface="Microsoft YaHei" pitchFamily="34" charset="-120"/>
+              </a:rPr>
+              <a:t>编辑</a:t>
+            </a:r>
+            <a:endParaRPr lang="en-US" sz="900" dirty="0"/>
+          </a:p>
+        </p:txBody>
+      </p:sp>
+      <p:sp>
+        <p:nvSpPr>
+          <p:cNvPr id="8" name="Text 6"/>
+          <p:cNvSpPr/>
+          <p:nvPr/>
+        </p:nvSpPr>
+        <p:spPr>
+          <a:xfrm>
+            <a:off x="3752756" y="142875"/>
+            <a:ext cx="228594" cy="152400"/>
+          </a:xfrm>
+          <a:prstGeom prst="rect">
+            <a:avLst/>
+          </a:prstGeom>
+          <a:noFill/>
+          <a:ln/>
+        </p:spPr>
+        <p:txBody>
+          <a:bodyPr wrap="square" lIns="0" tIns="0" rIns="0" bIns="0" rtlCol="0" anchor="t">
+            <a:normAutofit fontScale="92500"/>
+          </a:bodyPr>
+          <a:lstStyle/>
+          <a:p>
+            <a:pPr marL="0" indent="0" algn="l">
+              <a:buNone/>
+            </a:pPr>
+            <a:r>
+              <a:rPr lang="en-US" sz="900" b="1" dirty="0">
+                <a:solidFill>
+                  <a:srgbClr val="29364B"/>
+                </a:solidFill>
+                <a:latin typeface="Microsoft YaHei" pitchFamily="34" charset="0"/>
+                <a:ea typeface="Microsoft YaHei" pitchFamily="34" charset="-122"/>
+                <a:cs typeface="Microsoft YaHei" pitchFamily="34" charset="-120"/>
+              </a:rPr>
+              <a:t>查看</a:t>
+            </a:r>
+            <a:endParaRPr lang="en-US" sz="900" dirty="0"/>
+          </a:p>
+        </p:txBody>
+      </p:sp>
+      <p:sp>
+        <p:nvSpPr>
+          <p:cNvPr id="9" name="Text 7"/>
+          <p:cNvSpPr/>
+          <p:nvPr/>
+        </p:nvSpPr>
+        <p:spPr>
+          <a:xfrm>
+            <a:off x="4457589" y="142875"/>
+            <a:ext cx="228594" cy="152400"/>
+          </a:xfrm>
+          <a:prstGeom prst="rect">
+            <a:avLst/>
+          </a:prstGeom>
+          <a:noFill/>
+          <a:ln/>
+        </p:spPr>
+        <p:txBody>
+          <a:bodyPr wrap="square" lIns="0" tIns="0" rIns="0" bIns="0" rtlCol="0" anchor="t">
+            <a:normAutofit fontScale="92500"/>
+          </a:bodyPr>
+          <a:lstStyle/>
+          <a:p>
+            <a:pPr marL="0" indent="0" algn="l">
+              <a:buNone/>
+            </a:pPr>
+            <a:r>
+              <a:rPr lang="en-US" sz="900" b="1" dirty="0">
+                <a:solidFill>
+                  <a:srgbClr val="29364B"/>
+                </a:solidFill>
+                <a:latin typeface="Microsoft YaHei" pitchFamily="34" charset="0"/>
+                <a:ea typeface="Microsoft YaHei" pitchFamily="34" charset="-122"/>
+                <a:cs typeface="Microsoft YaHei" pitchFamily="34" charset="-120"/>
+              </a:rPr>
+              <a:t>视图</a:t>
+            </a:r>
+            <a:endParaRPr lang="en-US" sz="900" dirty="0"/>
+          </a:p>
+        </p:txBody>
+      </p:sp>
+      <p:sp>
+        <p:nvSpPr>
+          <p:cNvPr id="10" name="Text 8"/>
+          <p:cNvSpPr/>
+          <p:nvPr/>
+        </p:nvSpPr>
+        <p:spPr>
+          <a:xfrm>
+            <a:off x="5162421" y="142875"/>
+            <a:ext cx="228594" cy="152400"/>
+          </a:xfrm>
+          <a:prstGeom prst="rect">
+            <a:avLst/>
+          </a:prstGeom>
+          <a:noFill/>
+          <a:ln/>
+        </p:spPr>
+        <p:txBody>
+          <a:bodyPr wrap="square" lIns="0" tIns="0" rIns="0" bIns="0" rtlCol="0" anchor="t">
+            <a:normAutofit fontScale="92500"/>
+          </a:bodyPr>
+          <a:lstStyle/>
+          <a:p>
+            <a:pPr marL="0" indent="0" algn="l">
+              <a:buNone/>
+            </a:pPr>
+            <a:r>
+              <a:rPr lang="en-US" sz="900" b="1" dirty="0">
+                <a:solidFill>
+                  <a:srgbClr val="29364B"/>
+                </a:solidFill>
+                <a:latin typeface="Microsoft YaHei" pitchFamily="34" charset="0"/>
+                <a:ea typeface="Microsoft YaHei" pitchFamily="34" charset="-122"/>
+                <a:cs typeface="Microsoft YaHei" pitchFamily="34" charset="-120"/>
+              </a:rPr>
+              <a:t>校验</a:t>
+            </a:r>
+            <a:endParaRPr lang="en-US" sz="900" dirty="0"/>
+          </a:p>
+        </p:txBody>
+      </p:sp>
+      <p:sp>
+        <p:nvSpPr>
+          <p:cNvPr id="11" name="Text 9"/>
+          <p:cNvSpPr/>
+          <p:nvPr/>
+        </p:nvSpPr>
+        <p:spPr>
+          <a:xfrm>
+            <a:off x="6495888" y="142875"/>
+            <a:ext cx="2381190" cy="152400"/>
+          </a:xfrm>
+          <a:prstGeom prst="rect">
+            <a:avLst/>
+          </a:prstGeom>
+          <a:noFill/>
+          <a:ln/>
+        </p:spPr>
+        <p:txBody>
+          <a:bodyPr wrap="square" lIns="0" tIns="0" rIns="0" bIns="0" rtlCol="0" anchor="t">
+            <a:normAutofit/>
+          </a:bodyPr>
+          <a:lstStyle/>
+          <a:p>
+            <a:pPr marL="0" indent="0" algn="l">
+              <a:buNone/>
+            </a:pPr>
+            <a:r>
+              <a:rPr lang="en-US" sz="900" dirty="0">
+                <a:solidFill>
+                  <a:srgbClr val="3A4860"/>
+                </a:solidFill>
+                <a:latin typeface="Microsoft YaHei" pitchFamily="34" charset="0"/>
+                <a:ea typeface="Microsoft YaHei" pitchFamily="34" charset="-122"/>
+                <a:cs typeface="Microsoft YaHei" pitchFamily="34" charset="-120"/>
+              </a:rPr>
+              <a:t>当前项目：UR_示例产线_20240516</a:t>
+            </a:r>
+            <a:endParaRPr lang="en-US" sz="900" dirty="0"/>
+          </a:p>
+        </p:txBody>
+      </p:sp>
+      <p:sp>
+        <p:nvSpPr>
+          <p:cNvPr id="12" name="Text 10"/>
+          <p:cNvSpPr/>
+          <p:nvPr/>
+        </p:nvSpPr>
+        <p:spPr>
+          <a:xfrm>
+            <a:off x="8953276" y="133350"/>
+            <a:ext cx="484721" cy="152400"/>
+          </a:xfrm>
+          <a:prstGeom prst="rect">
+            <a:avLst/>
+          </a:prstGeom>
+          <a:noFill/>
+          <a:ln/>
+        </p:spPr>
+        <p:txBody>
+          <a:bodyPr wrap="square" lIns="0" tIns="0" rIns="0" bIns="0" rtlCol="0" anchor="t">
+            <a:normAutofit/>
+          </a:bodyPr>
+          <a:lstStyle/>
+          <a:p>
+            <a:pPr marL="0" indent="0" algn="l">
+              <a:buNone/>
+            </a:pPr>
+            <a:r>
+              <a:rPr lang="en-US" sz="900" dirty="0">
+                <a:solidFill>
+                  <a:srgbClr val="344155"/>
+                </a:solidFill>
+                <a:latin typeface="Microsoft YaHei" pitchFamily="34" charset="0"/>
+                <a:ea typeface="Microsoft YaHei" pitchFamily="34" charset="-122"/>
+                <a:cs typeface="Microsoft YaHei" pitchFamily="34" charset="-120"/>
+              </a:rPr>
+              <a:t>连接状态:</a:t>
+            </a:r>
+            <a:endParaRPr lang="en-US" sz="900" dirty="0"/>
+          </a:p>
+        </p:txBody>
+      </p:sp>
+      <p:sp>
+        <p:nvSpPr>
+          <p:cNvPr id="13" name="Shape 11"/>
+          <p:cNvSpPr/>
+          <p:nvPr/>
+        </p:nvSpPr>
+        <p:spPr>
+          <a:xfrm>
+            <a:off x="9572386" y="190500"/>
+            <a:ext cx="85723" cy="85725"/>
+          </a:xfrm>
+          <a:prstGeom prst="ellipse">
+            <a:avLst/>
+          </a:prstGeom>
+          <a:solidFill>
+            <a:srgbClr val="22C26B"/>
+          </a:solidFill>
+          <a:ln w="12700">
+            <a:solidFill>
+              <a:srgbClr val="FFFFFF">
+                <a:alpha val="0"/>
+              </a:srgbClr>
+            </a:solidFill>
+            <a:prstDash val="solid"/>
+          </a:ln>
+        </p:spPr>
+      </p:sp>
+      <p:sp>
+        <p:nvSpPr>
+          <p:cNvPr id="14" name="Text 12"/>
+          <p:cNvSpPr/>
+          <p:nvPr/>
+        </p:nvSpPr>
+        <p:spPr>
+          <a:xfrm>
+            <a:off x="9696208" y="133350"/>
+            <a:ext cx="342891" cy="152400"/>
+          </a:xfrm>
+          <a:prstGeom prst="rect">
+            <a:avLst/>
+          </a:prstGeom>
+          <a:noFill/>
+          <a:ln/>
+        </p:spPr>
+        <p:txBody>
+          <a:bodyPr wrap="square" lIns="0" tIns="0" rIns="0" bIns="0" rtlCol="0" anchor="t">
+            <a:normAutofit fontScale="92500"/>
+          </a:bodyPr>
+          <a:lstStyle/>
+          <a:p>
+            <a:pPr marL="0" indent="0" algn="l">
+              <a:buNone/>
+            </a:pPr>
+            <a:r>
+              <a:rPr lang="en-US" sz="900" dirty="0">
+                <a:solidFill>
+                  <a:srgbClr val="344155"/>
+                </a:solidFill>
+                <a:latin typeface="Microsoft YaHei" pitchFamily="34" charset="0"/>
+                <a:ea typeface="Microsoft YaHei" pitchFamily="34" charset="-122"/>
+                <a:cs typeface="Microsoft YaHei" pitchFamily="34" charset="-120"/>
+              </a:rPr>
+              <a:t>已连接</a:t>
+            </a:r>
+            <a:endParaRPr lang="en-US" sz="900" dirty="0"/>
+          </a:p>
+        </p:txBody>
+      </p:sp>
+      <p:sp>
+        <p:nvSpPr>
+          <p:cNvPr id="15" name="Text 13"/>
+          <p:cNvSpPr/>
+          <p:nvPr/>
+        </p:nvSpPr>
+        <p:spPr>
+          <a:xfrm>
+            <a:off x="9981950" y="133350"/>
+            <a:ext cx="484721" cy="152400"/>
+          </a:xfrm>
+          <a:prstGeom prst="rect">
+            <a:avLst/>
+          </a:prstGeom>
+          <a:noFill/>
+          <a:ln/>
+        </p:spPr>
+        <p:txBody>
+          <a:bodyPr wrap="square" lIns="0" tIns="0" rIns="0" bIns="0" rtlCol="0" anchor="t">
+            <a:normAutofit/>
+          </a:bodyPr>
+          <a:lstStyle/>
+          <a:p>
+            <a:pPr marL="0" indent="0" algn="l">
+              <a:buNone/>
+            </a:pPr>
+            <a:r>
+              <a:rPr lang="en-US" sz="900" dirty="0">
+                <a:solidFill>
+                  <a:srgbClr val="344155"/>
+                </a:solidFill>
+                <a:latin typeface="Microsoft YaHei" pitchFamily="34" charset="0"/>
+                <a:ea typeface="Microsoft YaHei" pitchFamily="34" charset="-122"/>
+                <a:cs typeface="Microsoft YaHei" pitchFamily="34" charset="-120"/>
+              </a:rPr>
+              <a:t>配置状态:</a:t>
+            </a:r>
+            <a:endParaRPr lang="en-US" sz="900" dirty="0"/>
+          </a:p>
+        </p:txBody>
+      </p:sp>
+      <p:sp>
+        <p:nvSpPr>
+          <p:cNvPr id="16" name="Shape 14"/>
+          <p:cNvSpPr/>
+          <p:nvPr/>
+        </p:nvSpPr>
+        <p:spPr>
+          <a:xfrm>
+            <a:off x="10591535" y="214313"/>
+            <a:ext cx="114297" cy="0"/>
+          </a:xfrm>
+          <a:prstGeom prst="line">
+            <a:avLst/>
+          </a:prstGeom>
+          <a:solidFill>
+            <a:srgbClr val="FFFFFF">
+              <a:alpha val="0"/>
+            </a:srgbClr>
+          </a:solidFill>
+          <a:ln w="104775">
+            <a:solidFill>
+              <a:srgbClr val="FF9C16"/>
+            </a:solidFill>
+            <a:prstDash val="solid"/>
+          </a:ln>
+        </p:spPr>
+      </p:sp>
+      <p:sp>
+        <p:nvSpPr>
+          <p:cNvPr id="17" name="Text 15"/>
+          <p:cNvSpPr/>
+          <p:nvPr/>
+        </p:nvSpPr>
+        <p:spPr>
+          <a:xfrm>
+            <a:off x="10743931" y="133350"/>
+            <a:ext cx="342891" cy="152400"/>
+          </a:xfrm>
+          <a:prstGeom prst="rect">
+            <a:avLst/>
+          </a:prstGeom>
+          <a:noFill/>
+          <a:ln/>
+        </p:spPr>
+        <p:txBody>
+          <a:bodyPr wrap="square" lIns="0" tIns="0" rIns="0" bIns="0" rtlCol="0" anchor="t">
+            <a:normAutofit fontScale="92500"/>
+          </a:bodyPr>
+          <a:lstStyle/>
+          <a:p>
+            <a:pPr marL="0" indent="0" algn="l">
+              <a:buNone/>
+            </a:pPr>
+            <a:r>
+              <a:rPr lang="en-US" sz="900" b="1" dirty="0">
+                <a:solidFill>
+                  <a:srgbClr val="FB8C00"/>
+                </a:solidFill>
+                <a:latin typeface="Microsoft YaHei" pitchFamily="34" charset="0"/>
+                <a:ea typeface="Microsoft YaHei" pitchFamily="34" charset="-122"/>
+                <a:cs typeface="Microsoft YaHei" pitchFamily="34" charset="-120"/>
+              </a:rPr>
+              <a:t>未加载</a:t>
+            </a:r>
+            <a:endParaRPr lang="en-US" sz="900" dirty="0"/>
+          </a:p>
+        </p:txBody>
+      </p:sp>
+      <p:sp>
+        <p:nvSpPr>
+          <p:cNvPr id="18" name="Shape 16"/>
+          <p:cNvSpPr/>
+          <p:nvPr/>
+        </p:nvSpPr>
+        <p:spPr>
+          <a:xfrm>
+            <a:off x="11553536" y="142875"/>
+            <a:ext cx="85723" cy="85725"/>
+          </a:xfrm>
+          <a:prstGeom prst="rect">
+            <a:avLst/>
+          </a:prstGeom>
+          <a:solidFill>
+            <a:srgbClr val="FFFFFF">
+              <a:alpha val="0"/>
+            </a:srgbClr>
+          </a:solidFill>
+          <a:ln w="9525">
+            <a:solidFill>
+              <a:srgbClr val="7B8AA0"/>
+            </a:solidFill>
+            <a:prstDash val="solid"/>
+          </a:ln>
+        </p:spPr>
+      </p:sp>
+      <p:sp>
+        <p:nvSpPr>
+          <p:cNvPr id="19" name="Shape 17"/>
+          <p:cNvSpPr/>
+          <p:nvPr/>
+        </p:nvSpPr>
+        <p:spPr>
+          <a:xfrm>
+            <a:off x="11753556" y="142875"/>
+            <a:ext cx="85723" cy="85725"/>
+          </a:xfrm>
+          <a:prstGeom prst="rect">
+            <a:avLst/>
+          </a:prstGeom>
+          <a:solidFill>
+            <a:srgbClr val="FFFFFF">
+              <a:alpha val="0"/>
+            </a:srgbClr>
+          </a:solidFill>
+          <a:ln w="9525">
+            <a:solidFill>
+              <a:srgbClr val="7B8AA0"/>
+            </a:solidFill>
+            <a:prstDash val="solid"/>
+          </a:ln>
+        </p:spPr>
+      </p:sp>
+      <p:sp>
+        <p:nvSpPr>
+          <p:cNvPr id="20" name="Shape 18"/>
+          <p:cNvSpPr/>
+          <p:nvPr/>
+        </p:nvSpPr>
+        <p:spPr>
+          <a:xfrm>
+            <a:off x="11953576" y="142875"/>
+            <a:ext cx="85723" cy="85725"/>
+          </a:xfrm>
+          <a:prstGeom prst="rect">
+            <a:avLst/>
+          </a:prstGeom>
+          <a:solidFill>
+            <a:srgbClr val="FFFFFF">
+              <a:alpha val="0"/>
+            </a:srgbClr>
+          </a:solidFill>
+          <a:ln w="9525">
+            <a:solidFill>
+              <a:srgbClr val="7B8AA0"/>
+            </a:solidFill>
+            <a:prstDash val="solid"/>
+          </a:ln>
+        </p:spPr>
+      </p:sp>
+      <p:sp>
+        <p:nvSpPr>
+          <p:cNvPr id="21" name="Shape 19"/>
+          <p:cNvSpPr/>
+          <p:nvPr/>
+        </p:nvSpPr>
+        <p:spPr>
+          <a:xfrm>
+            <a:off x="152396" y="542925"/>
+            <a:ext cx="6362541" cy="5886450"/>
+          </a:xfrm>
+          <a:prstGeom prst="rect">
+            <a:avLst/>
+          </a:prstGeom>
+          <a:solidFill>
+            <a:srgbClr val="FFFFFF"/>
+          </a:solidFill>
+          <a:ln w="9525">
+            <a:solidFill>
+              <a:srgbClr val="D6E2F2"/>
+            </a:solidFill>
+            <a:prstDash val="solid"/>
+          </a:ln>
+          <a:effectLst>
+            <a:outerShdw blurRad="1984" dist="794" dir="5400000" algn="bl" rotWithShape="0">
+              <a:srgbClr val="1F4D88">
+                <a:alpha val="8000"/>
+              </a:srgbClr>
+            </a:outerShdw>
+          </a:effectLst>
+        </p:spPr>
+      </p:sp>
+      <p:sp>
+        <p:nvSpPr>
+          <p:cNvPr id="22" name="Text 20"/>
+          <p:cNvSpPr/>
+          <p:nvPr/>
+        </p:nvSpPr>
+        <p:spPr>
+          <a:xfrm>
+            <a:off x="342891" y="695325"/>
+            <a:ext cx="1066773" cy="200025"/>
+          </a:xfrm>
+          <a:prstGeom prst="rect">
+            <a:avLst/>
+          </a:prstGeom>
+          <a:noFill/>
+          <a:ln/>
+        </p:spPr>
+        <p:txBody>
+          <a:bodyPr wrap="square" lIns="0" tIns="0" rIns="0" bIns="0" rtlCol="0" anchor="t">
+            <a:normAutofit fontScale="92500"/>
+          </a:bodyPr>
+          <a:lstStyle/>
+          <a:p>
+            <a:pPr marL="0" indent="0" algn="l">
+              <a:buNone/>
+            </a:pPr>
+            <a:r>
+              <a:rPr lang="en-US" sz="1200" b="1" dirty="0">
+                <a:solidFill>
+                  <a:srgbClr val="111827"/>
+                </a:solidFill>
+                <a:latin typeface="Microsoft YaHei" pitchFamily="34" charset="0"/>
+                <a:ea typeface="Microsoft YaHei" pitchFamily="34" charset="-122"/>
+                <a:cs typeface="Microsoft YaHei" pitchFamily="34" charset="-120"/>
+              </a:rPr>
+              <a:t>机器人实时仿真</a:t>
+            </a:r>
+            <a:endParaRPr lang="en-US" sz="1200" dirty="0"/>
+          </a:p>
+        </p:txBody>
+      </p:sp>
+      <p:sp>
+        <p:nvSpPr>
+          <p:cNvPr id="23" name="Shape 21"/>
+          <p:cNvSpPr/>
+          <p:nvPr/>
+        </p:nvSpPr>
+        <p:spPr>
+          <a:xfrm>
+            <a:off x="1419190" y="776287"/>
+            <a:ext cx="114297" cy="0"/>
+          </a:xfrm>
+          <a:prstGeom prst="line">
+            <a:avLst/>
+          </a:prstGeom>
+          <a:solidFill>
+            <a:srgbClr val="FFFFFF">
+              <a:alpha val="0"/>
+            </a:srgbClr>
+          </a:solidFill>
+          <a:ln w="104775">
+            <a:solidFill>
+              <a:srgbClr val="FF9C16"/>
+            </a:solidFill>
+            <a:prstDash val="solid"/>
+          </a:ln>
+        </p:spPr>
+      </p:sp>
+      <p:sp>
+        <p:nvSpPr>
+          <p:cNvPr id="24" name="Text 22"/>
+          <p:cNvSpPr/>
+          <p:nvPr/>
+        </p:nvSpPr>
+        <p:spPr>
+          <a:xfrm>
+            <a:off x="1581110" y="723900"/>
+            <a:ext cx="1257269" cy="152400"/>
+          </a:xfrm>
+          <a:prstGeom prst="rect">
+            <a:avLst/>
+          </a:prstGeom>
+          <a:noFill/>
+          <a:ln/>
+        </p:spPr>
+        <p:txBody>
+          <a:bodyPr wrap="square" lIns="0" tIns="0" rIns="0" bIns="0" rtlCol="0" anchor="t">
+            <a:normAutofit fontScale="92500"/>
+          </a:bodyPr>
+          <a:lstStyle/>
+          <a:p>
+            <a:pPr marL="0" indent="0" algn="l">
+              <a:buNone/>
+            </a:pPr>
+            <a:r>
+              <a:rPr lang="en-US" sz="900" dirty="0">
+                <a:solidFill>
+                  <a:srgbClr val="4A5A70"/>
+                </a:solidFill>
+                <a:latin typeface="Microsoft YaHei" pitchFamily="34" charset="0"/>
+                <a:ea typeface="Microsoft YaHei" pitchFamily="34" charset="-122"/>
+                <a:cs typeface="Microsoft YaHei" pitchFamily="34" charset="-120"/>
+              </a:rPr>
+              <a:t>配置未加载，等待初始化</a:t>
+            </a:r>
+            <a:endParaRPr lang="en-US" sz="900" dirty="0"/>
+          </a:p>
+        </p:txBody>
+      </p:sp>
+      <p:sp>
+        <p:nvSpPr>
+          <p:cNvPr id="25" name="Shape 23"/>
+          <p:cNvSpPr/>
+          <p:nvPr/>
+        </p:nvSpPr>
+        <p:spPr>
+          <a:xfrm>
+            <a:off x="285743" y="1190625"/>
+            <a:ext cx="6095848" cy="3905250"/>
+          </a:xfrm>
+          <a:prstGeom prst="rect">
+            <a:avLst/>
+          </a:prstGeom>
+          <a:solidFill>
+            <a:srgbClr val="F8FBFF"/>
+          </a:solidFill>
+          <a:ln w="9525">
+            <a:solidFill>
+              <a:srgbClr val="E2EAF5"/>
+            </a:solidFill>
+            <a:prstDash val="solid"/>
+          </a:ln>
+        </p:spPr>
+      </p:sp>
+      <p:sp>
+        <p:nvSpPr>
+          <p:cNvPr id="26" name="Shape 24"/>
+          <p:cNvSpPr/>
+          <p:nvPr/>
+        </p:nvSpPr>
+        <p:spPr>
+          <a:xfrm>
+            <a:off x="371466" y="1343025"/>
+            <a:ext cx="323842" cy="1885950"/>
+          </a:xfrm>
+          <a:prstGeom prst="roundRect">
+            <a:avLst/>
+          </a:prstGeom>
+          <a:solidFill>
+            <a:srgbClr val="FFFFFF"/>
+          </a:solidFill>
+          <a:ln w="12700">
+            <a:solidFill>
+              <a:srgbClr val="FFFFFF">
+                <a:alpha val="0"/>
+              </a:srgbClr>
+            </a:solidFill>
+            <a:prstDash val="solid"/>
+          </a:ln>
+          <a:effectLst>
+            <a:outerShdw blurRad="992" dist="298" dir="5400000" algn="bl" rotWithShape="0">
+              <a:srgbClr val="3B5F95">
+                <a:alpha val="16000"/>
+              </a:srgbClr>
+            </a:outerShdw>
+          </a:effectLst>
+        </p:spPr>
+      </p:sp>
+      <p:sp>
+        <p:nvSpPr>
+          <p:cNvPr id="27" name="Shape 25"/>
+          <p:cNvSpPr/>
+          <p:nvPr/>
+        </p:nvSpPr>
+        <p:spPr>
+          <a:xfrm>
+            <a:off x="409565" y="1428750"/>
+            <a:ext cx="247644" cy="247650"/>
+          </a:xfrm>
+          <a:prstGeom prst="roundRect">
+            <a:avLst/>
+          </a:prstGeom>
+          <a:solidFill>
+            <a:srgbClr val="3C7DF0"/>
+          </a:solidFill>
+          <a:ln w="12700">
+            <a:solidFill>
+              <a:srgbClr val="FFFFFF">
+                <a:alpha val="0"/>
+              </a:srgbClr>
+            </a:solidFill>
+            <a:prstDash val="solid"/>
+          </a:ln>
+        </p:spPr>
+      </p:sp>
+      <p:sp>
+        <p:nvSpPr>
+          <p:cNvPr id="28" name="Shape 26"/>
+          <p:cNvSpPr/>
+          <p:nvPr/>
+        </p:nvSpPr>
+        <p:spPr>
+          <a:xfrm>
+            <a:off x="447664" y="1819275"/>
+            <a:ext cx="171446" cy="171450"/>
+          </a:xfrm>
+          <a:prstGeom prst="roundRect">
+            <a:avLst/>
+          </a:prstGeom>
+          <a:solidFill>
+            <a:srgbClr val="FFFFFF">
+              <a:alpha val="0"/>
+            </a:srgbClr>
+          </a:solidFill>
+          <a:ln w="9525">
+            <a:solidFill>
+              <a:srgbClr val="71839C"/>
+            </a:solidFill>
+            <a:prstDash val="solid"/>
+          </a:ln>
+        </p:spPr>
+      </p:sp>
+      <p:sp>
+        <p:nvSpPr>
+          <p:cNvPr id="29" name="Shape 27"/>
+          <p:cNvSpPr/>
+          <p:nvPr/>
+        </p:nvSpPr>
+        <p:spPr>
+          <a:xfrm>
+            <a:off x="447664" y="2181225"/>
+            <a:ext cx="171446" cy="171450"/>
+          </a:xfrm>
+          <a:prstGeom prst="roundRect">
+            <a:avLst/>
+          </a:prstGeom>
+          <a:solidFill>
+            <a:srgbClr val="FFFFFF">
+              <a:alpha val="0"/>
+            </a:srgbClr>
+          </a:solidFill>
+          <a:ln w="9525">
+            <a:solidFill>
+              <a:srgbClr val="71839C"/>
+            </a:solidFill>
+            <a:prstDash val="solid"/>
+          </a:ln>
+        </p:spPr>
+      </p:sp>
+      <p:sp>
+        <p:nvSpPr>
+          <p:cNvPr id="30" name="Shape 28"/>
+          <p:cNvSpPr/>
+          <p:nvPr/>
+        </p:nvSpPr>
+        <p:spPr>
+          <a:xfrm>
+            <a:off x="447664" y="2543175"/>
+            <a:ext cx="171446" cy="171450"/>
+          </a:xfrm>
+          <a:prstGeom prst="roundRect">
+            <a:avLst/>
+          </a:prstGeom>
+          <a:solidFill>
+            <a:srgbClr val="FFFFFF">
+              <a:alpha val="0"/>
+            </a:srgbClr>
+          </a:solidFill>
+          <a:ln w="9525">
+            <a:solidFill>
+              <a:srgbClr val="71839C"/>
+            </a:solidFill>
+            <a:prstDash val="solid"/>
+          </a:ln>
+        </p:spPr>
+      </p:sp>
+      <p:sp>
+        <p:nvSpPr>
+          <p:cNvPr id="31" name="Shape 29"/>
+          <p:cNvSpPr/>
+          <p:nvPr/>
+        </p:nvSpPr>
+        <p:spPr>
+          <a:xfrm>
+            <a:off x="447664" y="2905125"/>
+            <a:ext cx="171446" cy="171450"/>
+          </a:xfrm>
+          <a:prstGeom prst="roundRect">
+            <a:avLst/>
+          </a:prstGeom>
+          <a:solidFill>
+            <a:srgbClr val="FFFFFF">
+              <a:alpha val="0"/>
+            </a:srgbClr>
+          </a:solidFill>
+          <a:ln w="9525">
+            <a:solidFill>
+              <a:srgbClr val="71839C"/>
+            </a:solidFill>
+            <a:prstDash val="solid"/>
+          </a:ln>
+        </p:spPr>
+      </p:sp>
+      <p:sp>
+        <p:nvSpPr>
+          <p:cNvPr id="32" name="Shape 30"/>
+          <p:cNvSpPr/>
+          <p:nvPr/>
+        </p:nvSpPr>
+        <p:spPr>
+          <a:xfrm>
+            <a:off x="5219570" y="1333500"/>
+            <a:ext cx="1028674" cy="323850"/>
+          </a:xfrm>
+          <a:prstGeom prst="roundRect">
+            <a:avLst/>
+          </a:prstGeom>
+          <a:solidFill>
+            <a:srgbClr val="FFFFFF"/>
+          </a:solidFill>
+          <a:ln w="9525">
+            <a:solidFill>
+              <a:srgbClr val="E0E8F4"/>
+            </a:solidFill>
+            <a:prstDash val="solid"/>
+          </a:ln>
+        </p:spPr>
+      </p:sp>
+      <p:sp>
+        <p:nvSpPr>
+          <p:cNvPr id="33" name="Shape 31"/>
+          <p:cNvSpPr/>
+          <p:nvPr/>
+        </p:nvSpPr>
+        <p:spPr>
+          <a:xfrm>
+            <a:off x="5562461" y="1333500"/>
+            <a:ext cx="9525" cy="323850"/>
+          </a:xfrm>
+          <a:prstGeom prst="rect">
+            <a:avLst/>
+          </a:prstGeom>
+          <a:solidFill>
+            <a:srgbClr val="E7EEF8"/>
+          </a:solidFill>
+          <a:ln w="12700">
+            <a:solidFill>
+              <a:srgbClr val="FFFFFF">
+                <a:alpha val="0"/>
+              </a:srgbClr>
+            </a:solidFill>
+            <a:prstDash val="solid"/>
+          </a:ln>
+        </p:spPr>
+      </p:sp>
+      <p:sp>
+        <p:nvSpPr>
+          <p:cNvPr id="34" name="Shape 32"/>
+          <p:cNvSpPr/>
+          <p:nvPr/>
+        </p:nvSpPr>
+        <p:spPr>
+          <a:xfrm>
+            <a:off x="5905352" y="1333500"/>
+            <a:ext cx="9525" cy="323850"/>
+          </a:xfrm>
+          <a:prstGeom prst="rect">
+            <a:avLst/>
+          </a:prstGeom>
+          <a:solidFill>
+            <a:srgbClr val="E7EEF8"/>
+          </a:solidFill>
+          <a:ln w="12700">
+            <a:solidFill>
+              <a:srgbClr val="FFFFFF">
+                <a:alpha val="0"/>
+              </a:srgbClr>
+            </a:solidFill>
+            <a:prstDash val="solid"/>
+          </a:ln>
+        </p:spPr>
+      </p:sp>
+      <p:sp>
+        <p:nvSpPr>
+          <p:cNvPr id="35" name="Shape 33"/>
+          <p:cNvSpPr/>
+          <p:nvPr/>
+        </p:nvSpPr>
+        <p:spPr>
+          <a:xfrm>
+            <a:off x="5324342" y="1438275"/>
+            <a:ext cx="123822" cy="123825"/>
+          </a:xfrm>
+          <a:prstGeom prst="rect">
+            <a:avLst/>
+          </a:prstGeom>
+          <a:solidFill>
+            <a:srgbClr val="FFFFFF">
+              <a:alpha val="0"/>
+            </a:srgbClr>
+          </a:solidFill>
+          <a:ln w="9525">
+            <a:solidFill>
+              <a:srgbClr val="738299"/>
+            </a:solidFill>
+            <a:prstDash val="solid"/>
+          </a:ln>
+        </p:spPr>
+      </p:sp>
+      <p:sp>
+        <p:nvSpPr>
+          <p:cNvPr id="36" name="Shape 34"/>
+          <p:cNvSpPr/>
+          <p:nvPr/>
+        </p:nvSpPr>
+        <p:spPr>
+          <a:xfrm>
+            <a:off x="5676758" y="1438275"/>
+            <a:ext cx="123822" cy="123825"/>
+          </a:xfrm>
+          <a:prstGeom prst="rect">
+            <a:avLst/>
+          </a:prstGeom>
+          <a:solidFill>
+            <a:srgbClr val="FFFFFF">
+              <a:alpha val="0"/>
+            </a:srgbClr>
+          </a:solidFill>
+          <a:ln w="9525">
+            <a:solidFill>
+              <a:srgbClr val="738299"/>
+            </a:solidFill>
+            <a:prstDash val="solid"/>
+          </a:ln>
+        </p:spPr>
+      </p:sp>
+      <p:sp>
+        <p:nvSpPr>
+          <p:cNvPr id="37" name="Shape 35"/>
+          <p:cNvSpPr/>
+          <p:nvPr/>
+        </p:nvSpPr>
+        <p:spPr>
+          <a:xfrm>
+            <a:off x="6010125" y="1438275"/>
+            <a:ext cx="123822" cy="123825"/>
+          </a:xfrm>
+          <a:prstGeom prst="rect">
+            <a:avLst/>
+          </a:prstGeom>
+          <a:solidFill>
+            <a:srgbClr val="FFFFFF">
+              <a:alpha val="0"/>
+            </a:srgbClr>
+          </a:solidFill>
+          <a:ln w="9525">
+            <a:solidFill>
+              <a:srgbClr val="738299"/>
+            </a:solidFill>
+            <a:prstDash val="solid"/>
+          </a:ln>
+        </p:spPr>
+      </p:sp>
+      <p:sp>
+        <p:nvSpPr>
+          <p:cNvPr id="38" name="Shape 36"/>
+          <p:cNvSpPr/>
+          <p:nvPr/>
+        </p:nvSpPr>
+        <p:spPr>
+          <a:xfrm>
+            <a:off x="1952576" y="2076450"/>
+            <a:ext cx="3143171" cy="2000250"/>
+          </a:xfrm>
+          <a:prstGeom prst="roundRect">
+            <a:avLst/>
+          </a:prstGeom>
+          <a:solidFill>
+            <a:srgbClr val="FFFFFF"/>
+          </a:solidFill>
+          <a:ln w="9525">
+            <a:solidFill>
+              <a:srgbClr val="DFE7F1"/>
+            </a:solidFill>
+            <a:prstDash val="solid"/>
+          </a:ln>
+          <a:effectLst>
+            <a:outerShdw blurRad="2977" dist="1389" dir="5400000" algn="bl" rotWithShape="0">
+              <a:srgbClr val="20477D">
+                <a:alpha val="14000"/>
+              </a:srgbClr>
+            </a:outerShdw>
+          </a:effectLst>
+        </p:spPr>
+      </p:sp>
+      <p:sp>
+        <p:nvSpPr>
+          <p:cNvPr id="39" name="Shape 37"/>
+          <p:cNvSpPr/>
+          <p:nvPr/>
+        </p:nvSpPr>
+        <p:spPr>
+          <a:xfrm>
+            <a:off x="3400340" y="2433637"/>
+            <a:ext cx="285743" cy="0"/>
+          </a:xfrm>
+          <a:prstGeom prst="line">
+            <a:avLst/>
+          </a:prstGeom>
+          <a:solidFill>
+            <a:srgbClr val="FFFFFF">
+              <a:alpha val="0"/>
+            </a:srgbClr>
+          </a:solidFill>
+          <a:ln w="257175">
+            <a:solidFill>
+              <a:srgbClr val="FF9A0A"/>
+            </a:solidFill>
+            <a:prstDash val="solid"/>
+          </a:ln>
+        </p:spPr>
+      </p:sp>
+      <p:sp>
+        <p:nvSpPr>
+          <p:cNvPr id="40" name="Text 38"/>
+          <p:cNvSpPr/>
+          <p:nvPr/>
+        </p:nvSpPr>
+        <p:spPr>
+          <a:xfrm>
+            <a:off x="2266893" y="2686050"/>
+            <a:ext cx="2524062" cy="180975"/>
+          </a:xfrm>
+          <a:prstGeom prst="rect">
+            <a:avLst/>
+          </a:prstGeom>
+          <a:noFill/>
+          <a:ln/>
+        </p:spPr>
+        <p:txBody>
+          <a:bodyPr wrap="square" lIns="0" tIns="0" rIns="0" bIns="0" rtlCol="0" anchor="t">
+            <a:normAutofit/>
+          </a:bodyPr>
+          <a:lstStyle/>
+          <a:p>
+            <a:pPr marL="0" indent="0" algn="ctr">
+              <a:buNone/>
+            </a:pPr>
+            <a:r>
+              <a:rPr lang="en-US" sz="1084" b="1" dirty="0">
+                <a:solidFill>
+                  <a:srgbClr val="172033"/>
+                </a:solidFill>
+                <a:latin typeface="Microsoft YaHei" pitchFamily="34" charset="0"/>
+                <a:ea typeface="Microsoft YaHei" pitchFamily="34" charset="-122"/>
+                <a:cs typeface="Microsoft YaHei" pitchFamily="34" charset="-120"/>
+              </a:rPr>
+              <a:t>未找到机器人三维模型与误差参数文件</a:t>
+            </a:r>
+            <a:endParaRPr lang="en-US" sz="1084" dirty="0"/>
+          </a:p>
+        </p:txBody>
+      </p:sp>
+      <p:sp>
+        <p:nvSpPr>
+          <p:cNvPr id="41" name="Text 39"/>
+          <p:cNvSpPr/>
+          <p:nvPr/>
+        </p:nvSpPr>
+        <p:spPr>
+          <a:xfrm>
+            <a:off x="2266893" y="2981325"/>
+            <a:ext cx="2524062" cy="354211"/>
+          </a:xfrm>
+          <a:prstGeom prst="rect">
+            <a:avLst/>
+          </a:prstGeom>
+          <a:noFill/>
+          <a:ln/>
+        </p:spPr>
+        <p:txBody>
+          <a:bodyPr wrap="square" lIns="0" tIns="0" rIns="0" bIns="0" rtlCol="0" anchor="t">
+            <a:normAutofit/>
+          </a:bodyPr>
+          <a:lstStyle/>
+          <a:p>
+            <a:pPr marL="0" indent="0" algn="ctr">
+              <a:buNone/>
+            </a:pPr>
+            <a:r>
+              <a:rPr lang="en-US" sz="900" dirty="0">
+                <a:solidFill>
+                  <a:srgbClr val="415068"/>
+                </a:solidFill>
+                <a:latin typeface="Microsoft YaHei" pitchFamily="34" charset="0"/>
+                <a:ea typeface="Microsoft YaHei" pitchFamily="34" charset="-122"/>
+                <a:cs typeface="Microsoft YaHei" pitchFamily="34" charset="-120"/>
+              </a:rPr>
+              <a:t>当前配置目录中缺少模型文件或误差参数文件。请先加载所需文件以继续初始化。</a:t>
+            </a:r>
+            <a:endParaRPr lang="en-US" sz="900" dirty="0"/>
+          </a:p>
+        </p:txBody>
+      </p:sp>
+      <p:sp>
+        <p:nvSpPr>
+          <p:cNvPr id="42" name="Shape 40"/>
+          <p:cNvSpPr/>
+          <p:nvPr/>
+        </p:nvSpPr>
+        <p:spPr>
+          <a:xfrm>
+            <a:off x="2295468" y="3495675"/>
+            <a:ext cx="1181070" cy="295275"/>
+          </a:xfrm>
+          <a:prstGeom prst="roundRect">
+            <a:avLst/>
+          </a:prstGeom>
+          <a:solidFill>
+            <a:srgbClr val="FFFFFF"/>
+          </a:solidFill>
+          <a:ln w="9525">
+            <a:solidFill>
+              <a:srgbClr val="2F75FF"/>
+            </a:solidFill>
+            <a:prstDash val="solid"/>
+          </a:ln>
+        </p:spPr>
+      </p:sp>
+      <p:sp>
+        <p:nvSpPr>
+          <p:cNvPr id="43" name="Shape 41"/>
+          <p:cNvSpPr/>
+          <p:nvPr/>
+        </p:nvSpPr>
+        <p:spPr>
+          <a:xfrm>
+            <a:off x="3647984" y="3495675"/>
+            <a:ext cx="1181070" cy="295275"/>
+          </a:xfrm>
+          <a:prstGeom prst="roundRect">
+            <a:avLst/>
+          </a:prstGeom>
+          <a:solidFill>
+            <a:srgbClr val="FFFFFF"/>
+          </a:solidFill>
+          <a:ln w="9525">
+            <a:solidFill>
+              <a:srgbClr val="2F75FF"/>
+            </a:solidFill>
+            <a:prstDash val="solid"/>
+          </a:ln>
+        </p:spPr>
+      </p:sp>
+      <p:sp>
+        <p:nvSpPr>
+          <p:cNvPr id="44" name="Text 42"/>
+          <p:cNvSpPr/>
+          <p:nvPr/>
+        </p:nvSpPr>
+        <p:spPr>
+          <a:xfrm>
+            <a:off x="2295468" y="3562350"/>
+            <a:ext cx="1181070" cy="152400"/>
+          </a:xfrm>
+          <a:prstGeom prst="rect">
+            <a:avLst/>
+          </a:prstGeom>
+          <a:noFill/>
+          <a:ln/>
+        </p:spPr>
+        <p:txBody>
+          <a:bodyPr wrap="square" lIns="0" tIns="0" rIns="0" bIns="0" rtlCol="0" anchor="t">
+            <a:normAutofit/>
+          </a:bodyPr>
+          <a:lstStyle/>
+          <a:p>
+            <a:pPr marL="0" indent="0" algn="ctr">
+              <a:buNone/>
+            </a:pPr>
+            <a:r>
+              <a:rPr lang="en-US" sz="900" b="1" dirty="0">
+                <a:solidFill>
+                  <a:srgbClr val="1263E6"/>
+                </a:solidFill>
+                <a:latin typeface="Microsoft YaHei" pitchFamily="34" charset="0"/>
+                <a:ea typeface="Microsoft YaHei" pitchFamily="34" charset="-122"/>
+                <a:cs typeface="Microsoft YaHei" pitchFamily="34" charset="-120"/>
+              </a:rPr>
+              <a:t>加载三维模型</a:t>
+            </a:r>
+            <a:endParaRPr lang="en-US" sz="900" dirty="0"/>
+          </a:p>
+        </p:txBody>
+      </p:sp>
+      <p:sp>
+        <p:nvSpPr>
+          <p:cNvPr id="45" name="Text 43"/>
+          <p:cNvSpPr/>
+          <p:nvPr/>
+        </p:nvSpPr>
+        <p:spPr>
+          <a:xfrm>
+            <a:off x="3647984" y="3562350"/>
+            <a:ext cx="1181070" cy="152400"/>
+          </a:xfrm>
+          <a:prstGeom prst="rect">
+            <a:avLst/>
+          </a:prstGeom>
+          <a:noFill/>
+          <a:ln/>
+        </p:spPr>
+        <p:txBody>
+          <a:bodyPr wrap="square" lIns="0" tIns="0" rIns="0" bIns="0" rtlCol="0" anchor="t">
+            <a:normAutofit/>
+          </a:bodyPr>
+          <a:lstStyle/>
+          <a:p>
+            <a:pPr marL="0" indent="0" algn="ctr">
+              <a:buNone/>
+            </a:pPr>
+            <a:r>
+              <a:rPr lang="en-US" sz="900" b="1" dirty="0">
+                <a:solidFill>
+                  <a:srgbClr val="1263E6"/>
+                </a:solidFill>
+                <a:latin typeface="Microsoft YaHei" pitchFamily="34" charset="0"/>
+                <a:ea typeface="Microsoft YaHei" pitchFamily="34" charset="-122"/>
+                <a:cs typeface="Microsoft YaHei" pitchFamily="34" charset="-120"/>
+              </a:rPr>
+              <a:t>加载参数文件</a:t>
+            </a:r>
+            <a:endParaRPr lang="en-US" sz="900" dirty="0"/>
+          </a:p>
+        </p:txBody>
+      </p:sp>
+      <p:sp>
+        <p:nvSpPr>
+          <p:cNvPr id="46" name="Shape 44"/>
+          <p:cNvSpPr/>
+          <p:nvPr/>
+        </p:nvSpPr>
+        <p:spPr>
+          <a:xfrm>
+            <a:off x="3000300" y="3857625"/>
+            <a:ext cx="1066773" cy="247650"/>
+          </a:xfrm>
+          <a:prstGeom prst="roundRect">
+            <a:avLst/>
+          </a:prstGeom>
+          <a:solidFill>
+            <a:srgbClr val="FFFFFF"/>
+          </a:solidFill>
+          <a:ln w="9525">
+            <a:solidFill>
+              <a:srgbClr val="CFD9E8"/>
+            </a:solidFill>
+            <a:prstDash val="solid"/>
+          </a:ln>
+        </p:spPr>
+      </p:sp>
+      <p:sp>
+        <p:nvSpPr>
+          <p:cNvPr id="47" name="Text 45"/>
+          <p:cNvSpPr/>
+          <p:nvPr/>
+        </p:nvSpPr>
+        <p:spPr>
+          <a:xfrm>
+            <a:off x="3000300" y="3914775"/>
+            <a:ext cx="1066773" cy="142875"/>
+          </a:xfrm>
+          <a:prstGeom prst="rect">
+            <a:avLst/>
+          </a:prstGeom>
+          <a:noFill/>
+          <a:ln/>
+        </p:spPr>
+        <p:txBody>
+          <a:bodyPr wrap="square" lIns="0" tIns="0" rIns="0" bIns="0" rtlCol="0" anchor="t">
+            <a:normAutofit/>
+          </a:bodyPr>
+          <a:lstStyle/>
+          <a:p>
+            <a:pPr marL="0" indent="0" algn="ctr">
+              <a:buNone/>
+            </a:pPr>
+            <a:r>
+              <a:rPr lang="en-US" sz="825" b="1" dirty="0">
+                <a:solidFill>
+                  <a:srgbClr val="344257"/>
+                </a:solidFill>
+                <a:latin typeface="Microsoft YaHei" pitchFamily="34" charset="0"/>
+                <a:ea typeface="Microsoft YaHei" pitchFamily="34" charset="-122"/>
+                <a:cs typeface="Microsoft YaHei" pitchFamily="34" charset="-120"/>
+              </a:rPr>
+              <a:t>打开默认目录</a:t>
+            </a:r>
+            <a:endParaRPr lang="en-US" sz="825" dirty="0"/>
+          </a:p>
+        </p:txBody>
+      </p:sp>
+      <p:sp>
+        <p:nvSpPr>
+          <p:cNvPr id="48" name="Shape 46"/>
+          <p:cNvSpPr/>
+          <p:nvPr/>
+        </p:nvSpPr>
+        <p:spPr>
+          <a:xfrm>
+            <a:off x="742931" y="4676775"/>
+            <a:ext cx="500677" cy="233475"/>
+          </a:xfrm>
+          <a:prstGeom prst="line">
+            <a:avLst/>
+          </a:prstGeom>
+          <a:solidFill>
+            <a:srgbClr val="FFFFFF">
+              <a:alpha val="0"/>
+            </a:srgbClr>
+          </a:solidFill>
+          <a:ln w="19050">
+            <a:solidFill>
+              <a:srgbClr val="FF2B22"/>
+            </a:solidFill>
+            <a:prstDash val="solid"/>
+          </a:ln>
+        </p:spPr>
+      </p:sp>
+      <p:sp>
+        <p:nvSpPr>
+          <p:cNvPr id="49" name="Shape 47"/>
+          <p:cNvSpPr/>
+          <p:nvPr/>
+        </p:nvSpPr>
+        <p:spPr>
+          <a:xfrm>
+            <a:off x="742931" y="4487826"/>
+            <a:ext cx="519120" cy="188949"/>
+          </a:xfrm>
+          <a:prstGeom prst="lineInv">
+            <a:avLst/>
+          </a:prstGeom>
+          <a:solidFill>
+            <a:srgbClr val="FFFFFF">
+              <a:alpha val="0"/>
+            </a:srgbClr>
+          </a:solidFill>
+          <a:ln w="19050">
+            <a:solidFill>
+              <a:srgbClr val="20B743"/>
+            </a:solidFill>
+            <a:prstDash val="solid"/>
+          </a:ln>
+        </p:spPr>
+      </p:sp>
+      <p:sp>
+        <p:nvSpPr>
+          <p:cNvPr id="50" name="Shape 48"/>
+          <p:cNvSpPr/>
+          <p:nvPr/>
+        </p:nvSpPr>
+        <p:spPr>
+          <a:xfrm>
+            <a:off x="742931" y="4124325"/>
+            <a:ext cx="9525" cy="552450"/>
+          </a:xfrm>
+          <a:prstGeom prst="line">
+            <a:avLst/>
+          </a:prstGeom>
+          <a:solidFill>
+            <a:srgbClr val="FFFFFF">
+              <a:alpha val="0"/>
+            </a:srgbClr>
+          </a:solidFill>
+          <a:ln w="19050">
+            <a:solidFill>
+              <a:srgbClr val="1D71FF"/>
+            </a:solidFill>
+            <a:prstDash val="solid"/>
+          </a:ln>
+        </p:spPr>
+      </p:sp>
+      <p:sp>
+        <p:nvSpPr>
+          <p:cNvPr id="51" name="Text 49"/>
+          <p:cNvSpPr/>
+          <p:nvPr/>
+        </p:nvSpPr>
+        <p:spPr>
+          <a:xfrm>
+            <a:off x="1257269" y="4819650"/>
+            <a:ext cx="80068" cy="152400"/>
+          </a:xfrm>
+          <a:prstGeom prst="rect">
+            <a:avLst/>
+          </a:prstGeom>
+          <a:noFill/>
+          <a:ln/>
+        </p:spPr>
+        <p:txBody>
+          <a:bodyPr wrap="square" lIns="0" tIns="0" rIns="0" bIns="0" rtlCol="0" anchor="t">
+            <a:normAutofit/>
+          </a:bodyPr>
+          <a:lstStyle/>
+          <a:p>
+            <a:pPr marL="0" indent="0" algn="l">
+              <a:buNone/>
+            </a:pPr>
+            <a:r>
+              <a:rPr lang="en-US" sz="900" b="1" dirty="0">
+                <a:solidFill>
+                  <a:srgbClr val="FF2B22"/>
+                </a:solidFill>
+                <a:latin typeface="Microsoft YaHei" pitchFamily="34" charset="0"/>
+                <a:ea typeface="Microsoft YaHei" pitchFamily="34" charset="-122"/>
+                <a:cs typeface="Microsoft YaHei" pitchFamily="34" charset="-120"/>
+              </a:rPr>
+              <a:t>X</a:t>
+            </a:r>
+            <a:endParaRPr lang="en-US" sz="900" dirty="0"/>
+          </a:p>
+        </p:txBody>
+      </p:sp>
+      <p:sp>
+        <p:nvSpPr>
+          <p:cNvPr id="52" name="Text 50"/>
+          <p:cNvSpPr/>
+          <p:nvPr/>
+        </p:nvSpPr>
+        <p:spPr>
+          <a:xfrm>
+            <a:off x="1219170" y="4343400"/>
+            <a:ext cx="74115" cy="152400"/>
+          </a:xfrm>
+          <a:prstGeom prst="rect">
+            <a:avLst/>
+          </a:prstGeom>
+          <a:noFill/>
+          <a:ln/>
+        </p:spPr>
+        <p:txBody>
+          <a:bodyPr wrap="square" lIns="0" tIns="0" rIns="0" bIns="0" rtlCol="0" anchor="t">
+            <a:normAutofit/>
+          </a:bodyPr>
+          <a:lstStyle/>
+          <a:p>
+            <a:pPr marL="0" indent="0" algn="l">
+              <a:buNone/>
+            </a:pPr>
+            <a:r>
+              <a:rPr lang="en-US" sz="900" b="1" dirty="0">
+                <a:solidFill>
+                  <a:srgbClr val="20A83D"/>
+                </a:solidFill>
+                <a:latin typeface="Microsoft YaHei" pitchFamily="34" charset="0"/>
+                <a:ea typeface="Microsoft YaHei" pitchFamily="34" charset="-122"/>
+                <a:cs typeface="Microsoft YaHei" pitchFamily="34" charset="-120"/>
+              </a:rPr>
+              <a:t>Y</a:t>
+            </a:r>
+            <a:endParaRPr lang="en-US" sz="900" dirty="0"/>
+          </a:p>
+        </p:txBody>
+      </p:sp>
+      <p:sp>
+        <p:nvSpPr>
+          <p:cNvPr id="53" name="Text 51"/>
+          <p:cNvSpPr/>
+          <p:nvPr/>
+        </p:nvSpPr>
+        <p:spPr>
+          <a:xfrm>
+            <a:off x="666733" y="3905250"/>
+            <a:ext cx="74412" cy="152400"/>
+          </a:xfrm>
+          <a:prstGeom prst="rect">
+            <a:avLst/>
+          </a:prstGeom>
+          <a:noFill/>
+          <a:ln/>
+        </p:spPr>
+        <p:txBody>
+          <a:bodyPr wrap="square" lIns="0" tIns="0" rIns="0" bIns="0" rtlCol="0" anchor="t">
+            <a:normAutofit/>
+          </a:bodyPr>
+          <a:lstStyle/>
+          <a:p>
+            <a:pPr marL="0" indent="0" algn="l">
+              <a:buNone/>
+            </a:pPr>
+            <a:r>
+              <a:rPr lang="en-US" sz="900" b="1" dirty="0">
+                <a:solidFill>
+                  <a:srgbClr val="1D71FF"/>
+                </a:solidFill>
+                <a:latin typeface="Microsoft YaHei" pitchFamily="34" charset="0"/>
+                <a:ea typeface="Microsoft YaHei" pitchFamily="34" charset="-122"/>
+                <a:cs typeface="Microsoft YaHei" pitchFamily="34" charset="-120"/>
+              </a:rPr>
+              <a:t>Z</a:t>
+            </a:r>
+            <a:endParaRPr lang="en-US" sz="900" dirty="0"/>
+          </a:p>
+        </p:txBody>
+      </p:sp>
+      <p:sp>
+        <p:nvSpPr>
+          <p:cNvPr id="54" name="Shape 52"/>
+          <p:cNvSpPr/>
+          <p:nvPr/>
+        </p:nvSpPr>
+        <p:spPr>
+          <a:xfrm>
+            <a:off x="2171646" y="5219700"/>
+            <a:ext cx="1790655" cy="1028700"/>
+          </a:xfrm>
+          <a:prstGeom prst="roundRect">
+            <a:avLst/>
+          </a:prstGeom>
+          <a:solidFill>
+            <a:srgbClr val="FFFFFF"/>
+          </a:solidFill>
+          <a:ln w="9525">
+            <a:solidFill>
+              <a:srgbClr val="E0E8F2"/>
+            </a:solidFill>
+            <a:prstDash val="solid"/>
+          </a:ln>
+        </p:spPr>
+      </p:sp>
+      <p:sp>
+        <p:nvSpPr>
+          <p:cNvPr id="55" name="Shape 53"/>
+          <p:cNvSpPr/>
+          <p:nvPr/>
+        </p:nvSpPr>
+        <p:spPr>
+          <a:xfrm>
+            <a:off x="4057549" y="5219700"/>
+            <a:ext cx="2324042" cy="1028700"/>
+          </a:xfrm>
+          <a:prstGeom prst="roundRect">
+            <a:avLst/>
+          </a:prstGeom>
+          <a:solidFill>
+            <a:srgbClr val="FFFFFF"/>
+          </a:solidFill>
+          <a:ln w="9525">
+            <a:solidFill>
+              <a:srgbClr val="E0E8F2"/>
+            </a:solidFill>
+            <a:prstDash val="solid"/>
+          </a:ln>
+        </p:spPr>
+      </p:sp>
+      <p:sp>
+        <p:nvSpPr>
+          <p:cNvPr id="56" name="Shape 54"/>
+          <p:cNvSpPr/>
+          <p:nvPr/>
+        </p:nvSpPr>
+        <p:spPr>
+          <a:xfrm>
+            <a:off x="2324042" y="5353050"/>
+            <a:ext cx="171446" cy="171450"/>
+          </a:xfrm>
+          <a:prstGeom prst="roundRect">
+            <a:avLst/>
+          </a:prstGeom>
+          <a:solidFill>
+            <a:srgbClr val="EAF2FF"/>
+          </a:solidFill>
+          <a:ln w="9525">
+            <a:solidFill>
+              <a:srgbClr val="B9D1FA"/>
+            </a:solidFill>
+            <a:prstDash val="solid"/>
+          </a:ln>
+        </p:spPr>
+      </p:sp>
+      <p:sp>
+        <p:nvSpPr>
+          <p:cNvPr id="57" name="Shape 55"/>
+          <p:cNvSpPr/>
+          <p:nvPr/>
+        </p:nvSpPr>
+        <p:spPr>
+          <a:xfrm>
+            <a:off x="4209945" y="5353050"/>
+            <a:ext cx="171446" cy="171450"/>
+          </a:xfrm>
+          <a:prstGeom prst="roundRect">
+            <a:avLst/>
+          </a:prstGeom>
+          <a:solidFill>
+            <a:srgbClr val="EAF2FF"/>
+          </a:solidFill>
+          <a:ln w="9525">
+            <a:solidFill>
+              <a:srgbClr val="B9D1FA"/>
+            </a:solidFill>
+            <a:prstDash val="solid"/>
+          </a:ln>
+        </p:spPr>
+      </p:sp>
+      <p:sp>
+        <p:nvSpPr>
+          <p:cNvPr id="58" name="Text 56"/>
+          <p:cNvSpPr/>
+          <p:nvPr/>
+        </p:nvSpPr>
+        <p:spPr>
+          <a:xfrm>
+            <a:off x="2571686" y="5353050"/>
+            <a:ext cx="742931" cy="161925"/>
+          </a:xfrm>
+          <a:prstGeom prst="rect">
+            <a:avLst/>
+          </a:prstGeom>
+          <a:noFill/>
+          <a:ln/>
+        </p:spPr>
+        <p:txBody>
+          <a:bodyPr wrap="square" lIns="0" tIns="0" rIns="0" bIns="0" rtlCol="0" anchor="t">
+            <a:normAutofit fontScale="92500"/>
+          </a:bodyPr>
+          <a:lstStyle/>
+          <a:p>
+            <a:pPr marL="0" indent="0" algn="l">
+              <a:buNone/>
+            </a:pPr>
+            <a:r>
+              <a:rPr lang="en-US" sz="975" b="1" dirty="0">
+                <a:solidFill>
+                  <a:srgbClr val="172033"/>
+                </a:solidFill>
+                <a:latin typeface="Microsoft YaHei" pitchFamily="34" charset="0"/>
+                <a:ea typeface="Microsoft YaHei" pitchFamily="34" charset="-122"/>
+                <a:cs typeface="Microsoft YaHei" pitchFamily="34" charset="-120"/>
+              </a:rPr>
+              <a:t>当前精度指标</a:t>
+            </a:r>
+            <a:endParaRPr lang="en-US" sz="975" dirty="0"/>
+          </a:p>
+        </p:txBody>
+      </p:sp>
+      <p:sp>
+        <p:nvSpPr>
+          <p:cNvPr id="59" name="Text 57"/>
+          <p:cNvSpPr/>
+          <p:nvPr/>
+        </p:nvSpPr>
+        <p:spPr>
+          <a:xfrm>
+            <a:off x="4457589" y="5353050"/>
+            <a:ext cx="495288" cy="161925"/>
+          </a:xfrm>
+          <a:prstGeom prst="rect">
+            <a:avLst/>
+          </a:prstGeom>
+          <a:noFill/>
+          <a:ln/>
+        </p:spPr>
+        <p:txBody>
+          <a:bodyPr wrap="square" lIns="0" tIns="0" rIns="0" bIns="0" rtlCol="0" anchor="t">
+            <a:normAutofit fontScale="92500"/>
+          </a:bodyPr>
+          <a:lstStyle/>
+          <a:p>
+            <a:pPr marL="0" indent="0" algn="l">
+              <a:buNone/>
+            </a:pPr>
+            <a:r>
+              <a:rPr lang="en-US" sz="975" b="1" dirty="0">
+                <a:solidFill>
+                  <a:srgbClr val="172033"/>
+                </a:solidFill>
+                <a:latin typeface="Microsoft YaHei" pitchFamily="34" charset="0"/>
+                <a:ea typeface="Microsoft YaHei" pitchFamily="34" charset="-122"/>
+                <a:cs typeface="Microsoft YaHei" pitchFamily="34" charset="-120"/>
+              </a:rPr>
+              <a:t>健康状态</a:t>
+            </a:r>
+            <a:endParaRPr lang="en-US" sz="975" dirty="0"/>
+          </a:p>
+        </p:txBody>
+      </p:sp>
+      <p:sp>
+        <p:nvSpPr>
+          <p:cNvPr id="60" name="Text 58"/>
+          <p:cNvSpPr/>
+          <p:nvPr/>
+        </p:nvSpPr>
+        <p:spPr>
+          <a:xfrm>
+            <a:off x="2362141" y="5619750"/>
+            <a:ext cx="681467" cy="142875"/>
+          </a:xfrm>
+          <a:prstGeom prst="rect">
+            <a:avLst/>
+          </a:prstGeom>
+          <a:noFill/>
+          <a:ln/>
+        </p:spPr>
+        <p:txBody>
+          <a:bodyPr wrap="square" lIns="0" tIns="0" rIns="0" bIns="0" rtlCol="0" anchor="t">
+            <a:normAutofit/>
+          </a:bodyPr>
+          <a:lstStyle/>
+          <a:p>
+            <a:pPr marL="0" indent="0" algn="l">
+              <a:buNone/>
+            </a:pPr>
+            <a:r>
+              <a:rPr lang="en-US" sz="825" dirty="0">
+                <a:solidFill>
+                  <a:srgbClr val="3D4C63"/>
+                </a:solidFill>
+                <a:latin typeface="Microsoft YaHei" pitchFamily="34" charset="0"/>
+                <a:ea typeface="Microsoft YaHei" pitchFamily="34" charset="-122"/>
+                <a:cs typeface="Microsoft YaHei" pitchFamily="34" charset="-120"/>
+              </a:rPr>
+              <a:t>位置误差 RMS</a:t>
+            </a:r>
+            <a:endParaRPr lang="en-US" sz="825" dirty="0"/>
+          </a:p>
+        </p:txBody>
+      </p:sp>
+      <p:sp>
+        <p:nvSpPr>
+          <p:cNvPr id="61" name="Text 59"/>
+          <p:cNvSpPr/>
+          <p:nvPr/>
+        </p:nvSpPr>
+        <p:spPr>
+          <a:xfrm>
+            <a:off x="3581310" y="5619750"/>
+            <a:ext cx="90783" cy="142875"/>
+          </a:xfrm>
+          <a:prstGeom prst="rect">
+            <a:avLst/>
+          </a:prstGeom>
+          <a:noFill/>
+          <a:ln/>
+        </p:spPr>
+        <p:txBody>
+          <a:bodyPr wrap="square" lIns="0" tIns="0" rIns="0" bIns="0" rtlCol="0" anchor="t">
+            <a:normAutofit fontScale="92500"/>
+          </a:bodyPr>
+          <a:lstStyle/>
+          <a:p>
+            <a:pPr marL="0" indent="0" algn="l">
+              <a:buNone/>
+            </a:pPr>
+            <a:r>
+              <a:rPr lang="en-US" sz="825" dirty="0">
+                <a:solidFill>
+                  <a:srgbClr val="3D4C63"/>
+                </a:solidFill>
+                <a:latin typeface="Microsoft YaHei" pitchFamily="34" charset="0"/>
+                <a:ea typeface="Microsoft YaHei" pitchFamily="34" charset="-122"/>
+                <a:cs typeface="Microsoft YaHei" pitchFamily="34" charset="-120"/>
+              </a:rPr>
+              <a:t>--</a:t>
+            </a:r>
+            <a:endParaRPr lang="en-US" sz="825" dirty="0"/>
+          </a:p>
+        </p:txBody>
+      </p:sp>
+      <p:sp>
+        <p:nvSpPr>
+          <p:cNvPr id="62" name="Text 60"/>
+          <p:cNvSpPr/>
+          <p:nvPr/>
+        </p:nvSpPr>
+        <p:spPr>
+          <a:xfrm>
+            <a:off x="2362141" y="5829300"/>
+            <a:ext cx="419090" cy="142875"/>
+          </a:xfrm>
+          <a:prstGeom prst="rect">
+            <a:avLst/>
+          </a:prstGeom>
+          <a:noFill/>
+          <a:ln/>
+        </p:spPr>
+        <p:txBody>
+          <a:bodyPr wrap="square" lIns="0" tIns="0" rIns="0" bIns="0" rtlCol="0" anchor="t">
+            <a:normAutofit fontScale="92500"/>
+          </a:bodyPr>
+          <a:lstStyle/>
+          <a:p>
+            <a:pPr marL="0" indent="0" algn="l">
+              <a:buNone/>
+            </a:pPr>
+            <a:r>
+              <a:rPr lang="en-US" sz="825" dirty="0">
+                <a:solidFill>
+                  <a:srgbClr val="3D4C63"/>
+                </a:solidFill>
+                <a:latin typeface="Microsoft YaHei" pitchFamily="34" charset="0"/>
+                <a:ea typeface="Microsoft YaHei" pitchFamily="34" charset="-122"/>
+                <a:cs typeface="Microsoft YaHei" pitchFamily="34" charset="-120"/>
+              </a:rPr>
+              <a:t>最大误差</a:t>
+            </a:r>
+            <a:endParaRPr lang="en-US" sz="825" dirty="0"/>
+          </a:p>
+        </p:txBody>
+      </p:sp>
+      <p:sp>
+        <p:nvSpPr>
+          <p:cNvPr id="63" name="Text 61"/>
+          <p:cNvSpPr/>
+          <p:nvPr/>
+        </p:nvSpPr>
+        <p:spPr>
+          <a:xfrm>
+            <a:off x="3581310" y="5829300"/>
+            <a:ext cx="90783" cy="142875"/>
+          </a:xfrm>
+          <a:prstGeom prst="rect">
+            <a:avLst/>
+          </a:prstGeom>
+          <a:noFill/>
+          <a:ln/>
+        </p:spPr>
+        <p:txBody>
+          <a:bodyPr wrap="square" lIns="0" tIns="0" rIns="0" bIns="0" rtlCol="0" anchor="t">
+            <a:normAutofit fontScale="92500"/>
+          </a:bodyPr>
+          <a:lstStyle/>
+          <a:p>
+            <a:pPr marL="0" indent="0" algn="l">
+              <a:buNone/>
+            </a:pPr>
+            <a:r>
+              <a:rPr lang="en-US" sz="825" dirty="0">
+                <a:solidFill>
+                  <a:srgbClr val="3D4C63"/>
+                </a:solidFill>
+                <a:latin typeface="Microsoft YaHei" pitchFamily="34" charset="0"/>
+                <a:ea typeface="Microsoft YaHei" pitchFamily="34" charset="-122"/>
+                <a:cs typeface="Microsoft YaHei" pitchFamily="34" charset="-120"/>
+              </a:rPr>
+              <a:t>--</a:t>
+            </a:r>
+            <a:endParaRPr lang="en-US" sz="825" dirty="0"/>
+          </a:p>
+        </p:txBody>
+      </p:sp>
+      <p:sp>
+        <p:nvSpPr>
+          <p:cNvPr id="64" name="Text 62"/>
+          <p:cNvSpPr/>
+          <p:nvPr/>
+        </p:nvSpPr>
+        <p:spPr>
+          <a:xfrm>
+            <a:off x="2362141" y="6048375"/>
+            <a:ext cx="419090" cy="142875"/>
+          </a:xfrm>
+          <a:prstGeom prst="rect">
+            <a:avLst/>
+          </a:prstGeom>
+          <a:noFill/>
+          <a:ln/>
+        </p:spPr>
+        <p:txBody>
+          <a:bodyPr wrap="square" lIns="0" tIns="0" rIns="0" bIns="0" rtlCol="0" anchor="t">
+            <a:normAutofit fontScale="92500"/>
+          </a:bodyPr>
+          <a:lstStyle/>
+          <a:p>
+            <a:pPr marL="0" indent="0" algn="l">
+              <a:buNone/>
+            </a:pPr>
+            <a:r>
+              <a:rPr lang="en-US" sz="825" dirty="0">
+                <a:solidFill>
+                  <a:srgbClr val="3D4C63"/>
+                </a:solidFill>
+                <a:latin typeface="Microsoft YaHei" pitchFamily="34" charset="0"/>
+                <a:ea typeface="Microsoft YaHei" pitchFamily="34" charset="-122"/>
+                <a:cs typeface="Microsoft YaHei" pitchFamily="34" charset="-120"/>
+              </a:rPr>
+              <a:t>当前结论</a:t>
+            </a:r>
+            <a:endParaRPr lang="en-US" sz="825" dirty="0"/>
+          </a:p>
+        </p:txBody>
+      </p:sp>
+      <p:sp>
+        <p:nvSpPr>
+          <p:cNvPr id="65" name="Text 63"/>
+          <p:cNvSpPr/>
+          <p:nvPr/>
+        </p:nvSpPr>
+        <p:spPr>
+          <a:xfrm>
+            <a:off x="3409865" y="6010275"/>
+            <a:ext cx="533387" cy="180975"/>
+          </a:xfrm>
+          <a:prstGeom prst="rect">
+            <a:avLst/>
+          </a:prstGeom>
+          <a:noFill/>
+          <a:ln/>
+        </p:spPr>
+        <p:txBody>
+          <a:bodyPr wrap="square" lIns="0" tIns="0" rIns="0" bIns="0" rtlCol="0" anchor="t">
+            <a:normAutofit/>
+          </a:bodyPr>
+          <a:lstStyle/>
+          <a:p>
+            <a:pPr marL="0" indent="0" algn="l">
+              <a:buNone/>
+            </a:pPr>
+            <a:r>
+              <a:rPr lang="en-US" sz="825" dirty="0">
+                <a:solidFill>
+                  <a:srgbClr val="36465C"/>
+                </a:solidFill>
+                <a:latin typeface="Microsoft YaHei" pitchFamily="34" charset="0"/>
+                <a:ea typeface="Microsoft YaHei" pitchFamily="34" charset="-122"/>
+                <a:cs typeface="Microsoft YaHei" pitchFamily="34" charset="-120"/>
+              </a:rPr>
+              <a:t>未初始化</a:t>
+            </a:r>
+            <a:endParaRPr lang="en-US" sz="825" dirty="0"/>
+          </a:p>
+        </p:txBody>
+      </p:sp>
+      <p:sp>
+        <p:nvSpPr>
+          <p:cNvPr id="66" name="Text 64"/>
+          <p:cNvSpPr/>
+          <p:nvPr/>
+        </p:nvSpPr>
+        <p:spPr>
+          <a:xfrm>
+            <a:off x="4267093" y="5724525"/>
+            <a:ext cx="552436" cy="282773"/>
+          </a:xfrm>
+          <a:prstGeom prst="rect">
+            <a:avLst/>
+          </a:prstGeom>
+          <a:noFill/>
+          <a:ln/>
+        </p:spPr>
+        <p:txBody>
+          <a:bodyPr wrap="square" lIns="0" tIns="0" rIns="0" bIns="0" rtlCol="0" anchor="t">
+            <a:normAutofit/>
+          </a:bodyPr>
+          <a:lstStyle/>
+          <a:p>
+            <a:pPr marL="0" indent="0" algn="ctr">
+              <a:buNone/>
+            </a:pPr>
+            <a:r>
+              <a:rPr lang="en-US" sz="825" b="1" dirty="0">
+                <a:solidFill>
+                  <a:srgbClr val="172033"/>
+                </a:solidFill>
+                <a:latin typeface="Microsoft YaHei" pitchFamily="34" charset="0"/>
+                <a:ea typeface="Microsoft YaHei" pitchFamily="34" charset="-122"/>
+                <a:cs typeface="Microsoft YaHei" pitchFamily="34" charset="-120"/>
+              </a:rPr>
+              <a:t>--</a:t>
+            </a:r>
+            <a:endParaRPr lang="en-US" sz="825" dirty="0"/>
+          </a:p>
+          <a:p>
+            <a:pPr marL="0" indent="0" algn="ctr">
+              <a:buNone/>
+            </a:pPr>
+            <a:r>
+              <a:rPr lang="en-US" sz="825" b="1" dirty="0">
+                <a:solidFill>
+                  <a:srgbClr val="172033"/>
+                </a:solidFill>
+                <a:latin typeface="Microsoft YaHei" pitchFamily="34" charset="0"/>
+                <a:ea typeface="Microsoft YaHei" pitchFamily="34" charset="-122"/>
+                <a:cs typeface="Microsoft YaHei" pitchFamily="34" charset="-120"/>
+              </a:rPr>
+              <a:t>未初始化</a:t>
+            </a:r>
+            <a:endParaRPr lang="en-US" sz="825" dirty="0"/>
+          </a:p>
+        </p:txBody>
+      </p:sp>
+      <p:sp>
+        <p:nvSpPr>
+          <p:cNvPr id="67" name="Text 65"/>
+          <p:cNvSpPr/>
+          <p:nvPr/>
+        </p:nvSpPr>
+        <p:spPr>
+          <a:xfrm>
+            <a:off x="5105272" y="5657850"/>
+            <a:ext cx="523862" cy="142875"/>
+          </a:xfrm>
+          <a:prstGeom prst="rect">
+            <a:avLst/>
+          </a:prstGeom>
+          <a:noFill/>
+          <a:ln/>
+        </p:spPr>
+        <p:txBody>
+          <a:bodyPr wrap="square" lIns="0" tIns="0" rIns="0" bIns="0" rtlCol="0" anchor="t">
+            <a:normAutofit fontScale="92500"/>
+          </a:bodyPr>
+          <a:lstStyle/>
+          <a:p>
+            <a:pPr marL="0" indent="0" algn="l">
+              <a:buNone/>
+            </a:pPr>
+            <a:r>
+              <a:rPr lang="en-US" sz="825" dirty="0">
+                <a:solidFill>
+                  <a:srgbClr val="3D4C63"/>
+                </a:solidFill>
+                <a:latin typeface="Microsoft YaHei" pitchFamily="34" charset="0"/>
+                <a:ea typeface="Microsoft YaHei" pitchFamily="34" charset="-122"/>
+                <a:cs typeface="Microsoft YaHei" pitchFamily="34" charset="-120"/>
+              </a:rPr>
+              <a:t>模型置信度</a:t>
+            </a:r>
+            <a:endParaRPr lang="en-US" sz="825" dirty="0"/>
+          </a:p>
+        </p:txBody>
+      </p:sp>
+      <p:sp>
+        <p:nvSpPr>
+          <p:cNvPr id="68" name="Text 66"/>
+          <p:cNvSpPr/>
+          <p:nvPr/>
+        </p:nvSpPr>
+        <p:spPr>
+          <a:xfrm>
+            <a:off x="5924402" y="5657850"/>
+            <a:ext cx="91527" cy="142875"/>
+          </a:xfrm>
+          <a:prstGeom prst="rect">
+            <a:avLst/>
+          </a:prstGeom>
+          <a:noFill/>
+          <a:ln/>
+        </p:spPr>
+        <p:txBody>
+          <a:bodyPr wrap="square" lIns="0" tIns="0" rIns="0" bIns="0" rtlCol="0" anchor="t">
+            <a:normAutofit fontScale="92500"/>
+          </a:bodyPr>
+          <a:lstStyle/>
+          <a:p>
+            <a:pPr marL="0" indent="0" algn="l">
+              <a:buNone/>
+            </a:pPr>
+            <a:r>
+              <a:rPr lang="en-US" sz="825" b="1" dirty="0">
+                <a:solidFill>
+                  <a:srgbClr val="657286"/>
+                </a:solidFill>
+                <a:latin typeface="Microsoft YaHei" pitchFamily="34" charset="0"/>
+                <a:ea typeface="Microsoft YaHei" pitchFamily="34" charset="-122"/>
+                <a:cs typeface="Microsoft YaHei" pitchFamily="34" charset="-120"/>
+              </a:rPr>
+              <a:t>--</a:t>
+            </a:r>
+            <a:endParaRPr lang="en-US" sz="825" dirty="0"/>
+          </a:p>
+        </p:txBody>
+      </p:sp>
+      <p:sp>
+        <p:nvSpPr>
+          <p:cNvPr id="69" name="Text 67"/>
+          <p:cNvSpPr/>
+          <p:nvPr/>
+        </p:nvSpPr>
+        <p:spPr>
+          <a:xfrm>
+            <a:off x="5105272" y="5924550"/>
+            <a:ext cx="419090" cy="142875"/>
+          </a:xfrm>
+          <a:prstGeom prst="rect">
+            <a:avLst/>
+          </a:prstGeom>
+          <a:noFill/>
+          <a:ln/>
+        </p:spPr>
+        <p:txBody>
+          <a:bodyPr wrap="square" lIns="0" tIns="0" rIns="0" bIns="0" rtlCol="0" anchor="t">
+            <a:normAutofit fontScale="92500"/>
+          </a:bodyPr>
+          <a:lstStyle/>
+          <a:p>
+            <a:pPr marL="0" indent="0" algn="l">
+              <a:buNone/>
+            </a:pPr>
+            <a:r>
+              <a:rPr lang="en-US" sz="825" dirty="0">
+                <a:solidFill>
+                  <a:srgbClr val="3D4C63"/>
+                </a:solidFill>
+                <a:latin typeface="Microsoft YaHei" pitchFamily="34" charset="0"/>
+                <a:ea typeface="Microsoft YaHei" pitchFamily="34" charset="-122"/>
+                <a:cs typeface="Microsoft YaHei" pitchFamily="34" charset="-120"/>
+              </a:rPr>
+              <a:t>当前状态</a:t>
+            </a:r>
+            <a:endParaRPr lang="en-US" sz="825" dirty="0"/>
+          </a:p>
+        </p:txBody>
+      </p:sp>
+      <p:sp>
+        <p:nvSpPr>
+          <p:cNvPr id="70" name="Text 68"/>
+          <p:cNvSpPr/>
+          <p:nvPr/>
+        </p:nvSpPr>
+        <p:spPr>
+          <a:xfrm>
+            <a:off x="5829154" y="5886450"/>
+            <a:ext cx="533387" cy="180975"/>
+          </a:xfrm>
+          <a:prstGeom prst="rect">
+            <a:avLst/>
+          </a:prstGeom>
+          <a:noFill/>
+          <a:ln/>
+        </p:spPr>
+        <p:txBody>
+          <a:bodyPr wrap="square" lIns="0" tIns="0" rIns="0" bIns="0" rtlCol="0" anchor="t">
+            <a:normAutofit/>
+          </a:bodyPr>
+          <a:lstStyle/>
+          <a:p>
+            <a:pPr marL="0" indent="0" algn="l">
+              <a:buNone/>
+            </a:pPr>
+            <a:r>
+              <a:rPr lang="en-US" sz="825" dirty="0">
+                <a:solidFill>
+                  <a:srgbClr val="36465C"/>
+                </a:solidFill>
+                <a:latin typeface="Microsoft YaHei" pitchFamily="34" charset="0"/>
+                <a:ea typeface="Microsoft YaHei" pitchFamily="34" charset="-122"/>
+                <a:cs typeface="Microsoft YaHei" pitchFamily="34" charset="-120"/>
+              </a:rPr>
+              <a:t>未初始化</a:t>
+            </a:r>
+            <a:endParaRPr lang="en-US" sz="825" dirty="0"/>
+          </a:p>
+        </p:txBody>
+      </p:sp>
+      <p:sp>
+        <p:nvSpPr>
+          <p:cNvPr id="71" name="Shape 69"/>
+          <p:cNvSpPr/>
+          <p:nvPr/>
+        </p:nvSpPr>
+        <p:spPr>
+          <a:xfrm>
+            <a:off x="6667333" y="542925"/>
+            <a:ext cx="5371966" cy="2667000"/>
+          </a:xfrm>
+          <a:prstGeom prst="roundRect">
+            <a:avLst/>
+          </a:prstGeom>
+          <a:solidFill>
+            <a:srgbClr val="FFFFFF"/>
+          </a:solidFill>
+          <a:ln w="9525">
+            <a:solidFill>
+              <a:srgbClr val="D6E2F2"/>
+            </a:solidFill>
+            <a:prstDash val="solid"/>
+          </a:ln>
+          <a:effectLst>
+            <a:outerShdw blurRad="1984" dist="794" dir="5400000" algn="bl" rotWithShape="0">
+              <a:srgbClr val="1F4D88">
+                <a:alpha val="8000"/>
+              </a:srgbClr>
+            </a:outerShdw>
+          </a:effectLst>
+        </p:spPr>
+      </p:sp>
+      <p:sp>
+        <p:nvSpPr>
+          <p:cNvPr id="72" name="Shape 70"/>
+          <p:cNvSpPr/>
+          <p:nvPr/>
+        </p:nvSpPr>
+        <p:spPr>
+          <a:xfrm>
+            <a:off x="6876878" y="723900"/>
+            <a:ext cx="171446" cy="171450"/>
+          </a:xfrm>
+          <a:prstGeom prst="roundRect">
+            <a:avLst/>
+          </a:prstGeom>
+          <a:solidFill>
+            <a:srgbClr val="EAF2FF"/>
+          </a:solidFill>
+          <a:ln w="9525">
+            <a:solidFill>
+              <a:srgbClr val="B9D1FA"/>
+            </a:solidFill>
+            <a:prstDash val="solid"/>
+          </a:ln>
+        </p:spPr>
+      </p:sp>
+      <p:sp>
+        <p:nvSpPr>
+          <p:cNvPr id="73" name="Text 71"/>
+          <p:cNvSpPr/>
+          <p:nvPr/>
+        </p:nvSpPr>
+        <p:spPr>
+          <a:xfrm>
+            <a:off x="7124522" y="714375"/>
+            <a:ext cx="609585" cy="200025"/>
+          </a:xfrm>
+          <a:prstGeom prst="rect">
+            <a:avLst/>
+          </a:prstGeom>
+          <a:noFill/>
+          <a:ln/>
+        </p:spPr>
+        <p:txBody>
+          <a:bodyPr wrap="square" lIns="0" tIns="0" rIns="0" bIns="0" rtlCol="0" anchor="t">
+            <a:normAutofit fontScale="92500"/>
+          </a:bodyPr>
+          <a:lstStyle/>
+          <a:p>
+            <a:pPr marL="0" indent="0" algn="l">
+              <a:buNone/>
+            </a:pPr>
+            <a:r>
+              <a:rPr lang="en-US" sz="1200" b="1" dirty="0">
+                <a:solidFill>
+                  <a:srgbClr val="111827"/>
+                </a:solidFill>
+                <a:latin typeface="Microsoft YaHei" pitchFamily="34" charset="0"/>
+                <a:ea typeface="Microsoft YaHei" pitchFamily="34" charset="-122"/>
+                <a:cs typeface="Microsoft YaHei" pitchFamily="34" charset="-120"/>
+              </a:rPr>
+              <a:t>常用设置</a:t>
+            </a:r>
+            <a:endParaRPr lang="en-US" sz="1200" dirty="0"/>
+          </a:p>
+        </p:txBody>
+      </p:sp>
+      <p:sp>
+        <p:nvSpPr>
+          <p:cNvPr id="74" name="Text 72"/>
+          <p:cNvSpPr/>
+          <p:nvPr/>
+        </p:nvSpPr>
+        <p:spPr>
+          <a:xfrm>
+            <a:off x="6876878" y="1066800"/>
+            <a:ext cx="819130" cy="152400"/>
+          </a:xfrm>
+          <a:prstGeom prst="rect">
+            <a:avLst/>
+          </a:prstGeom>
+          <a:noFill/>
+          <a:ln/>
+        </p:spPr>
+        <p:txBody>
+          <a:bodyPr wrap="square" lIns="0" tIns="0" rIns="0" bIns="0" rtlCol="0" anchor="t">
+            <a:normAutofit/>
+          </a:bodyPr>
+          <a:lstStyle/>
+          <a:p>
+            <a:pPr marL="0" indent="0" algn="l">
+              <a:buNone/>
+            </a:pPr>
+            <a:r>
+              <a:rPr lang="en-US" sz="900" b="1" dirty="0">
+                <a:solidFill>
+                  <a:srgbClr val="26344A"/>
+                </a:solidFill>
+                <a:latin typeface="Microsoft YaHei" pitchFamily="34" charset="0"/>
+                <a:ea typeface="Microsoft YaHei" pitchFamily="34" charset="-122"/>
+                <a:cs typeface="Microsoft YaHei" pitchFamily="34" charset="-120"/>
+              </a:rPr>
+              <a:t>超差阈值</a:t>
+            </a:r>
+            <a:endParaRPr lang="en-US" sz="900" dirty="0"/>
+          </a:p>
+        </p:txBody>
+      </p:sp>
+      <p:sp>
+        <p:nvSpPr>
+          <p:cNvPr id="75" name="Shape 73"/>
+          <p:cNvSpPr/>
+          <p:nvPr/>
+        </p:nvSpPr>
+        <p:spPr>
+          <a:xfrm>
+            <a:off x="7734107" y="1066800"/>
+            <a:ext cx="914377" cy="219075"/>
+          </a:xfrm>
+          <a:prstGeom prst="roundRect">
+            <a:avLst/>
+          </a:prstGeom>
+          <a:solidFill>
+            <a:srgbClr val="FBFDFF"/>
+          </a:solidFill>
+          <a:ln w="9525">
+            <a:solidFill>
+              <a:srgbClr val="D7E0EE"/>
+            </a:solidFill>
+            <a:prstDash val="solid"/>
+          </a:ln>
+        </p:spPr>
+      </p:sp>
+      <p:sp>
+        <p:nvSpPr>
+          <p:cNvPr id="76" name="Text 74"/>
+          <p:cNvSpPr/>
+          <p:nvPr/>
+        </p:nvSpPr>
+        <p:spPr>
+          <a:xfrm>
+            <a:off x="7829354" y="1066800"/>
+            <a:ext cx="498413" cy="142875"/>
+          </a:xfrm>
+          <a:prstGeom prst="rect">
+            <a:avLst/>
+          </a:prstGeom>
+          <a:noFill/>
+          <a:ln/>
+        </p:spPr>
+        <p:txBody>
+          <a:bodyPr wrap="square" lIns="0" tIns="0" rIns="0" bIns="0" rtlCol="0" anchor="t">
+            <a:normAutofit fontScale="92500"/>
+          </a:bodyPr>
+          <a:lstStyle/>
+          <a:p>
+            <a:pPr marL="0" indent="0" algn="l">
+              <a:buNone/>
+            </a:pPr>
+            <a:r>
+              <a:rPr lang="en-US" sz="825" dirty="0">
+                <a:solidFill>
+                  <a:srgbClr val="334155"/>
+                </a:solidFill>
+                <a:latin typeface="Microsoft YaHei" pitchFamily="34" charset="0"/>
+                <a:ea typeface="Microsoft YaHei" pitchFamily="34" charset="-122"/>
+                <a:cs typeface="Microsoft YaHei" pitchFamily="34" charset="-120"/>
+              </a:rPr>
+              <a:t>0.300 mm</a:t>
+            </a:r>
+            <a:endParaRPr lang="en-US" sz="825" dirty="0"/>
+          </a:p>
+        </p:txBody>
+      </p:sp>
+      <p:sp>
+        <p:nvSpPr>
+          <p:cNvPr id="77" name="Text 75"/>
+          <p:cNvSpPr/>
+          <p:nvPr/>
+        </p:nvSpPr>
+        <p:spPr>
+          <a:xfrm>
+            <a:off x="6876878" y="1428750"/>
+            <a:ext cx="819130" cy="152400"/>
+          </a:xfrm>
+          <a:prstGeom prst="rect">
+            <a:avLst/>
+          </a:prstGeom>
+          <a:noFill/>
+          <a:ln/>
+        </p:spPr>
+        <p:txBody>
+          <a:bodyPr wrap="square" lIns="0" tIns="0" rIns="0" bIns="0" rtlCol="0" anchor="t">
+            <a:normAutofit/>
+          </a:bodyPr>
+          <a:lstStyle/>
+          <a:p>
+            <a:pPr marL="0" indent="0" algn="l">
+              <a:buNone/>
+            </a:pPr>
+            <a:r>
+              <a:rPr lang="en-US" sz="900" b="1" dirty="0">
+                <a:solidFill>
+                  <a:srgbClr val="26344A"/>
+                </a:solidFill>
+                <a:latin typeface="Microsoft YaHei" pitchFamily="34" charset="0"/>
+                <a:ea typeface="Microsoft YaHei" pitchFamily="34" charset="-122"/>
+                <a:cs typeface="Microsoft YaHei" pitchFamily="34" charset="-120"/>
+              </a:rPr>
+              <a:t>模型路径</a:t>
+            </a:r>
+            <a:endParaRPr lang="en-US" sz="900" dirty="0"/>
+          </a:p>
+        </p:txBody>
+      </p:sp>
+      <p:sp>
+        <p:nvSpPr>
+          <p:cNvPr id="78" name="Shape 76"/>
+          <p:cNvSpPr/>
+          <p:nvPr/>
+        </p:nvSpPr>
+        <p:spPr>
+          <a:xfrm>
+            <a:off x="7734107" y="1428750"/>
+            <a:ext cx="4000400" cy="219075"/>
+          </a:xfrm>
+          <a:prstGeom prst="roundRect">
+            <a:avLst/>
+          </a:prstGeom>
+          <a:solidFill>
+            <a:srgbClr val="FBFDFF"/>
+          </a:solidFill>
+          <a:ln w="9525">
+            <a:solidFill>
+              <a:srgbClr val="D7E0EE"/>
+            </a:solidFill>
+            <a:prstDash val="solid"/>
+          </a:ln>
+        </p:spPr>
+      </p:sp>
+      <p:sp>
+        <p:nvSpPr>
+          <p:cNvPr id="79" name="Text 77"/>
+          <p:cNvSpPr/>
+          <p:nvPr/>
+        </p:nvSpPr>
+        <p:spPr>
+          <a:xfrm>
+            <a:off x="7829354" y="1428750"/>
+            <a:ext cx="1683650" cy="142875"/>
+          </a:xfrm>
+          <a:prstGeom prst="rect">
+            <a:avLst/>
+          </a:prstGeom>
+          <a:noFill/>
+          <a:ln/>
+        </p:spPr>
+        <p:txBody>
+          <a:bodyPr wrap="square" lIns="0" tIns="0" rIns="0" bIns="0" rtlCol="0" anchor="t">
+            <a:normAutofit/>
+          </a:bodyPr>
+          <a:lstStyle/>
+          <a:p>
+            <a:pPr marL="0" indent="0" algn="l">
+              <a:buNone/>
+            </a:pPr>
+            <a:r>
+              <a:rPr lang="en-US" sz="825" dirty="0">
+                <a:solidFill>
+                  <a:srgbClr val="334155"/>
+                </a:solidFill>
+                <a:latin typeface="Microsoft YaHei" pitchFamily="34" charset="0"/>
+                <a:ea typeface="Microsoft YaHei" pitchFamily="34" charset="-122"/>
+                <a:cs typeface="Microsoft YaHei" pitchFamily="34" charset="-120"/>
+              </a:rPr>
+              <a:t>D:\Projects\UR_示例产线\model\...</a:t>
+            </a:r>
+            <a:endParaRPr lang="en-US" sz="825" dirty="0"/>
+          </a:p>
+        </p:txBody>
+      </p:sp>
+      <p:sp>
+        <p:nvSpPr>
+          <p:cNvPr id="80" name="Text 78"/>
+          <p:cNvSpPr/>
+          <p:nvPr/>
+        </p:nvSpPr>
+        <p:spPr>
+          <a:xfrm>
+            <a:off x="6876878" y="1790700"/>
+            <a:ext cx="819130" cy="152400"/>
+          </a:xfrm>
+          <a:prstGeom prst="rect">
+            <a:avLst/>
+          </a:prstGeom>
+          <a:noFill/>
+          <a:ln/>
+        </p:spPr>
+        <p:txBody>
+          <a:bodyPr wrap="square" lIns="0" tIns="0" rIns="0" bIns="0" rtlCol="0" anchor="t">
+            <a:normAutofit/>
+          </a:bodyPr>
+          <a:lstStyle/>
+          <a:p>
+            <a:pPr marL="0" indent="0" algn="l">
+              <a:buNone/>
+            </a:pPr>
+            <a:r>
+              <a:rPr lang="en-US" sz="900" b="1" dirty="0">
+                <a:solidFill>
+                  <a:srgbClr val="26344A"/>
+                </a:solidFill>
+                <a:latin typeface="Microsoft YaHei" pitchFamily="34" charset="0"/>
+                <a:ea typeface="Microsoft YaHei" pitchFamily="34" charset="-122"/>
+                <a:cs typeface="Microsoft YaHei" pitchFamily="34" charset="-120"/>
+              </a:rPr>
+              <a:t>参数文件</a:t>
+            </a:r>
+            <a:endParaRPr lang="en-US" sz="900" dirty="0"/>
+          </a:p>
+        </p:txBody>
+      </p:sp>
+      <p:sp>
+        <p:nvSpPr>
+          <p:cNvPr id="81" name="Shape 79"/>
+          <p:cNvSpPr/>
+          <p:nvPr/>
+        </p:nvSpPr>
+        <p:spPr>
+          <a:xfrm>
+            <a:off x="7734107" y="1790700"/>
+            <a:ext cx="4000400" cy="219075"/>
+          </a:xfrm>
+          <a:prstGeom prst="roundRect">
+            <a:avLst/>
+          </a:prstGeom>
+          <a:solidFill>
+            <a:srgbClr val="FBFDFF"/>
+          </a:solidFill>
+          <a:ln w="9525">
+            <a:solidFill>
+              <a:srgbClr val="D7E0EE"/>
+            </a:solidFill>
+            <a:prstDash val="solid"/>
+          </a:ln>
+        </p:spPr>
+      </p:sp>
+      <p:sp>
+        <p:nvSpPr>
+          <p:cNvPr id="82" name="Text 80"/>
+          <p:cNvSpPr/>
+          <p:nvPr/>
+        </p:nvSpPr>
+        <p:spPr>
+          <a:xfrm>
+            <a:off x="7829354" y="1790700"/>
+            <a:ext cx="2516472" cy="142875"/>
+          </a:xfrm>
+          <a:prstGeom prst="rect">
+            <a:avLst/>
+          </a:prstGeom>
+          <a:noFill/>
+          <a:ln/>
+        </p:spPr>
+        <p:txBody>
+          <a:bodyPr wrap="square" lIns="0" tIns="0" rIns="0" bIns="0" rtlCol="0" anchor="t">
+            <a:normAutofit fontScale="92500"/>
+          </a:bodyPr>
+          <a:lstStyle/>
+          <a:p>
+            <a:pPr marL="0" indent="0" algn="l">
+              <a:buNone/>
+            </a:pPr>
+            <a:r>
+              <a:rPr lang="en-US" sz="825" dirty="0">
+                <a:solidFill>
+                  <a:srgbClr val="334155"/>
+                </a:solidFill>
+                <a:latin typeface="Microsoft YaHei" pitchFamily="34" charset="0"/>
+                <a:ea typeface="Microsoft YaHei" pitchFamily="34" charset="-122"/>
+                <a:cs typeface="Microsoft YaHei" pitchFamily="34" charset="-120"/>
+              </a:rPr>
+              <a:t>D:\Projects\UR_示例产线\config\calib_params.yaml</a:t>
+            </a:r>
+            <a:endParaRPr lang="en-US" sz="825" dirty="0"/>
+          </a:p>
+        </p:txBody>
+      </p:sp>
+      <p:sp>
+        <p:nvSpPr>
+          <p:cNvPr id="83" name="Text 81"/>
+          <p:cNvSpPr/>
+          <p:nvPr/>
+        </p:nvSpPr>
+        <p:spPr>
+          <a:xfrm>
+            <a:off x="6876878" y="2152650"/>
+            <a:ext cx="819130" cy="152400"/>
+          </a:xfrm>
+          <a:prstGeom prst="rect">
+            <a:avLst/>
+          </a:prstGeom>
+          <a:noFill/>
+          <a:ln/>
+        </p:spPr>
+        <p:txBody>
+          <a:bodyPr wrap="square" lIns="0" tIns="0" rIns="0" bIns="0" rtlCol="0" anchor="t">
+            <a:normAutofit/>
+          </a:bodyPr>
+          <a:lstStyle/>
+          <a:p>
+            <a:pPr marL="0" indent="0" algn="l">
+              <a:buNone/>
+            </a:pPr>
+            <a:r>
+              <a:rPr lang="en-US" sz="900" b="1" dirty="0">
+                <a:solidFill>
+                  <a:srgbClr val="26344A"/>
+                </a:solidFill>
+                <a:latin typeface="Microsoft YaHei" pitchFamily="34" charset="0"/>
+                <a:ea typeface="Microsoft YaHei" pitchFamily="34" charset="-122"/>
+                <a:cs typeface="Microsoft YaHei" pitchFamily="34" charset="-120"/>
+              </a:rPr>
+              <a:t>校验协议</a:t>
+            </a:r>
+            <a:endParaRPr lang="en-US" sz="900" dirty="0"/>
+          </a:p>
+        </p:txBody>
+      </p:sp>
+      <p:sp>
+        <p:nvSpPr>
+          <p:cNvPr id="84" name="Shape 82"/>
+          <p:cNvSpPr/>
+          <p:nvPr/>
+        </p:nvSpPr>
+        <p:spPr>
+          <a:xfrm>
+            <a:off x="7734107" y="2152650"/>
+            <a:ext cx="3714657" cy="219075"/>
+          </a:xfrm>
+          <a:prstGeom prst="roundRect">
+            <a:avLst/>
+          </a:prstGeom>
+          <a:solidFill>
+            <a:srgbClr val="FBFDFF"/>
+          </a:solidFill>
+          <a:ln w="9525">
+            <a:solidFill>
+              <a:srgbClr val="D7E0EE"/>
+            </a:solidFill>
+            <a:prstDash val="solid"/>
+          </a:ln>
+        </p:spPr>
+      </p:sp>
+      <p:sp>
+        <p:nvSpPr>
+          <p:cNvPr id="85" name="Text 83"/>
+          <p:cNvSpPr/>
+          <p:nvPr/>
+        </p:nvSpPr>
+        <p:spPr>
+          <a:xfrm>
+            <a:off x="7829354" y="2152650"/>
+            <a:ext cx="1170653" cy="142875"/>
+          </a:xfrm>
+          <a:prstGeom prst="rect">
+            <a:avLst/>
+          </a:prstGeom>
+          <a:noFill/>
+          <a:ln/>
+        </p:spPr>
+        <p:txBody>
+          <a:bodyPr wrap="square" lIns="0" tIns="0" rIns="0" bIns="0" rtlCol="0" anchor="t">
+            <a:normAutofit fontScale="92500"/>
+          </a:bodyPr>
+          <a:lstStyle/>
+          <a:p>
+            <a:pPr marL="0" indent="0" algn="l">
+              <a:buNone/>
+            </a:pPr>
+            <a:r>
+              <a:rPr lang="en-US" sz="825" dirty="0">
+                <a:solidFill>
+                  <a:srgbClr val="334155"/>
+                </a:solidFill>
+                <a:latin typeface="Microsoft YaHei" pitchFamily="34" charset="0"/>
+                <a:ea typeface="Microsoft YaHei" pitchFamily="34" charset="-122"/>
+                <a:cs typeface="Microsoft YaHei" pitchFamily="34" charset="-120"/>
+              </a:rPr>
+              <a:t>默认校验协议集（24点）</a:t>
+            </a:r>
+            <a:endParaRPr lang="en-US" sz="825" dirty="0"/>
+          </a:p>
+        </p:txBody>
+      </p:sp>
+      <p:sp>
+        <p:nvSpPr>
+          <p:cNvPr id="86" name="Shape 84"/>
+          <p:cNvSpPr/>
+          <p:nvPr/>
+        </p:nvSpPr>
+        <p:spPr>
+          <a:xfrm>
+            <a:off x="11524962" y="2152650"/>
+            <a:ext cx="400040" cy="219075"/>
+          </a:xfrm>
+          <a:prstGeom prst="roundRect">
+            <a:avLst/>
+          </a:prstGeom>
+          <a:solidFill>
+            <a:srgbClr val="FFFFFF">
+              <a:alpha val="0"/>
+            </a:srgbClr>
+          </a:solidFill>
+          <a:ln w="9525">
+            <a:solidFill>
+              <a:srgbClr val="B8D0F6"/>
+            </a:solidFill>
+            <a:prstDash val="solid"/>
+          </a:ln>
+        </p:spPr>
+      </p:sp>
+      <p:sp>
+        <p:nvSpPr>
+          <p:cNvPr id="87" name="Text 85"/>
+          <p:cNvSpPr/>
+          <p:nvPr/>
+        </p:nvSpPr>
+        <p:spPr>
+          <a:xfrm>
+            <a:off x="11524962" y="2200275"/>
+            <a:ext cx="400040" cy="142875"/>
+          </a:xfrm>
+          <a:prstGeom prst="rect">
+            <a:avLst/>
+          </a:prstGeom>
+          <a:noFill/>
+          <a:ln/>
+        </p:spPr>
+        <p:txBody>
+          <a:bodyPr wrap="square" lIns="0" tIns="0" rIns="0" bIns="0" rtlCol="0" anchor="t">
+            <a:normAutofit/>
+          </a:bodyPr>
+          <a:lstStyle/>
+          <a:p>
+            <a:pPr marL="0" indent="0" algn="ctr">
+              <a:buNone/>
+            </a:pPr>
+            <a:r>
+              <a:rPr lang="en-US" sz="825" b="1" dirty="0">
+                <a:solidFill>
+                  <a:srgbClr val="1F6FE5"/>
+                </a:solidFill>
+                <a:latin typeface="Microsoft YaHei" pitchFamily="34" charset="0"/>
+                <a:ea typeface="Microsoft YaHei" pitchFamily="34" charset="-122"/>
+                <a:cs typeface="Microsoft YaHei" pitchFamily="34" charset="-120"/>
+              </a:rPr>
+              <a:t>管理</a:t>
+            </a:r>
+            <a:endParaRPr lang="en-US" sz="825" dirty="0"/>
+          </a:p>
+        </p:txBody>
+      </p:sp>
+      <p:sp>
+        <p:nvSpPr>
+          <p:cNvPr id="88" name="Text 86"/>
+          <p:cNvSpPr/>
+          <p:nvPr/>
+        </p:nvSpPr>
+        <p:spPr>
+          <a:xfrm>
+            <a:off x="6876878" y="2514600"/>
+            <a:ext cx="819130" cy="152400"/>
+          </a:xfrm>
+          <a:prstGeom prst="rect">
+            <a:avLst/>
+          </a:prstGeom>
+          <a:noFill/>
+          <a:ln/>
+        </p:spPr>
+        <p:txBody>
+          <a:bodyPr wrap="square" lIns="0" tIns="0" rIns="0" bIns="0" rtlCol="0" anchor="t">
+            <a:normAutofit/>
+          </a:bodyPr>
+          <a:lstStyle/>
+          <a:p>
+            <a:pPr marL="0" indent="0" algn="l">
+              <a:buNone/>
+            </a:pPr>
+            <a:r>
+              <a:rPr lang="en-US" sz="900" b="1" dirty="0">
+                <a:solidFill>
+                  <a:srgbClr val="26344A"/>
+                </a:solidFill>
+                <a:latin typeface="Microsoft YaHei" pitchFamily="34" charset="0"/>
+                <a:ea typeface="Microsoft YaHei" pitchFamily="34" charset="-122"/>
+                <a:cs typeface="Microsoft YaHei" pitchFamily="34" charset="-120"/>
+              </a:rPr>
+              <a:t>扫描点数</a:t>
+            </a:r>
+            <a:endParaRPr lang="en-US" sz="900" dirty="0"/>
+          </a:p>
+        </p:txBody>
+      </p:sp>
+      <p:sp>
+        <p:nvSpPr>
+          <p:cNvPr id="89" name="Shape 87"/>
+          <p:cNvSpPr/>
+          <p:nvPr/>
+        </p:nvSpPr>
+        <p:spPr>
+          <a:xfrm>
+            <a:off x="7734107" y="2514600"/>
+            <a:ext cx="1123922" cy="228600"/>
+          </a:xfrm>
+          <a:prstGeom prst="roundRect">
+            <a:avLst/>
+          </a:prstGeom>
+          <a:solidFill>
+            <a:srgbClr val="FFFFFF">
+              <a:alpha val="0"/>
+            </a:srgbClr>
+          </a:solidFill>
+          <a:ln w="9525">
+            <a:solidFill>
+              <a:srgbClr val="D7E0EE"/>
+            </a:solidFill>
+            <a:prstDash val="solid"/>
+          </a:ln>
+        </p:spPr>
+      </p:sp>
+      <p:sp>
+        <p:nvSpPr>
+          <p:cNvPr id="90" name="Text 88"/>
+          <p:cNvSpPr/>
+          <p:nvPr/>
+        </p:nvSpPr>
+        <p:spPr>
+          <a:xfrm>
+            <a:off x="7838879" y="2552700"/>
+            <a:ext cx="84830" cy="152400"/>
+          </a:xfrm>
+          <a:prstGeom prst="rect">
+            <a:avLst/>
+          </a:prstGeom>
+          <a:noFill/>
+          <a:ln/>
+        </p:spPr>
+        <p:txBody>
+          <a:bodyPr wrap="square" lIns="0" tIns="0" rIns="0" bIns="0" rtlCol="0" anchor="t">
+            <a:normAutofit/>
+          </a:bodyPr>
+          <a:lstStyle/>
+          <a:p>
+            <a:pPr marL="0" indent="0" algn="l">
+              <a:buNone/>
+            </a:pPr>
+            <a:r>
+              <a:rPr lang="en-US" sz="900" dirty="0">
+                <a:solidFill>
+                  <a:srgbClr val="4B5870"/>
+                </a:solidFill>
+                <a:latin typeface="Microsoft YaHei" pitchFamily="34" charset="0"/>
+                <a:ea typeface="Microsoft YaHei" pitchFamily="34" charset="-122"/>
+                <a:cs typeface="Microsoft YaHei" pitchFamily="34" charset="-120"/>
+              </a:rPr>
+              <a:t>−</a:t>
+            </a:r>
+            <a:endParaRPr lang="en-US" sz="900" dirty="0"/>
+          </a:p>
+        </p:txBody>
+      </p:sp>
+      <p:sp>
+        <p:nvSpPr>
+          <p:cNvPr id="91" name="Text 89"/>
+          <p:cNvSpPr/>
+          <p:nvPr/>
+        </p:nvSpPr>
+        <p:spPr>
+          <a:xfrm>
+            <a:off x="8200820" y="2552700"/>
+            <a:ext cx="134091" cy="152400"/>
+          </a:xfrm>
+          <a:prstGeom prst="rect">
+            <a:avLst/>
+          </a:prstGeom>
+          <a:noFill/>
+          <a:ln/>
+        </p:spPr>
+        <p:txBody>
+          <a:bodyPr wrap="square" lIns="0" tIns="0" rIns="0" bIns="0" rtlCol="0" anchor="t">
+            <a:normAutofit/>
+          </a:bodyPr>
+          <a:lstStyle/>
+          <a:p>
+            <a:pPr marL="0" indent="0" algn="l">
+              <a:buNone/>
+            </a:pPr>
+            <a:r>
+              <a:rPr lang="en-US" sz="900" dirty="0">
+                <a:solidFill>
+                  <a:srgbClr val="101828"/>
+                </a:solidFill>
+                <a:latin typeface="Microsoft YaHei" pitchFamily="34" charset="0"/>
+                <a:ea typeface="Microsoft YaHei" pitchFamily="34" charset="-122"/>
+                <a:cs typeface="Microsoft YaHei" pitchFamily="34" charset="-120"/>
+              </a:rPr>
+              <a:t>20</a:t>
+            </a:r>
+            <a:endParaRPr lang="en-US" sz="900" dirty="0"/>
+          </a:p>
+        </p:txBody>
+      </p:sp>
+      <p:sp>
+        <p:nvSpPr>
+          <p:cNvPr id="92" name="Text 90"/>
+          <p:cNvSpPr/>
+          <p:nvPr/>
+        </p:nvSpPr>
+        <p:spPr>
+          <a:xfrm>
+            <a:off x="8619909" y="2552700"/>
+            <a:ext cx="114297" cy="152400"/>
+          </a:xfrm>
+          <a:prstGeom prst="rect">
+            <a:avLst/>
+          </a:prstGeom>
+          <a:noFill/>
+          <a:ln/>
+        </p:spPr>
+        <p:txBody>
+          <a:bodyPr wrap="square" lIns="0" tIns="0" rIns="0" bIns="0" rtlCol="0" anchor="t">
+            <a:normAutofit/>
+          </a:bodyPr>
+          <a:lstStyle/>
+          <a:p>
+            <a:pPr marL="0" indent="0" algn="l">
+              <a:buNone/>
+            </a:pPr>
+            <a:r>
+              <a:rPr lang="en-US" sz="900" dirty="0">
+                <a:solidFill>
+                  <a:srgbClr val="4B5870"/>
+                </a:solidFill>
+                <a:latin typeface="Microsoft YaHei" pitchFamily="34" charset="0"/>
+                <a:ea typeface="Microsoft YaHei" pitchFamily="34" charset="-122"/>
+                <a:cs typeface="Microsoft YaHei" pitchFamily="34" charset="-120"/>
+              </a:rPr>
+              <a:t>＋</a:t>
+            </a:r>
+            <a:endParaRPr lang="en-US" sz="900" dirty="0"/>
+          </a:p>
+        </p:txBody>
+      </p:sp>
+      <p:sp>
+        <p:nvSpPr>
+          <p:cNvPr id="93" name="Text 91"/>
+          <p:cNvSpPr/>
+          <p:nvPr/>
+        </p:nvSpPr>
+        <p:spPr>
+          <a:xfrm>
+            <a:off x="6876878" y="2876550"/>
+            <a:ext cx="819130" cy="304800"/>
+          </a:xfrm>
+          <a:prstGeom prst="rect">
+            <a:avLst/>
+          </a:prstGeom>
+          <a:noFill/>
+          <a:ln/>
+        </p:spPr>
+        <p:txBody>
+          <a:bodyPr wrap="square" lIns="0" tIns="0" rIns="0" bIns="0" rtlCol="0" anchor="t">
+            <a:normAutofit/>
+          </a:bodyPr>
+          <a:lstStyle/>
+          <a:p>
+            <a:pPr marL="0" indent="0" algn="l">
+              <a:buNone/>
+            </a:pPr>
+            <a:r>
+              <a:rPr lang="en-US" sz="900" b="1" dirty="0">
+                <a:solidFill>
+                  <a:srgbClr val="26344A"/>
+                </a:solidFill>
+                <a:latin typeface="Microsoft YaHei" pitchFamily="34" charset="0"/>
+                <a:ea typeface="Microsoft YaHei" pitchFamily="34" charset="-122"/>
+                <a:cs typeface="Microsoft YaHei" pitchFamily="34" charset="-120"/>
+              </a:rPr>
+              <a:t>启动扫描配置目录</a:t>
+            </a:r>
+            <a:endParaRPr lang="en-US" sz="900" dirty="0"/>
+          </a:p>
+        </p:txBody>
+      </p:sp>
+      <p:sp>
+        <p:nvSpPr>
+          <p:cNvPr id="94" name="Shape 92"/>
+          <p:cNvSpPr/>
+          <p:nvPr/>
+        </p:nvSpPr>
+        <p:spPr>
+          <a:xfrm>
+            <a:off x="7734107" y="2895600"/>
+            <a:ext cx="323842" cy="171450"/>
+          </a:xfrm>
+          <a:prstGeom prst="roundRect">
+            <a:avLst/>
+          </a:prstGeom>
+          <a:solidFill>
+            <a:srgbClr val="CFD8E6"/>
+          </a:solidFill>
+          <a:ln w="12700">
+            <a:solidFill>
+              <a:srgbClr val="FFFFFF">
+                <a:alpha val="0"/>
+              </a:srgbClr>
+            </a:solidFill>
+            <a:prstDash val="solid"/>
+          </a:ln>
+        </p:spPr>
+      </p:sp>
+      <p:sp>
+        <p:nvSpPr>
+          <p:cNvPr id="95" name="Shape 93"/>
+          <p:cNvSpPr/>
+          <p:nvPr/>
+        </p:nvSpPr>
+        <p:spPr>
+          <a:xfrm>
+            <a:off x="6838779" y="2800350"/>
+            <a:ext cx="5029074" cy="285750"/>
+          </a:xfrm>
+          <a:prstGeom prst="roundRect">
+            <a:avLst/>
+          </a:prstGeom>
+          <a:solidFill>
+            <a:srgbClr val="FFF8EF"/>
+          </a:solidFill>
+          <a:ln w="9525">
+            <a:solidFill>
+              <a:srgbClr val="FFD190"/>
+            </a:solidFill>
+            <a:prstDash val="solid"/>
+          </a:ln>
+        </p:spPr>
+      </p:sp>
+      <p:sp>
+        <p:nvSpPr>
+          <p:cNvPr id="96" name="Shape 94"/>
+          <p:cNvSpPr/>
+          <p:nvPr/>
+        </p:nvSpPr>
+        <p:spPr>
+          <a:xfrm>
+            <a:off x="6934027" y="2938463"/>
+            <a:ext cx="114297" cy="0"/>
+          </a:xfrm>
+          <a:prstGeom prst="line">
+            <a:avLst/>
+          </a:prstGeom>
+          <a:solidFill>
+            <a:srgbClr val="FFFFFF">
+              <a:alpha val="0"/>
+            </a:srgbClr>
+          </a:solidFill>
+          <a:ln w="104775">
+            <a:solidFill>
+              <a:srgbClr val="FF9C16"/>
+            </a:solidFill>
+            <a:prstDash val="solid"/>
+          </a:ln>
+        </p:spPr>
+      </p:sp>
+      <p:sp>
+        <p:nvSpPr>
+          <p:cNvPr id="97" name="Text 95"/>
+          <p:cNvSpPr/>
+          <p:nvPr/>
+        </p:nvSpPr>
+        <p:spPr>
+          <a:xfrm>
+            <a:off x="7086423" y="2867025"/>
+            <a:ext cx="4333767" cy="142875"/>
+          </a:xfrm>
+          <a:prstGeom prst="rect">
+            <a:avLst/>
+          </a:prstGeom>
+          <a:noFill/>
+          <a:ln/>
+        </p:spPr>
+        <p:txBody>
+          <a:bodyPr wrap="square" lIns="0" tIns="0" rIns="0" bIns="0" rtlCol="0" anchor="t">
+            <a:normAutofit/>
+          </a:bodyPr>
+          <a:lstStyle/>
+          <a:p>
+            <a:pPr marL="0" indent="0" algn="l">
+              <a:buNone/>
+            </a:pPr>
+            <a:r>
+              <a:rPr lang="en-US" sz="825" b="1" dirty="0">
+                <a:solidFill>
+                  <a:srgbClr val="B65B04"/>
+                </a:solidFill>
+                <a:latin typeface="Microsoft YaHei" pitchFamily="34" charset="0"/>
+                <a:ea typeface="Microsoft YaHei" pitchFamily="34" charset="-122"/>
+                <a:cs typeface="Microsoft YaHei" pitchFamily="34" charset="-120"/>
+              </a:rPr>
+              <a:t>配置不完整：请加载三维模型与参数文件以完成初始化</a:t>
+            </a:r>
+            <a:endParaRPr lang="en-US" sz="825" dirty="0"/>
+          </a:p>
+        </p:txBody>
+      </p:sp>
+      <p:sp>
+        <p:nvSpPr>
+          <p:cNvPr id="98" name="Shape 96"/>
+          <p:cNvSpPr/>
+          <p:nvPr/>
+        </p:nvSpPr>
+        <p:spPr>
+          <a:xfrm>
+            <a:off x="6667333" y="3352800"/>
+            <a:ext cx="5371966" cy="3076575"/>
+          </a:xfrm>
+          <a:prstGeom prst="roundRect">
+            <a:avLst/>
+          </a:prstGeom>
+          <a:solidFill>
+            <a:srgbClr val="FFFFFF"/>
+          </a:solidFill>
+          <a:ln w="9525">
+            <a:solidFill>
+              <a:srgbClr val="D6E2F2"/>
+            </a:solidFill>
+            <a:prstDash val="solid"/>
+          </a:ln>
+          <a:effectLst>
+            <a:outerShdw blurRad="1984" dist="794" dir="5400000" algn="bl" rotWithShape="0">
+              <a:srgbClr val="1F4D88">
+                <a:alpha val="8000"/>
+              </a:srgbClr>
+            </a:outerShdw>
+          </a:effectLst>
+        </p:spPr>
+      </p:sp>
+      <p:sp>
+        <p:nvSpPr>
+          <p:cNvPr id="99" name="Text 97"/>
+          <p:cNvSpPr/>
+          <p:nvPr/>
+        </p:nvSpPr>
+        <p:spPr>
+          <a:xfrm>
+            <a:off x="6857829" y="3524250"/>
+            <a:ext cx="761981" cy="200025"/>
+          </a:xfrm>
+          <a:prstGeom prst="rect">
+            <a:avLst/>
+          </a:prstGeom>
+          <a:noFill/>
+          <a:ln/>
+        </p:spPr>
+        <p:txBody>
+          <a:bodyPr wrap="square" lIns="0" tIns="0" rIns="0" bIns="0" rtlCol="0" anchor="t">
+            <a:normAutofit fontScale="92500"/>
+          </a:bodyPr>
+          <a:lstStyle/>
+          <a:p>
+            <a:pPr marL="0" indent="0" algn="l">
+              <a:buNone/>
+            </a:pPr>
+            <a:r>
+              <a:rPr lang="en-US" sz="1200" b="1" dirty="0">
+                <a:solidFill>
+                  <a:srgbClr val="111827"/>
+                </a:solidFill>
+                <a:latin typeface="Microsoft YaHei" pitchFamily="34" charset="0"/>
+                <a:ea typeface="Microsoft YaHei" pitchFamily="34" charset="-122"/>
+                <a:cs typeface="Microsoft YaHei" pitchFamily="34" charset="-120"/>
+              </a:rPr>
+              <a:t>初始化指南</a:t>
+            </a:r>
+            <a:endParaRPr lang="en-US" sz="1200" dirty="0"/>
+          </a:p>
+        </p:txBody>
+      </p:sp>
+      <p:sp>
+        <p:nvSpPr>
+          <p:cNvPr id="100" name="Shape 98"/>
+          <p:cNvSpPr/>
+          <p:nvPr/>
+        </p:nvSpPr>
+        <p:spPr>
+          <a:xfrm>
+            <a:off x="8991375" y="3524250"/>
+            <a:ext cx="9525" cy="2724150"/>
+          </a:xfrm>
+          <a:prstGeom prst="rect">
+            <a:avLst/>
+          </a:prstGeom>
+          <a:solidFill>
+            <a:srgbClr val="E6EDF6"/>
+          </a:solidFill>
+          <a:ln w="12700">
+            <a:solidFill>
+              <a:srgbClr val="FFFFFF">
+                <a:alpha val="0"/>
+              </a:srgbClr>
+            </a:solidFill>
+            <a:prstDash val="solid"/>
+          </a:ln>
+        </p:spPr>
+      </p:sp>
+      <p:sp>
+        <p:nvSpPr>
+          <p:cNvPr id="101" name="Shape 99"/>
+          <p:cNvSpPr/>
+          <p:nvPr/>
+        </p:nvSpPr>
+        <p:spPr>
+          <a:xfrm>
+            <a:off x="7010225" y="4000500"/>
+            <a:ext cx="9525" cy="1790700"/>
+          </a:xfrm>
+          <a:prstGeom prst="rect">
+            <a:avLst/>
+          </a:prstGeom>
+          <a:solidFill>
+            <a:srgbClr val="B9D0F5"/>
+          </a:solidFill>
+          <a:ln w="12700">
+            <a:solidFill>
+              <a:srgbClr val="FFFFFF">
+                <a:alpha val="0"/>
+              </a:srgbClr>
+            </a:solidFill>
+            <a:prstDash val="solid"/>
+          </a:ln>
+        </p:spPr>
+      </p:sp>
+      <p:sp>
+        <p:nvSpPr>
+          <p:cNvPr id="102" name="Shape 100"/>
+          <p:cNvSpPr/>
+          <p:nvPr/>
+        </p:nvSpPr>
+        <p:spPr>
+          <a:xfrm>
+            <a:off x="6876878" y="3962400"/>
+            <a:ext cx="228594" cy="228600"/>
+          </a:xfrm>
+          <a:prstGeom prst="ellipse">
+            <a:avLst/>
+          </a:prstGeom>
+          <a:solidFill>
+            <a:srgbClr val="EDF5FF"/>
+          </a:solidFill>
+          <a:ln w="9525">
+            <a:solidFill>
+              <a:srgbClr val="3783FF"/>
+            </a:solidFill>
+            <a:prstDash val="solid"/>
+          </a:ln>
+        </p:spPr>
+      </p:sp>
+      <p:sp>
+        <p:nvSpPr>
+          <p:cNvPr id="103" name="Shape 101"/>
+          <p:cNvSpPr/>
+          <p:nvPr/>
+        </p:nvSpPr>
+        <p:spPr>
+          <a:xfrm>
+            <a:off x="6876878" y="4514850"/>
+            <a:ext cx="228594" cy="228600"/>
+          </a:xfrm>
+          <a:prstGeom prst="ellipse">
+            <a:avLst/>
+          </a:prstGeom>
+          <a:solidFill>
+            <a:srgbClr val="EDF5FF"/>
+          </a:solidFill>
+          <a:ln w="9525">
+            <a:solidFill>
+              <a:srgbClr val="3783FF"/>
+            </a:solidFill>
+            <a:prstDash val="solid"/>
+          </a:ln>
+        </p:spPr>
+      </p:sp>
+      <p:sp>
+        <p:nvSpPr>
+          <p:cNvPr id="104" name="Shape 102"/>
+          <p:cNvSpPr/>
+          <p:nvPr/>
+        </p:nvSpPr>
+        <p:spPr>
+          <a:xfrm>
+            <a:off x="6876878" y="5067300"/>
+            <a:ext cx="228594" cy="228600"/>
+          </a:xfrm>
+          <a:prstGeom prst="ellipse">
+            <a:avLst/>
+          </a:prstGeom>
+          <a:solidFill>
+            <a:srgbClr val="EDF5FF"/>
+          </a:solidFill>
+          <a:ln w="9525">
+            <a:solidFill>
+              <a:srgbClr val="3783FF"/>
+            </a:solidFill>
+            <a:prstDash val="solid"/>
+          </a:ln>
+        </p:spPr>
+      </p:sp>
+      <p:sp>
+        <p:nvSpPr>
+          <p:cNvPr id="105" name="Shape 103"/>
+          <p:cNvSpPr/>
+          <p:nvPr/>
+        </p:nvSpPr>
+        <p:spPr>
+          <a:xfrm>
+            <a:off x="6876878" y="5619750"/>
+            <a:ext cx="228594" cy="228600"/>
+          </a:xfrm>
+          <a:prstGeom prst="ellipse">
+            <a:avLst/>
+          </a:prstGeom>
+          <a:solidFill>
+            <a:srgbClr val="EDF5FF"/>
+          </a:solidFill>
+          <a:ln w="9525">
+            <a:solidFill>
+              <a:srgbClr val="3783FF"/>
+            </a:solidFill>
+            <a:prstDash val="solid"/>
+          </a:ln>
+        </p:spPr>
+      </p:sp>
+      <p:sp>
+        <p:nvSpPr>
+          <p:cNvPr id="106" name="Text 104"/>
+          <p:cNvSpPr/>
+          <p:nvPr/>
+        </p:nvSpPr>
+        <p:spPr>
+          <a:xfrm>
+            <a:off x="6876878" y="3962400"/>
+            <a:ext cx="228594" cy="152400"/>
+          </a:xfrm>
+          <a:prstGeom prst="rect">
+            <a:avLst/>
+          </a:prstGeom>
+          <a:noFill/>
+          <a:ln/>
+        </p:spPr>
+        <p:txBody>
+          <a:bodyPr wrap="square" lIns="0" tIns="0" rIns="0" bIns="0" rtlCol="0" anchor="t">
+            <a:normAutofit/>
+          </a:bodyPr>
+          <a:lstStyle/>
+          <a:p>
+            <a:pPr marL="0" indent="0" algn="ctr">
+              <a:buNone/>
+            </a:pPr>
+            <a:r>
+              <a:rPr lang="en-US" sz="900" b="1" dirty="0">
+                <a:solidFill>
+                  <a:srgbClr val="206BE5"/>
+                </a:solidFill>
+                <a:latin typeface="Microsoft YaHei" pitchFamily="34" charset="0"/>
+                <a:ea typeface="Microsoft YaHei" pitchFamily="34" charset="-122"/>
+                <a:cs typeface="Microsoft YaHei" pitchFamily="34" charset="-120"/>
+              </a:rPr>
+              <a:t>1</a:t>
+            </a:r>
+            <a:endParaRPr lang="en-US" sz="900" dirty="0"/>
+          </a:p>
+        </p:txBody>
+      </p:sp>
+      <p:sp>
+        <p:nvSpPr>
+          <p:cNvPr id="107" name="Text 105"/>
+          <p:cNvSpPr/>
+          <p:nvPr/>
+        </p:nvSpPr>
+        <p:spPr>
+          <a:xfrm>
+            <a:off x="6876878" y="4514850"/>
+            <a:ext cx="228594" cy="152400"/>
+          </a:xfrm>
+          <a:prstGeom prst="rect">
+            <a:avLst/>
+          </a:prstGeom>
+          <a:noFill/>
+          <a:ln/>
+        </p:spPr>
+        <p:txBody>
+          <a:bodyPr wrap="square" lIns="0" tIns="0" rIns="0" bIns="0" rtlCol="0" anchor="t">
+            <a:normAutofit/>
+          </a:bodyPr>
+          <a:lstStyle/>
+          <a:p>
+            <a:pPr marL="0" indent="0" algn="ctr">
+              <a:buNone/>
+            </a:pPr>
+            <a:r>
+              <a:rPr lang="en-US" sz="900" b="1" dirty="0">
+                <a:solidFill>
+                  <a:srgbClr val="206BE5"/>
+                </a:solidFill>
+                <a:latin typeface="Microsoft YaHei" pitchFamily="34" charset="0"/>
+                <a:ea typeface="Microsoft YaHei" pitchFamily="34" charset="-122"/>
+                <a:cs typeface="Microsoft YaHei" pitchFamily="34" charset="-120"/>
+              </a:rPr>
+              <a:t>2</a:t>
+            </a:r>
+            <a:endParaRPr lang="en-US" sz="900" dirty="0"/>
+          </a:p>
+        </p:txBody>
+      </p:sp>
+      <p:sp>
+        <p:nvSpPr>
+          <p:cNvPr id="108" name="Text 106"/>
+          <p:cNvSpPr/>
+          <p:nvPr/>
+        </p:nvSpPr>
+        <p:spPr>
+          <a:xfrm>
+            <a:off x="6876878" y="5067300"/>
+            <a:ext cx="228594" cy="152400"/>
+          </a:xfrm>
+          <a:prstGeom prst="rect">
+            <a:avLst/>
+          </a:prstGeom>
+          <a:noFill/>
+          <a:ln/>
+        </p:spPr>
+        <p:txBody>
+          <a:bodyPr wrap="square" lIns="0" tIns="0" rIns="0" bIns="0" rtlCol="0" anchor="t">
+            <a:normAutofit/>
+          </a:bodyPr>
+          <a:lstStyle/>
+          <a:p>
+            <a:pPr marL="0" indent="0" algn="ctr">
+              <a:buNone/>
+            </a:pPr>
+            <a:r>
+              <a:rPr lang="en-US" sz="900" b="1" dirty="0">
+                <a:solidFill>
+                  <a:srgbClr val="206BE5"/>
+                </a:solidFill>
+                <a:latin typeface="Microsoft YaHei" pitchFamily="34" charset="0"/>
+                <a:ea typeface="Microsoft YaHei" pitchFamily="34" charset="-122"/>
+                <a:cs typeface="Microsoft YaHei" pitchFamily="34" charset="-120"/>
+              </a:rPr>
+              <a:t>3</a:t>
+            </a:r>
+            <a:endParaRPr lang="en-US" sz="900" dirty="0"/>
+          </a:p>
+        </p:txBody>
+      </p:sp>
+      <p:sp>
+        <p:nvSpPr>
+          <p:cNvPr id="109" name="Text 107"/>
+          <p:cNvSpPr/>
+          <p:nvPr/>
+        </p:nvSpPr>
+        <p:spPr>
+          <a:xfrm>
+            <a:off x="6876878" y="5619750"/>
+            <a:ext cx="228594" cy="152400"/>
+          </a:xfrm>
+          <a:prstGeom prst="rect">
+            <a:avLst/>
+          </a:prstGeom>
+          <a:noFill/>
+          <a:ln/>
+        </p:spPr>
+        <p:txBody>
+          <a:bodyPr wrap="square" lIns="0" tIns="0" rIns="0" bIns="0" rtlCol="0" anchor="t">
+            <a:normAutofit/>
+          </a:bodyPr>
+          <a:lstStyle/>
+          <a:p>
+            <a:pPr marL="0" indent="0" algn="ctr">
+              <a:buNone/>
+            </a:pPr>
+            <a:r>
+              <a:rPr lang="en-US" sz="900" b="1" dirty="0">
+                <a:solidFill>
+                  <a:srgbClr val="206BE5"/>
+                </a:solidFill>
+                <a:latin typeface="Microsoft YaHei" pitchFamily="34" charset="0"/>
+                <a:ea typeface="Microsoft YaHei" pitchFamily="34" charset="-122"/>
+                <a:cs typeface="Microsoft YaHei" pitchFamily="34" charset="-120"/>
+              </a:rPr>
+              <a:t>4</a:t>
+            </a:r>
+            <a:endParaRPr lang="en-US" sz="900" dirty="0"/>
+          </a:p>
+        </p:txBody>
+      </p:sp>
+      <p:sp>
+        <p:nvSpPr>
+          <p:cNvPr id="110" name="Text 108"/>
+          <p:cNvSpPr/>
+          <p:nvPr/>
+        </p:nvSpPr>
+        <p:spPr>
+          <a:xfrm>
+            <a:off x="7257869" y="3962400"/>
+            <a:ext cx="685783" cy="152400"/>
+          </a:xfrm>
+          <a:prstGeom prst="rect">
+            <a:avLst/>
+          </a:prstGeom>
+          <a:noFill/>
+          <a:ln/>
+        </p:spPr>
+        <p:txBody>
+          <a:bodyPr wrap="square" lIns="0" tIns="0" rIns="0" bIns="0" rtlCol="0" anchor="t">
+            <a:normAutofit fontScale="92500"/>
+          </a:bodyPr>
+          <a:lstStyle/>
+          <a:p>
+            <a:pPr marL="0" indent="0" algn="l">
+              <a:buNone/>
+            </a:pPr>
+            <a:r>
+              <a:rPr lang="en-US" sz="900" b="1" dirty="0">
+                <a:solidFill>
+                  <a:srgbClr val="27364D"/>
+                </a:solidFill>
+                <a:latin typeface="Microsoft YaHei" pitchFamily="34" charset="0"/>
+                <a:ea typeface="Microsoft YaHei" pitchFamily="34" charset="-122"/>
+                <a:cs typeface="Microsoft YaHei" pitchFamily="34" charset="-120"/>
+              </a:rPr>
+              <a:t>加载三维模型</a:t>
+            </a:r>
+            <a:endParaRPr lang="en-US" sz="900" dirty="0"/>
+          </a:p>
+        </p:txBody>
+      </p:sp>
+      <p:sp>
+        <p:nvSpPr>
+          <p:cNvPr id="111" name="Text 109"/>
+          <p:cNvSpPr/>
+          <p:nvPr/>
+        </p:nvSpPr>
+        <p:spPr>
+          <a:xfrm>
+            <a:off x="7257869" y="4152900"/>
+            <a:ext cx="1275872" cy="133350"/>
+          </a:xfrm>
+          <a:prstGeom prst="rect">
+            <a:avLst/>
+          </a:prstGeom>
+          <a:noFill/>
+          <a:ln/>
+        </p:spPr>
+        <p:txBody>
+          <a:bodyPr wrap="square" lIns="0" tIns="0" rIns="0" bIns="0" rtlCol="0" anchor="t">
+            <a:normAutofit fontScale="92500"/>
+          </a:bodyPr>
+          <a:lstStyle/>
+          <a:p>
+            <a:pPr marL="0" indent="0" algn="l">
+              <a:buNone/>
+            </a:pPr>
+            <a:r>
+              <a:rPr lang="en-US" sz="800" dirty="0">
+                <a:solidFill>
+                  <a:srgbClr val="65748B"/>
+                </a:solidFill>
+                <a:latin typeface="Microsoft YaHei" pitchFamily="34" charset="0"/>
+                <a:ea typeface="Microsoft YaHei" pitchFamily="34" charset="-122"/>
+                <a:cs typeface="Microsoft YaHei" pitchFamily="34" charset="-120"/>
+              </a:rPr>
+              <a:t>选择机器人URDF或Xacro文件</a:t>
+            </a:r>
+            <a:endParaRPr lang="en-US" sz="800" dirty="0"/>
+          </a:p>
+        </p:txBody>
+      </p:sp>
+      <p:sp>
+        <p:nvSpPr>
+          <p:cNvPr id="112" name="Text 110"/>
+          <p:cNvSpPr/>
+          <p:nvPr/>
+        </p:nvSpPr>
+        <p:spPr>
+          <a:xfrm>
+            <a:off x="7257869" y="4514850"/>
+            <a:ext cx="685783" cy="152400"/>
+          </a:xfrm>
+          <a:prstGeom prst="rect">
+            <a:avLst/>
+          </a:prstGeom>
+          <a:noFill/>
+          <a:ln/>
+        </p:spPr>
+        <p:txBody>
+          <a:bodyPr wrap="square" lIns="0" tIns="0" rIns="0" bIns="0" rtlCol="0" anchor="t">
+            <a:normAutofit fontScale="92500"/>
+          </a:bodyPr>
+          <a:lstStyle/>
+          <a:p>
+            <a:pPr marL="0" indent="0" algn="l">
+              <a:buNone/>
+            </a:pPr>
+            <a:r>
+              <a:rPr lang="en-US" sz="900" b="1" dirty="0">
+                <a:solidFill>
+                  <a:srgbClr val="27364D"/>
+                </a:solidFill>
+                <a:latin typeface="Microsoft YaHei" pitchFamily="34" charset="0"/>
+                <a:ea typeface="Microsoft YaHei" pitchFamily="34" charset="-122"/>
+                <a:cs typeface="Microsoft YaHei" pitchFamily="34" charset="-120"/>
+              </a:rPr>
+              <a:t>加载误差参数</a:t>
+            </a:r>
+            <a:endParaRPr lang="en-US" sz="900" dirty="0"/>
+          </a:p>
+        </p:txBody>
+      </p:sp>
+      <p:sp>
+        <p:nvSpPr>
+          <p:cNvPr id="113" name="Text 111"/>
+          <p:cNvSpPr/>
+          <p:nvPr/>
+        </p:nvSpPr>
+        <p:spPr>
+          <a:xfrm>
+            <a:off x="7257869" y="4705350"/>
+            <a:ext cx="952476" cy="133350"/>
+          </a:xfrm>
+          <a:prstGeom prst="rect">
+            <a:avLst/>
+          </a:prstGeom>
+          <a:noFill/>
+          <a:ln/>
+        </p:spPr>
+        <p:txBody>
+          <a:bodyPr wrap="square" lIns="0" tIns="0" rIns="0" bIns="0" rtlCol="0" anchor="t">
+            <a:normAutofit fontScale="92500"/>
+          </a:bodyPr>
+          <a:lstStyle/>
+          <a:p>
+            <a:pPr marL="0" indent="0" algn="l">
+              <a:buNone/>
+            </a:pPr>
+            <a:r>
+              <a:rPr lang="en-US" sz="800" dirty="0">
+                <a:solidFill>
+                  <a:srgbClr val="65748B"/>
+                </a:solidFill>
+                <a:latin typeface="Microsoft YaHei" pitchFamily="34" charset="0"/>
+                <a:ea typeface="Microsoft YaHei" pitchFamily="34" charset="-122"/>
+                <a:cs typeface="Microsoft YaHei" pitchFamily="34" charset="-120"/>
+              </a:rPr>
+              <a:t>导入标定误差参数文件</a:t>
+            </a:r>
+            <a:endParaRPr lang="en-US" sz="800" dirty="0"/>
+          </a:p>
+        </p:txBody>
+      </p:sp>
+      <p:sp>
+        <p:nvSpPr>
+          <p:cNvPr id="114" name="Text 112"/>
+          <p:cNvSpPr/>
+          <p:nvPr/>
+        </p:nvSpPr>
+        <p:spPr>
+          <a:xfrm>
+            <a:off x="7257869" y="5067300"/>
+            <a:ext cx="685783" cy="152400"/>
+          </a:xfrm>
+          <a:prstGeom prst="rect">
+            <a:avLst/>
+          </a:prstGeom>
+          <a:noFill/>
+          <a:ln/>
+        </p:spPr>
+        <p:txBody>
+          <a:bodyPr wrap="square" lIns="0" tIns="0" rIns="0" bIns="0" rtlCol="0" anchor="t">
+            <a:normAutofit fontScale="92500"/>
+          </a:bodyPr>
+          <a:lstStyle/>
+          <a:p>
+            <a:pPr marL="0" indent="0" algn="l">
+              <a:buNone/>
+            </a:pPr>
+            <a:r>
+              <a:rPr lang="en-US" sz="900" b="1" dirty="0">
+                <a:solidFill>
+                  <a:srgbClr val="27364D"/>
+                </a:solidFill>
+                <a:latin typeface="Microsoft YaHei" pitchFamily="34" charset="0"/>
+                <a:ea typeface="Microsoft YaHei" pitchFamily="34" charset="-122"/>
+                <a:cs typeface="Microsoft YaHei" pitchFamily="34" charset="-120"/>
+              </a:rPr>
+              <a:t>导入标定数据</a:t>
+            </a:r>
+            <a:endParaRPr lang="en-US" sz="900" dirty="0"/>
+          </a:p>
+        </p:txBody>
+      </p:sp>
+      <p:sp>
+        <p:nvSpPr>
+          <p:cNvPr id="115" name="Text 113"/>
+          <p:cNvSpPr/>
+          <p:nvPr/>
+        </p:nvSpPr>
+        <p:spPr>
+          <a:xfrm>
+            <a:off x="7257869" y="5257800"/>
+            <a:ext cx="993254" cy="133350"/>
+          </a:xfrm>
+          <a:prstGeom prst="rect">
+            <a:avLst/>
+          </a:prstGeom>
+          <a:noFill/>
+          <a:ln/>
+        </p:spPr>
+        <p:txBody>
+          <a:bodyPr wrap="square" lIns="0" tIns="0" rIns="0" bIns="0" rtlCol="0" anchor="t">
+            <a:normAutofit fontScale="92500"/>
+          </a:bodyPr>
+          <a:lstStyle/>
+          <a:p>
+            <a:pPr marL="0" indent="0" algn="l">
+              <a:buNone/>
+            </a:pPr>
+            <a:r>
+              <a:rPr lang="en-US" sz="800" dirty="0">
+                <a:solidFill>
+                  <a:srgbClr val="65748B"/>
+                </a:solidFill>
+                <a:latin typeface="Microsoft YaHei" pitchFamily="34" charset="0"/>
+                <a:ea typeface="Microsoft YaHei" pitchFamily="34" charset="-122"/>
+                <a:cs typeface="Microsoft YaHei" pitchFamily="34" charset="-120"/>
+              </a:rPr>
+              <a:t>导入测量/标定数据文件</a:t>
+            </a:r>
+            <a:endParaRPr lang="en-US" sz="800" dirty="0"/>
+          </a:p>
+        </p:txBody>
+      </p:sp>
+      <p:sp>
+        <p:nvSpPr>
+          <p:cNvPr id="116" name="Text 114"/>
+          <p:cNvSpPr/>
+          <p:nvPr/>
+        </p:nvSpPr>
+        <p:spPr>
+          <a:xfrm>
+            <a:off x="7257869" y="5619750"/>
+            <a:ext cx="457189" cy="152400"/>
+          </a:xfrm>
+          <a:prstGeom prst="rect">
+            <a:avLst/>
+          </a:prstGeom>
+          <a:noFill/>
+          <a:ln/>
+        </p:spPr>
+        <p:txBody>
+          <a:bodyPr wrap="square" lIns="0" tIns="0" rIns="0" bIns="0" rtlCol="0" anchor="t">
+            <a:normAutofit fontScale="92500"/>
+          </a:bodyPr>
+          <a:lstStyle/>
+          <a:p>
+            <a:pPr marL="0" indent="0" algn="l">
+              <a:buNone/>
+            </a:pPr>
+            <a:r>
+              <a:rPr lang="en-US" sz="900" b="1" dirty="0">
+                <a:solidFill>
+                  <a:srgbClr val="27364D"/>
+                </a:solidFill>
+                <a:latin typeface="Microsoft YaHei" pitchFamily="34" charset="0"/>
+                <a:ea typeface="Microsoft YaHei" pitchFamily="34" charset="-122"/>
+                <a:cs typeface="Microsoft YaHei" pitchFamily="34" charset="-120"/>
+              </a:rPr>
+              <a:t>开始分析</a:t>
+            </a:r>
+            <a:endParaRPr lang="en-US" sz="900" dirty="0"/>
+          </a:p>
+        </p:txBody>
+      </p:sp>
+      <p:sp>
+        <p:nvSpPr>
+          <p:cNvPr id="117" name="Text 115"/>
+          <p:cNvSpPr/>
+          <p:nvPr/>
+        </p:nvSpPr>
+        <p:spPr>
+          <a:xfrm>
+            <a:off x="7257869" y="5810250"/>
+            <a:ext cx="1142971" cy="133350"/>
+          </a:xfrm>
+          <a:prstGeom prst="rect">
+            <a:avLst/>
+          </a:prstGeom>
+          <a:noFill/>
+          <a:ln/>
+        </p:spPr>
+        <p:txBody>
+          <a:bodyPr wrap="square" lIns="0" tIns="0" rIns="0" bIns="0" rtlCol="0" anchor="t">
+            <a:normAutofit fontScale="92500"/>
+          </a:bodyPr>
+          <a:lstStyle/>
+          <a:p>
+            <a:pPr marL="0" indent="0" algn="l">
+              <a:buNone/>
+            </a:pPr>
+            <a:r>
+              <a:rPr lang="en-US" sz="800" dirty="0">
+                <a:solidFill>
+                  <a:srgbClr val="65748B"/>
+                </a:solidFill>
+                <a:latin typeface="Microsoft YaHei" pitchFamily="34" charset="0"/>
+                <a:ea typeface="Microsoft YaHei" pitchFamily="34" charset="-122"/>
+                <a:cs typeface="Microsoft YaHei" pitchFamily="34" charset="-120"/>
+              </a:rPr>
+              <a:t>初始化完成，开始精度分析</a:t>
+            </a:r>
+            <a:endParaRPr lang="en-US" sz="800" dirty="0"/>
+          </a:p>
+        </p:txBody>
+      </p:sp>
+      <p:sp>
+        <p:nvSpPr>
+          <p:cNvPr id="118" name="Text 116"/>
+          <p:cNvSpPr/>
+          <p:nvPr/>
+        </p:nvSpPr>
+        <p:spPr>
+          <a:xfrm>
+            <a:off x="9219969" y="3524250"/>
+            <a:ext cx="609585" cy="200025"/>
+          </a:xfrm>
+          <a:prstGeom prst="rect">
+            <a:avLst/>
+          </a:prstGeom>
+          <a:noFill/>
+          <a:ln/>
+        </p:spPr>
+        <p:txBody>
+          <a:bodyPr wrap="square" lIns="0" tIns="0" rIns="0" bIns="0" rtlCol="0" anchor="t">
+            <a:normAutofit fontScale="92500"/>
+          </a:bodyPr>
+          <a:lstStyle/>
+          <a:p>
+            <a:pPr marL="0" indent="0" algn="l">
+              <a:buNone/>
+            </a:pPr>
+            <a:r>
+              <a:rPr lang="en-US" sz="1200" b="1" dirty="0">
+                <a:solidFill>
+                  <a:srgbClr val="111827"/>
+                </a:solidFill>
+                <a:latin typeface="Microsoft YaHei" pitchFamily="34" charset="0"/>
+                <a:ea typeface="Microsoft YaHei" pitchFamily="34" charset="-122"/>
+                <a:cs typeface="Microsoft YaHei" pitchFamily="34" charset="-120"/>
+              </a:rPr>
+              <a:t>最近项目</a:t>
+            </a:r>
+            <a:endParaRPr lang="en-US" sz="1200" dirty="0"/>
+          </a:p>
+        </p:txBody>
+      </p:sp>
+      <p:sp>
+        <p:nvSpPr>
+          <p:cNvPr id="119" name="Shape 117"/>
+          <p:cNvSpPr/>
+          <p:nvPr/>
+        </p:nvSpPr>
+        <p:spPr>
+          <a:xfrm>
+            <a:off x="10972526" y="3486150"/>
+            <a:ext cx="876278" cy="238125"/>
+          </a:xfrm>
+          <a:prstGeom prst="roundRect">
+            <a:avLst/>
+          </a:prstGeom>
+          <a:solidFill>
+            <a:srgbClr val="FFFFFF">
+              <a:alpha val="0"/>
+            </a:srgbClr>
+          </a:solidFill>
+          <a:ln w="9525">
+            <a:solidFill>
+              <a:srgbClr val="CFE0F8"/>
+            </a:solidFill>
+            <a:prstDash val="solid"/>
+          </a:ln>
+        </p:spPr>
+      </p:sp>
+      <p:sp>
+        <p:nvSpPr>
+          <p:cNvPr id="120" name="Text 118"/>
+          <p:cNvSpPr/>
+          <p:nvPr/>
+        </p:nvSpPr>
+        <p:spPr>
+          <a:xfrm>
+            <a:off x="11029674" y="3543300"/>
+            <a:ext cx="628634" cy="142875"/>
+          </a:xfrm>
+          <a:prstGeom prst="rect">
+            <a:avLst/>
+          </a:prstGeom>
+          <a:noFill/>
+          <a:ln/>
+        </p:spPr>
+        <p:txBody>
+          <a:bodyPr wrap="square" lIns="0" tIns="0" rIns="0" bIns="0" rtlCol="0" anchor="t">
+            <a:normAutofit fontScale="92500"/>
+          </a:bodyPr>
+          <a:lstStyle/>
+          <a:p>
+            <a:pPr marL="0" indent="0" algn="l">
+              <a:buNone/>
+            </a:pPr>
+            <a:r>
+              <a:rPr lang="en-US" sz="825" b="1" dirty="0">
+                <a:solidFill>
+                  <a:srgbClr val="1E75E8"/>
+                </a:solidFill>
+                <a:latin typeface="Microsoft YaHei" pitchFamily="34" charset="0"/>
+                <a:ea typeface="Microsoft YaHei" pitchFamily="34" charset="-122"/>
+                <a:cs typeface="Microsoft YaHei" pitchFamily="34" charset="-120"/>
+              </a:rPr>
+              <a:t>查看全部记录</a:t>
+            </a:r>
+            <a:endParaRPr lang="en-US" sz="825" dirty="0"/>
+          </a:p>
+        </p:txBody>
+      </p:sp>
+      <p:sp>
+        <p:nvSpPr>
+          <p:cNvPr id="121" name="Shape 119"/>
+          <p:cNvSpPr/>
+          <p:nvPr/>
+        </p:nvSpPr>
+        <p:spPr>
+          <a:xfrm>
+            <a:off x="9219969" y="3943350"/>
+            <a:ext cx="342891" cy="342900"/>
+          </a:xfrm>
+          <a:prstGeom prst="roundRect">
+            <a:avLst/>
+          </a:prstGeom>
+          <a:solidFill>
+            <a:srgbClr val="EEF5FF"/>
+          </a:solidFill>
+          <a:ln w="9525">
+            <a:solidFill>
+              <a:srgbClr val="D6E5FB"/>
+            </a:solidFill>
+            <a:prstDash val="solid"/>
+          </a:ln>
+        </p:spPr>
+      </p:sp>
+      <p:sp>
+        <p:nvSpPr>
+          <p:cNvPr id="122" name="Text 120"/>
+          <p:cNvSpPr/>
+          <p:nvPr/>
+        </p:nvSpPr>
+        <p:spPr>
+          <a:xfrm>
+            <a:off x="9658109" y="3943350"/>
+            <a:ext cx="1523962" cy="142875"/>
+          </a:xfrm>
+          <a:prstGeom prst="rect">
+            <a:avLst/>
+          </a:prstGeom>
+          <a:noFill/>
+          <a:ln/>
+        </p:spPr>
+        <p:txBody>
+          <a:bodyPr wrap="square" lIns="0" tIns="0" rIns="0" bIns="0" rtlCol="0" anchor="t">
+            <a:normAutofit/>
+          </a:bodyPr>
+          <a:lstStyle/>
+          <a:p>
+            <a:pPr marL="0" indent="0" algn="l">
+              <a:buNone/>
+            </a:pPr>
+            <a:r>
+              <a:rPr lang="en-US" sz="825" b="1" dirty="0">
+                <a:solidFill>
+                  <a:srgbClr val="23344E"/>
+                </a:solidFill>
+                <a:latin typeface="Microsoft YaHei" pitchFamily="34" charset="0"/>
+                <a:ea typeface="Microsoft YaHei" pitchFamily="34" charset="-122"/>
+                <a:cs typeface="Microsoft YaHei" pitchFamily="34" charset="-120"/>
+              </a:rPr>
+              <a:t>UR_示例产线_20240516</a:t>
+            </a:r>
+            <a:endParaRPr lang="en-US" sz="825" dirty="0"/>
+          </a:p>
+        </p:txBody>
+      </p:sp>
+      <p:sp>
+        <p:nvSpPr>
+          <p:cNvPr id="123" name="Text 121"/>
+          <p:cNvSpPr/>
+          <p:nvPr/>
+        </p:nvSpPr>
+        <p:spPr>
+          <a:xfrm>
+            <a:off x="9658109" y="4105275"/>
+            <a:ext cx="1619210" cy="214313"/>
+          </a:xfrm>
+          <a:prstGeom prst="rect">
+            <a:avLst/>
+          </a:prstGeom>
+          <a:noFill/>
+          <a:ln/>
+        </p:spPr>
+        <p:txBody>
+          <a:bodyPr wrap="square" lIns="0" tIns="0" rIns="0" bIns="0" rtlCol="0" anchor="t">
+            <a:normAutofit fontScale="92500"/>
+          </a:bodyPr>
+          <a:lstStyle/>
+          <a:p>
+            <a:pPr marL="0" indent="0" algn="l">
+              <a:buNone/>
+            </a:pPr>
+            <a:r>
+              <a:rPr lang="en-US" sz="800" dirty="0">
+                <a:solidFill>
+                  <a:srgbClr val="66778F"/>
+                </a:solidFill>
+                <a:latin typeface="Microsoft YaHei" pitchFamily="34" charset="0"/>
+                <a:ea typeface="Microsoft YaHei" pitchFamily="34" charset="-122"/>
+                <a:cs typeface="Microsoft YaHei" pitchFamily="34" charset="-120"/>
+              </a:rPr>
+              <a:t>D:\Projects\UR_示例产线\</a:t>
+            </a:r>
+            <a:endParaRPr lang="en-US" sz="800" dirty="0"/>
+          </a:p>
+          <a:p>
+            <a:pPr marL="0" indent="0" algn="l">
+              <a:buNone/>
+            </a:pPr>
+            <a:r>
+              <a:rPr lang="en-US" sz="800" dirty="0">
+                <a:solidFill>
+                  <a:srgbClr val="66778F"/>
+                </a:solidFill>
+                <a:latin typeface="Microsoft YaHei" pitchFamily="34" charset="0"/>
+                <a:ea typeface="Microsoft YaHei" pitchFamily="34" charset="-122"/>
+                <a:cs typeface="Microsoft YaHei" pitchFamily="34" charset="-120"/>
+              </a:rPr>
+              <a:t>更新：2024-05-16 14:28</a:t>
+            </a:r>
+            <a:endParaRPr lang="en-US" sz="800" dirty="0"/>
+          </a:p>
+        </p:txBody>
+      </p:sp>
+      <p:sp>
+        <p:nvSpPr>
+          <p:cNvPr id="124" name="Shape 122"/>
+          <p:cNvSpPr/>
+          <p:nvPr/>
+        </p:nvSpPr>
+        <p:spPr>
+          <a:xfrm>
+            <a:off x="11401140" y="4000500"/>
+            <a:ext cx="428614" cy="219075"/>
+          </a:xfrm>
+          <a:prstGeom prst="roundRect">
+            <a:avLst/>
+          </a:prstGeom>
+          <a:solidFill>
+            <a:srgbClr val="FFFFFF">
+              <a:alpha val="0"/>
+            </a:srgbClr>
+          </a:solidFill>
+          <a:ln w="9525">
+            <a:solidFill>
+              <a:srgbClr val="C3D8FB"/>
+            </a:solidFill>
+            <a:prstDash val="solid"/>
+          </a:ln>
+        </p:spPr>
+      </p:sp>
+      <p:sp>
+        <p:nvSpPr>
+          <p:cNvPr id="125" name="Text 123"/>
+          <p:cNvSpPr/>
+          <p:nvPr/>
+        </p:nvSpPr>
+        <p:spPr>
+          <a:xfrm>
+            <a:off x="11401140" y="4048125"/>
+            <a:ext cx="428614" cy="142875"/>
+          </a:xfrm>
+          <a:prstGeom prst="rect">
+            <a:avLst/>
+          </a:prstGeom>
+          <a:noFill/>
+          <a:ln/>
+        </p:spPr>
+        <p:txBody>
+          <a:bodyPr wrap="square" lIns="0" tIns="0" rIns="0" bIns="0" rtlCol="0" anchor="t">
+            <a:normAutofit/>
+          </a:bodyPr>
+          <a:lstStyle/>
+          <a:p>
+            <a:pPr marL="0" indent="0" algn="ctr">
+              <a:buNone/>
+            </a:pPr>
+            <a:r>
+              <a:rPr lang="en-US" sz="825" b="1" dirty="0">
+                <a:solidFill>
+                  <a:srgbClr val="1D6FE6"/>
+                </a:solidFill>
+                <a:latin typeface="Microsoft YaHei" pitchFamily="34" charset="0"/>
+                <a:ea typeface="Microsoft YaHei" pitchFamily="34" charset="-122"/>
+                <a:cs typeface="Microsoft YaHei" pitchFamily="34" charset="-120"/>
+              </a:rPr>
+              <a:t>打开</a:t>
+            </a:r>
+            <a:endParaRPr lang="en-US" sz="825" dirty="0"/>
+          </a:p>
+        </p:txBody>
+      </p:sp>
+      <p:sp>
+        <p:nvSpPr>
+          <p:cNvPr id="126" name="Shape 124"/>
+          <p:cNvSpPr/>
+          <p:nvPr/>
+        </p:nvSpPr>
+        <p:spPr>
+          <a:xfrm>
+            <a:off x="9219969" y="4448175"/>
+            <a:ext cx="342891" cy="342900"/>
+          </a:xfrm>
+          <a:prstGeom prst="roundRect">
+            <a:avLst/>
+          </a:prstGeom>
+          <a:solidFill>
+            <a:srgbClr val="EEF5FF"/>
+          </a:solidFill>
+          <a:ln w="9525">
+            <a:solidFill>
+              <a:srgbClr val="D6E5FB"/>
+            </a:solidFill>
+            <a:prstDash val="solid"/>
+          </a:ln>
+        </p:spPr>
+      </p:sp>
+      <p:sp>
+        <p:nvSpPr>
+          <p:cNvPr id="127" name="Text 125"/>
+          <p:cNvSpPr/>
+          <p:nvPr/>
+        </p:nvSpPr>
+        <p:spPr>
+          <a:xfrm>
+            <a:off x="9658109" y="4448175"/>
+            <a:ext cx="1523962" cy="142875"/>
+          </a:xfrm>
+          <a:prstGeom prst="rect">
+            <a:avLst/>
+          </a:prstGeom>
+          <a:noFill/>
+          <a:ln/>
+        </p:spPr>
+        <p:txBody>
+          <a:bodyPr wrap="square" lIns="0" tIns="0" rIns="0" bIns="0" rtlCol="0" anchor="t">
+            <a:normAutofit/>
+          </a:bodyPr>
+          <a:lstStyle/>
+          <a:p>
+            <a:pPr marL="0" indent="0" algn="l">
+              <a:buNone/>
+            </a:pPr>
+            <a:r>
+              <a:rPr lang="en-US" sz="825" b="1" dirty="0">
+                <a:solidFill>
+                  <a:srgbClr val="23344E"/>
+                </a:solidFill>
+                <a:latin typeface="Microsoft YaHei" pitchFamily="34" charset="0"/>
+                <a:ea typeface="Microsoft YaHei" pitchFamily="34" charset="-122"/>
+                <a:cs typeface="Microsoft YaHei" pitchFamily="34" charset="-120"/>
+              </a:rPr>
+              <a:t>UR_装配工作站_0321</a:t>
+            </a:r>
+            <a:endParaRPr lang="en-US" sz="825" dirty="0"/>
+          </a:p>
+        </p:txBody>
+      </p:sp>
+      <p:sp>
+        <p:nvSpPr>
+          <p:cNvPr id="128" name="Text 126"/>
+          <p:cNvSpPr/>
+          <p:nvPr/>
+        </p:nvSpPr>
+        <p:spPr>
+          <a:xfrm>
+            <a:off x="9658109" y="4610100"/>
+            <a:ext cx="1619210" cy="214313"/>
+          </a:xfrm>
+          <a:prstGeom prst="rect">
+            <a:avLst/>
+          </a:prstGeom>
+          <a:noFill/>
+          <a:ln/>
+        </p:spPr>
+        <p:txBody>
+          <a:bodyPr wrap="square" lIns="0" tIns="0" rIns="0" bIns="0" rtlCol="0" anchor="t">
+            <a:normAutofit fontScale="92500"/>
+          </a:bodyPr>
+          <a:lstStyle/>
+          <a:p>
+            <a:pPr marL="0" indent="0" algn="l">
+              <a:buNone/>
+            </a:pPr>
+            <a:r>
+              <a:rPr lang="en-US" sz="800" dirty="0">
+                <a:solidFill>
+                  <a:srgbClr val="66778F"/>
+                </a:solidFill>
+                <a:latin typeface="Microsoft YaHei" pitchFamily="34" charset="0"/>
+                <a:ea typeface="Microsoft YaHei" pitchFamily="34" charset="-122"/>
+                <a:cs typeface="Microsoft YaHei" pitchFamily="34" charset="-120"/>
+              </a:rPr>
+              <a:t>D:\Projects\UR_装配工作站\</a:t>
+            </a:r>
+            <a:endParaRPr lang="en-US" sz="800" dirty="0"/>
+          </a:p>
+          <a:p>
+            <a:pPr marL="0" indent="0" algn="l">
+              <a:buNone/>
+            </a:pPr>
+            <a:r>
+              <a:rPr lang="en-US" sz="800" dirty="0">
+                <a:solidFill>
+                  <a:srgbClr val="66778F"/>
+                </a:solidFill>
+                <a:latin typeface="Microsoft YaHei" pitchFamily="34" charset="0"/>
+                <a:ea typeface="Microsoft YaHei" pitchFamily="34" charset="-122"/>
+                <a:cs typeface="Microsoft YaHei" pitchFamily="34" charset="-120"/>
+              </a:rPr>
+              <a:t>更新：2024-03-21 09:46</a:t>
+            </a:r>
+            <a:endParaRPr lang="en-US" sz="800" dirty="0"/>
+          </a:p>
+        </p:txBody>
+      </p:sp>
+      <p:sp>
+        <p:nvSpPr>
+          <p:cNvPr id="129" name="Shape 127"/>
+          <p:cNvSpPr/>
+          <p:nvPr/>
+        </p:nvSpPr>
+        <p:spPr>
+          <a:xfrm>
+            <a:off x="11401140" y="4505325"/>
+            <a:ext cx="428614" cy="219075"/>
+          </a:xfrm>
+          <a:prstGeom prst="roundRect">
+            <a:avLst/>
+          </a:prstGeom>
+          <a:solidFill>
+            <a:srgbClr val="FFFFFF">
+              <a:alpha val="0"/>
+            </a:srgbClr>
+          </a:solidFill>
+          <a:ln w="9525">
+            <a:solidFill>
+              <a:srgbClr val="C3D8FB"/>
+            </a:solidFill>
+            <a:prstDash val="solid"/>
+          </a:ln>
+        </p:spPr>
+      </p:sp>
+      <p:sp>
+        <p:nvSpPr>
+          <p:cNvPr id="130" name="Text 128"/>
+          <p:cNvSpPr/>
+          <p:nvPr/>
+        </p:nvSpPr>
+        <p:spPr>
+          <a:xfrm>
+            <a:off x="11401140" y="4552950"/>
+            <a:ext cx="428614" cy="142875"/>
+          </a:xfrm>
+          <a:prstGeom prst="rect">
+            <a:avLst/>
+          </a:prstGeom>
+          <a:noFill/>
+          <a:ln/>
+        </p:spPr>
+        <p:txBody>
+          <a:bodyPr wrap="square" lIns="0" tIns="0" rIns="0" bIns="0" rtlCol="0" anchor="t">
+            <a:normAutofit/>
+          </a:bodyPr>
+          <a:lstStyle/>
+          <a:p>
+            <a:pPr marL="0" indent="0" algn="ctr">
+              <a:buNone/>
+            </a:pPr>
+            <a:r>
+              <a:rPr lang="en-US" sz="825" b="1" dirty="0">
+                <a:solidFill>
+                  <a:srgbClr val="1D6FE6"/>
+                </a:solidFill>
+                <a:latin typeface="Microsoft YaHei" pitchFamily="34" charset="0"/>
+                <a:ea typeface="Microsoft YaHei" pitchFamily="34" charset="-122"/>
+                <a:cs typeface="Microsoft YaHei" pitchFamily="34" charset="-120"/>
+              </a:rPr>
+              <a:t>打开</a:t>
+            </a:r>
+            <a:endParaRPr lang="en-US" sz="825" dirty="0"/>
+          </a:p>
+        </p:txBody>
+      </p:sp>
+      <p:sp>
+        <p:nvSpPr>
+          <p:cNvPr id="131" name="Shape 129"/>
+          <p:cNvSpPr/>
+          <p:nvPr/>
+        </p:nvSpPr>
+        <p:spPr>
+          <a:xfrm>
+            <a:off x="9219969" y="4953000"/>
+            <a:ext cx="342891" cy="342900"/>
+          </a:xfrm>
+          <a:prstGeom prst="roundRect">
+            <a:avLst/>
+          </a:prstGeom>
+          <a:solidFill>
+            <a:srgbClr val="EEF5FF"/>
+          </a:solidFill>
+          <a:ln w="9525">
+            <a:solidFill>
+              <a:srgbClr val="D6E5FB"/>
+            </a:solidFill>
+            <a:prstDash val="solid"/>
+          </a:ln>
+        </p:spPr>
+      </p:sp>
+      <p:sp>
+        <p:nvSpPr>
+          <p:cNvPr id="132" name="Text 130"/>
+          <p:cNvSpPr/>
+          <p:nvPr/>
+        </p:nvSpPr>
+        <p:spPr>
+          <a:xfrm>
+            <a:off x="9658109" y="4953000"/>
+            <a:ext cx="1523962" cy="142875"/>
+          </a:xfrm>
+          <a:prstGeom prst="rect">
+            <a:avLst/>
+          </a:prstGeom>
+          <a:noFill/>
+          <a:ln/>
+        </p:spPr>
+        <p:txBody>
+          <a:bodyPr wrap="square" lIns="0" tIns="0" rIns="0" bIns="0" rtlCol="0" anchor="t">
+            <a:normAutofit/>
+          </a:bodyPr>
+          <a:lstStyle/>
+          <a:p>
+            <a:pPr marL="0" indent="0" algn="l">
+              <a:buNone/>
+            </a:pPr>
+            <a:r>
+              <a:rPr lang="en-US" sz="825" b="1" dirty="0">
+                <a:solidFill>
+                  <a:srgbClr val="23344E"/>
+                </a:solidFill>
+                <a:latin typeface="Microsoft YaHei" pitchFamily="34" charset="0"/>
+                <a:ea typeface="Microsoft YaHei" pitchFamily="34" charset="-122"/>
+                <a:cs typeface="Microsoft YaHei" pitchFamily="34" charset="-120"/>
+              </a:rPr>
+              <a:t>UR_焊接单元_0220</a:t>
+            </a:r>
+            <a:endParaRPr lang="en-US" sz="825" dirty="0"/>
+          </a:p>
+        </p:txBody>
+      </p:sp>
+      <p:sp>
+        <p:nvSpPr>
+          <p:cNvPr id="133" name="Text 131"/>
+          <p:cNvSpPr/>
+          <p:nvPr/>
+        </p:nvSpPr>
+        <p:spPr>
+          <a:xfrm>
+            <a:off x="9658109" y="5114925"/>
+            <a:ext cx="1619210" cy="214313"/>
+          </a:xfrm>
+          <a:prstGeom prst="rect">
+            <a:avLst/>
+          </a:prstGeom>
+          <a:noFill/>
+          <a:ln/>
+        </p:spPr>
+        <p:txBody>
+          <a:bodyPr wrap="square" lIns="0" tIns="0" rIns="0" bIns="0" rtlCol="0" anchor="t">
+            <a:normAutofit fontScale="92500"/>
+          </a:bodyPr>
+          <a:lstStyle/>
+          <a:p>
+            <a:pPr marL="0" indent="0" algn="l">
+              <a:buNone/>
+            </a:pPr>
+            <a:r>
+              <a:rPr lang="en-US" sz="800" dirty="0">
+                <a:solidFill>
+                  <a:srgbClr val="66778F"/>
+                </a:solidFill>
+                <a:latin typeface="Microsoft YaHei" pitchFamily="34" charset="0"/>
+                <a:ea typeface="Microsoft YaHei" pitchFamily="34" charset="-122"/>
+                <a:cs typeface="Microsoft YaHei" pitchFamily="34" charset="-120"/>
+              </a:rPr>
+              <a:t>D:\Projects\UR_焊接单元\</a:t>
+            </a:r>
+            <a:endParaRPr lang="en-US" sz="800" dirty="0"/>
+          </a:p>
+          <a:p>
+            <a:pPr marL="0" indent="0" algn="l">
+              <a:buNone/>
+            </a:pPr>
+            <a:r>
+              <a:rPr lang="en-US" sz="800" dirty="0">
+                <a:solidFill>
+                  <a:srgbClr val="66778F"/>
+                </a:solidFill>
+                <a:latin typeface="Microsoft YaHei" pitchFamily="34" charset="0"/>
+                <a:ea typeface="Microsoft YaHei" pitchFamily="34" charset="-122"/>
+                <a:cs typeface="Microsoft YaHei" pitchFamily="34" charset="-120"/>
+              </a:rPr>
+              <a:t>更新：2024-02-20 16:11</a:t>
+            </a:r>
+            <a:endParaRPr lang="en-US" sz="800" dirty="0"/>
+          </a:p>
+        </p:txBody>
+      </p:sp>
+      <p:sp>
+        <p:nvSpPr>
+          <p:cNvPr id="134" name="Shape 132"/>
+          <p:cNvSpPr/>
+          <p:nvPr/>
+        </p:nvSpPr>
+        <p:spPr>
+          <a:xfrm>
+            <a:off x="11401140" y="5010150"/>
+            <a:ext cx="428614" cy="219075"/>
+          </a:xfrm>
+          <a:prstGeom prst="roundRect">
+            <a:avLst/>
+          </a:prstGeom>
+          <a:solidFill>
+            <a:srgbClr val="FFFFFF">
+              <a:alpha val="0"/>
+            </a:srgbClr>
+          </a:solidFill>
+          <a:ln w="9525">
+            <a:solidFill>
+              <a:srgbClr val="C3D8FB"/>
+            </a:solidFill>
+            <a:prstDash val="solid"/>
+          </a:ln>
+        </p:spPr>
+      </p:sp>
+      <p:sp>
+        <p:nvSpPr>
+          <p:cNvPr id="135" name="Text 133"/>
+          <p:cNvSpPr/>
+          <p:nvPr/>
+        </p:nvSpPr>
+        <p:spPr>
+          <a:xfrm>
+            <a:off x="11401140" y="5057775"/>
+            <a:ext cx="428614" cy="142875"/>
+          </a:xfrm>
+          <a:prstGeom prst="rect">
+            <a:avLst/>
+          </a:prstGeom>
+          <a:noFill/>
+          <a:ln/>
+        </p:spPr>
+        <p:txBody>
+          <a:bodyPr wrap="square" lIns="0" tIns="0" rIns="0" bIns="0" rtlCol="0" anchor="t">
+            <a:normAutofit/>
+          </a:bodyPr>
+          <a:lstStyle/>
+          <a:p>
+            <a:pPr marL="0" indent="0" algn="ctr">
+              <a:buNone/>
+            </a:pPr>
+            <a:r>
+              <a:rPr lang="en-US" sz="825" b="1" dirty="0">
+                <a:solidFill>
+                  <a:srgbClr val="1D6FE6"/>
+                </a:solidFill>
+                <a:latin typeface="Microsoft YaHei" pitchFamily="34" charset="0"/>
+                <a:ea typeface="Microsoft YaHei" pitchFamily="34" charset="-122"/>
+                <a:cs typeface="Microsoft YaHei" pitchFamily="34" charset="-120"/>
+              </a:rPr>
+              <a:t>打开</a:t>
+            </a:r>
+            <a:endParaRPr lang="en-US" sz="825" dirty="0"/>
+          </a:p>
+        </p:txBody>
+      </p:sp>
+      <p:sp>
+        <p:nvSpPr>
+          <p:cNvPr id="136" name="Text 134"/>
+          <p:cNvSpPr/>
+          <p:nvPr/>
+        </p:nvSpPr>
+        <p:spPr>
+          <a:xfrm>
+            <a:off x="9219969" y="5543550"/>
+            <a:ext cx="609585" cy="200025"/>
+          </a:xfrm>
+          <a:prstGeom prst="rect">
+            <a:avLst/>
+          </a:prstGeom>
+          <a:noFill/>
+          <a:ln/>
+        </p:spPr>
+        <p:txBody>
+          <a:bodyPr wrap="square" lIns="0" tIns="0" rIns="0" bIns="0" rtlCol="0" anchor="t">
+            <a:normAutofit fontScale="92500"/>
+          </a:bodyPr>
+          <a:lstStyle/>
+          <a:p>
+            <a:pPr marL="0" indent="0" algn="l">
+              <a:buNone/>
+            </a:pPr>
+            <a:r>
+              <a:rPr lang="en-US" sz="1200" b="1" dirty="0">
+                <a:solidFill>
+                  <a:srgbClr val="111827"/>
+                </a:solidFill>
+                <a:latin typeface="Microsoft YaHei" pitchFamily="34" charset="0"/>
+                <a:ea typeface="Microsoft YaHei" pitchFamily="34" charset="-122"/>
+                <a:cs typeface="Microsoft YaHei" pitchFamily="34" charset="-120"/>
+              </a:rPr>
+              <a:t>示例模板</a:t>
+            </a:r>
+            <a:endParaRPr lang="en-US" sz="1200" dirty="0"/>
+          </a:p>
+        </p:txBody>
+      </p:sp>
+      <p:sp>
+        <p:nvSpPr>
+          <p:cNvPr id="137" name="Shape 135"/>
+          <p:cNvSpPr/>
+          <p:nvPr/>
+        </p:nvSpPr>
+        <p:spPr>
+          <a:xfrm>
+            <a:off x="11258269" y="5505450"/>
+            <a:ext cx="590535" cy="238125"/>
+          </a:xfrm>
+          <a:prstGeom prst="roundRect">
+            <a:avLst/>
+          </a:prstGeom>
+          <a:solidFill>
+            <a:srgbClr val="FFFFFF">
+              <a:alpha val="0"/>
+            </a:srgbClr>
+          </a:solidFill>
+          <a:ln w="9525">
+            <a:solidFill>
+              <a:srgbClr val="C5D9FB"/>
+            </a:solidFill>
+            <a:prstDash val="solid"/>
+          </a:ln>
+        </p:spPr>
+      </p:sp>
+      <p:sp>
+        <p:nvSpPr>
+          <p:cNvPr id="138" name="Text 136"/>
+          <p:cNvSpPr/>
+          <p:nvPr/>
+        </p:nvSpPr>
+        <p:spPr>
+          <a:xfrm>
+            <a:off x="11258269" y="5562600"/>
+            <a:ext cx="590535" cy="142875"/>
+          </a:xfrm>
+          <a:prstGeom prst="rect">
+            <a:avLst/>
+          </a:prstGeom>
+          <a:noFill/>
+          <a:ln/>
+        </p:spPr>
+        <p:txBody>
+          <a:bodyPr wrap="square" lIns="0" tIns="0" rIns="0" bIns="0" rtlCol="0" anchor="t">
+            <a:normAutofit/>
+          </a:bodyPr>
+          <a:lstStyle/>
+          <a:p>
+            <a:pPr marL="0" indent="0" algn="ctr">
+              <a:buNone/>
+            </a:pPr>
+            <a:r>
+              <a:rPr lang="en-US" sz="825" b="1" dirty="0">
+                <a:solidFill>
+                  <a:srgbClr val="1D6FE6"/>
+                </a:solidFill>
+                <a:latin typeface="Microsoft YaHei" pitchFamily="34" charset="0"/>
+                <a:ea typeface="Microsoft YaHei" pitchFamily="34" charset="-122"/>
+                <a:cs typeface="Microsoft YaHei" pitchFamily="34" charset="-120"/>
+              </a:rPr>
+              <a:t>导入模板</a:t>
+            </a:r>
+            <a:endParaRPr lang="en-US" sz="825" dirty="0"/>
+          </a:p>
+        </p:txBody>
+      </p:sp>
+      <p:sp>
+        <p:nvSpPr>
+          <p:cNvPr id="139" name="Shape 137"/>
+          <p:cNvSpPr/>
+          <p:nvPr/>
+        </p:nvSpPr>
+        <p:spPr>
+          <a:xfrm>
+            <a:off x="9219969" y="5867400"/>
+            <a:ext cx="723882" cy="419100"/>
+          </a:xfrm>
+          <a:prstGeom prst="roundRect">
+            <a:avLst/>
+          </a:prstGeom>
+          <a:solidFill>
+            <a:srgbClr val="F9FCFF"/>
+          </a:solidFill>
+          <a:ln w="9525">
+            <a:solidFill>
+              <a:srgbClr val="D7E5F8"/>
+            </a:solidFill>
+            <a:prstDash val="solid"/>
+          </a:ln>
+        </p:spPr>
+      </p:sp>
+      <p:sp>
+        <p:nvSpPr>
+          <p:cNvPr id="140" name="Shape 138"/>
+          <p:cNvSpPr/>
+          <p:nvPr/>
+        </p:nvSpPr>
+        <p:spPr>
+          <a:xfrm>
+            <a:off x="10096248" y="5867400"/>
+            <a:ext cx="723882" cy="419100"/>
+          </a:xfrm>
+          <a:prstGeom prst="roundRect">
+            <a:avLst/>
+          </a:prstGeom>
+          <a:solidFill>
+            <a:srgbClr val="F9FCFF"/>
+          </a:solidFill>
+          <a:ln w="9525">
+            <a:solidFill>
+              <a:srgbClr val="D7E5F8"/>
+            </a:solidFill>
+            <a:prstDash val="solid"/>
+          </a:ln>
+        </p:spPr>
+      </p:sp>
+      <p:sp>
+        <p:nvSpPr>
+          <p:cNvPr id="141" name="Shape 139"/>
+          <p:cNvSpPr/>
+          <p:nvPr/>
+        </p:nvSpPr>
+        <p:spPr>
+          <a:xfrm>
+            <a:off x="10972526" y="5867400"/>
+            <a:ext cx="723882" cy="419100"/>
+          </a:xfrm>
+          <a:prstGeom prst="roundRect">
+            <a:avLst/>
+          </a:prstGeom>
+          <a:solidFill>
+            <a:srgbClr val="F9FCFF"/>
+          </a:solidFill>
+          <a:ln w="9525">
+            <a:solidFill>
+              <a:srgbClr val="D7E5F8"/>
+            </a:solidFill>
+            <a:prstDash val="solid"/>
+          </a:ln>
+        </p:spPr>
+      </p:sp>
+      <p:sp>
+        <p:nvSpPr>
+          <p:cNvPr id="142" name="Text 140"/>
+          <p:cNvSpPr/>
+          <p:nvPr/>
+        </p:nvSpPr>
+        <p:spPr>
+          <a:xfrm>
+            <a:off x="9239019" y="5943600"/>
+            <a:ext cx="685783" cy="133350"/>
+          </a:xfrm>
+          <a:prstGeom prst="rect">
+            <a:avLst/>
+          </a:prstGeom>
+          <a:noFill/>
+          <a:ln/>
+        </p:spPr>
+        <p:txBody>
+          <a:bodyPr wrap="square" lIns="0" tIns="0" rIns="0" bIns="0" rtlCol="0" anchor="t">
+            <a:normAutofit/>
+          </a:bodyPr>
+          <a:lstStyle/>
+          <a:p>
+            <a:pPr marL="0" indent="0" algn="ctr">
+              <a:buNone/>
+            </a:pPr>
+            <a:r>
+              <a:rPr lang="en-US" sz="800" b="1" dirty="0">
+                <a:solidFill>
+                  <a:srgbClr val="22324A"/>
+                </a:solidFill>
+                <a:latin typeface="Microsoft YaHei" pitchFamily="34" charset="0"/>
+                <a:ea typeface="Microsoft YaHei" pitchFamily="34" charset="-122"/>
+                <a:cs typeface="Microsoft YaHei" pitchFamily="34" charset="-120"/>
+              </a:rPr>
+              <a:t>UR 通用模板</a:t>
+            </a:r>
+            <a:endParaRPr lang="en-US" sz="800" dirty="0"/>
+          </a:p>
+        </p:txBody>
+      </p:sp>
+      <p:sp>
+        <p:nvSpPr>
+          <p:cNvPr id="143" name="Text 141"/>
+          <p:cNvSpPr/>
+          <p:nvPr/>
+        </p:nvSpPr>
+        <p:spPr>
+          <a:xfrm>
+            <a:off x="10115297" y="5943600"/>
+            <a:ext cx="685783" cy="133350"/>
+          </a:xfrm>
+          <a:prstGeom prst="rect">
+            <a:avLst/>
+          </a:prstGeom>
+          <a:noFill/>
+          <a:ln/>
+        </p:spPr>
+        <p:txBody>
+          <a:bodyPr wrap="square" lIns="0" tIns="0" rIns="0" bIns="0" rtlCol="0" anchor="t">
+            <a:normAutofit/>
+          </a:bodyPr>
+          <a:lstStyle/>
+          <a:p>
+            <a:pPr marL="0" indent="0" algn="ctr">
+              <a:buNone/>
+            </a:pPr>
+            <a:r>
+              <a:rPr lang="en-US" sz="800" b="1" dirty="0">
+                <a:solidFill>
+                  <a:srgbClr val="22324A"/>
+                </a:solidFill>
+                <a:latin typeface="Microsoft YaHei" pitchFamily="34" charset="0"/>
+                <a:ea typeface="Microsoft YaHei" pitchFamily="34" charset="-122"/>
+                <a:cs typeface="Microsoft YaHei" pitchFamily="34" charset="-120"/>
+              </a:rPr>
+              <a:t>装配应用模板</a:t>
+            </a:r>
+            <a:endParaRPr lang="en-US" sz="800" dirty="0"/>
+          </a:p>
+        </p:txBody>
+      </p:sp>
+      <p:sp>
+        <p:nvSpPr>
+          <p:cNvPr id="144" name="Text 142"/>
+          <p:cNvSpPr/>
+          <p:nvPr/>
+        </p:nvSpPr>
+        <p:spPr>
+          <a:xfrm>
+            <a:off x="10991575" y="5943600"/>
+            <a:ext cx="685783" cy="133350"/>
+          </a:xfrm>
+          <a:prstGeom prst="rect">
+            <a:avLst/>
+          </a:prstGeom>
+          <a:noFill/>
+          <a:ln/>
+        </p:spPr>
+        <p:txBody>
+          <a:bodyPr wrap="square" lIns="0" tIns="0" rIns="0" bIns="0" rtlCol="0" anchor="t">
+            <a:normAutofit/>
+          </a:bodyPr>
+          <a:lstStyle/>
+          <a:p>
+            <a:pPr marL="0" indent="0" algn="ctr">
+              <a:buNone/>
+            </a:pPr>
+            <a:r>
+              <a:rPr lang="en-US" sz="800" b="1" dirty="0">
+                <a:solidFill>
+                  <a:srgbClr val="22324A"/>
+                </a:solidFill>
+                <a:latin typeface="Microsoft YaHei" pitchFamily="34" charset="0"/>
+                <a:ea typeface="Microsoft YaHei" pitchFamily="34" charset="-122"/>
+                <a:cs typeface="Microsoft YaHei" pitchFamily="34" charset="-120"/>
+              </a:rPr>
+              <a:t>焊接应用模板</a:t>
+            </a:r>
+            <a:endParaRPr lang="en-US" sz="800" dirty="0"/>
+          </a:p>
+        </p:txBody>
+      </p:sp>
+      <p:sp>
+        <p:nvSpPr>
+          <p:cNvPr id="145" name="Text 143"/>
+          <p:cNvSpPr/>
+          <p:nvPr/>
+        </p:nvSpPr>
+        <p:spPr>
+          <a:xfrm>
+            <a:off x="9239019" y="6115050"/>
+            <a:ext cx="685783" cy="114300"/>
+          </a:xfrm>
+          <a:prstGeom prst="rect">
+            <a:avLst/>
+          </a:prstGeom>
+          <a:noFill/>
+          <a:ln/>
+        </p:spPr>
+        <p:txBody>
+          <a:bodyPr wrap="square" lIns="0" tIns="0" rIns="0" bIns="0" rtlCol="0" anchor="t">
+            <a:normAutofit lnSpcReduction="10000"/>
+          </a:bodyPr>
+          <a:lstStyle/>
+          <a:p>
+            <a:pPr marL="0" indent="0" algn="ctr">
+              <a:buNone/>
+            </a:pPr>
+            <a:r>
+              <a:rPr lang="en-US" sz="800" dirty="0">
+                <a:solidFill>
+                  <a:srgbClr val="708097"/>
+                </a:solidFill>
+                <a:latin typeface="Microsoft YaHei" pitchFamily="34" charset="0"/>
+                <a:ea typeface="Microsoft YaHei" pitchFamily="34" charset="-122"/>
+                <a:cs typeface="Microsoft YaHei" pitchFamily="34" charset="-120"/>
+              </a:rPr>
+              <a:t>24点校验协议</a:t>
+            </a:r>
+            <a:endParaRPr lang="en-US" sz="800" dirty="0"/>
+          </a:p>
+        </p:txBody>
+      </p:sp>
+      <p:sp>
+        <p:nvSpPr>
+          <p:cNvPr id="146" name="Text 144"/>
+          <p:cNvSpPr/>
+          <p:nvPr/>
+        </p:nvSpPr>
+        <p:spPr>
+          <a:xfrm>
+            <a:off x="10115297" y="6115050"/>
+            <a:ext cx="685783" cy="114300"/>
+          </a:xfrm>
+          <a:prstGeom prst="rect">
+            <a:avLst/>
+          </a:prstGeom>
+          <a:noFill/>
+          <a:ln/>
+        </p:spPr>
+        <p:txBody>
+          <a:bodyPr wrap="square" lIns="0" tIns="0" rIns="0" bIns="0" rtlCol="0" anchor="t">
+            <a:normAutofit lnSpcReduction="10000"/>
+          </a:bodyPr>
+          <a:lstStyle/>
+          <a:p>
+            <a:pPr marL="0" indent="0" algn="ctr">
+              <a:buNone/>
+            </a:pPr>
+            <a:r>
+              <a:rPr lang="en-US" sz="800" dirty="0">
+                <a:solidFill>
+                  <a:srgbClr val="708097"/>
+                </a:solidFill>
+                <a:latin typeface="Microsoft YaHei" pitchFamily="34" charset="0"/>
+                <a:ea typeface="Microsoft YaHei" pitchFamily="34" charset="-122"/>
+                <a:cs typeface="Microsoft YaHei" pitchFamily="34" charset="-120"/>
+              </a:rPr>
+              <a:t>定点+轨迹校验</a:t>
+            </a:r>
+            <a:endParaRPr lang="en-US" sz="800" dirty="0"/>
+          </a:p>
+        </p:txBody>
+      </p:sp>
+      <p:sp>
+        <p:nvSpPr>
+          <p:cNvPr id="147" name="Text 145"/>
+          <p:cNvSpPr/>
+          <p:nvPr/>
+        </p:nvSpPr>
+        <p:spPr>
+          <a:xfrm>
+            <a:off x="10991575" y="6115050"/>
+            <a:ext cx="685783" cy="114300"/>
+          </a:xfrm>
+          <a:prstGeom prst="rect">
+            <a:avLst/>
+          </a:prstGeom>
+          <a:noFill/>
+          <a:ln/>
+        </p:spPr>
+        <p:txBody>
+          <a:bodyPr wrap="square" lIns="0" tIns="0" rIns="0" bIns="0" rtlCol="0" anchor="t">
+            <a:normAutofit lnSpcReduction="10000"/>
+          </a:bodyPr>
+          <a:lstStyle/>
+          <a:p>
+            <a:pPr marL="0" indent="0" algn="ctr">
+              <a:buNone/>
+            </a:pPr>
+            <a:r>
+              <a:rPr lang="en-US" sz="800" dirty="0">
+                <a:solidFill>
+                  <a:srgbClr val="708097"/>
+                </a:solidFill>
+                <a:latin typeface="Microsoft YaHei" pitchFamily="34" charset="0"/>
+                <a:ea typeface="Microsoft YaHei" pitchFamily="34" charset="-122"/>
+                <a:cs typeface="Microsoft YaHei" pitchFamily="34" charset="-120"/>
+              </a:rPr>
+              <a:t>焊缝轨迹校验</a:t>
+            </a:r>
+            <a:endParaRPr lang="en-US" sz="800" dirty="0"/>
+          </a:p>
+        </p:txBody>
+      </p:sp>
+      <p:sp>
+        <p:nvSpPr>
+          <p:cNvPr id="148" name="Shape 146"/>
+          <p:cNvSpPr/>
+          <p:nvPr/>
+        </p:nvSpPr>
+        <p:spPr>
+          <a:xfrm>
+            <a:off x="0" y="6562725"/>
+            <a:ext cx="12191695" cy="295275"/>
+          </a:xfrm>
+          <a:prstGeom prst="rect">
+            <a:avLst/>
+          </a:prstGeom>
+          <a:solidFill>
+            <a:srgbClr val="F8FBFF"/>
+          </a:solidFill>
+          <a:ln w="12700">
+            <a:solidFill>
+              <a:srgbClr val="FFFFFF">
+                <a:alpha val="0"/>
+              </a:srgbClr>
+            </a:solidFill>
+            <a:prstDash val="solid"/>
+          </a:ln>
+        </p:spPr>
+      </p:sp>
+      <p:sp>
+        <p:nvSpPr>
+          <p:cNvPr id="149" name="Shape 147"/>
+          <p:cNvSpPr/>
+          <p:nvPr/>
+        </p:nvSpPr>
+        <p:spPr>
+          <a:xfrm>
+            <a:off x="0" y="6567487"/>
+            <a:ext cx="12191695" cy="0"/>
+          </a:xfrm>
+          <a:prstGeom prst="line">
+            <a:avLst/>
+          </a:prstGeom>
+          <a:solidFill>
+            <a:srgbClr val="FFFFFF">
+              <a:alpha val="0"/>
+            </a:srgbClr>
+          </a:solidFill>
+          <a:ln w="9525">
+            <a:solidFill>
+              <a:srgbClr val="DCE6F3"/>
+            </a:solidFill>
+            <a:prstDash val="solid"/>
+          </a:ln>
+        </p:spPr>
+      </p:sp>
+      <p:sp>
+        <p:nvSpPr>
+          <p:cNvPr id="150" name="Text 148"/>
+          <p:cNvSpPr/>
+          <p:nvPr/>
+        </p:nvSpPr>
+        <p:spPr>
+          <a:xfrm>
+            <a:off x="228594" y="6642100"/>
+            <a:ext cx="686676" cy="142875"/>
+          </a:xfrm>
+          <a:prstGeom prst="rect">
+            <a:avLst/>
+          </a:prstGeom>
+          <a:noFill/>
+          <a:ln/>
+        </p:spPr>
+        <p:txBody>
+          <a:bodyPr wrap="square" lIns="0" tIns="0" rIns="0" bIns="0" rtlCol="0" anchor="t">
+            <a:normAutofit/>
+          </a:bodyPr>
+          <a:lstStyle/>
+          <a:p>
+            <a:pPr marL="0" indent="0" algn="l">
+              <a:buNone/>
+            </a:pPr>
+            <a:r>
+              <a:rPr lang="en-US" sz="825" dirty="0">
+                <a:solidFill>
+                  <a:srgbClr val="46556B"/>
+                </a:solidFill>
+                <a:latin typeface="Microsoft YaHei" pitchFamily="34" charset="0"/>
+                <a:ea typeface="Microsoft YaHei" pitchFamily="34" charset="-122"/>
+                <a:cs typeface="Microsoft YaHei" pitchFamily="34" charset="-120"/>
+              </a:rPr>
+              <a:t>机器人：UR5e</a:t>
+            </a:r>
+            <a:endParaRPr lang="en-US" sz="825" dirty="0"/>
+          </a:p>
+        </p:txBody>
+      </p:sp>
+      <p:sp>
+        <p:nvSpPr>
+          <p:cNvPr id="151" name="Text 149"/>
+          <p:cNvSpPr/>
+          <p:nvPr/>
+        </p:nvSpPr>
+        <p:spPr>
+          <a:xfrm>
+            <a:off x="1257269" y="6642100"/>
+            <a:ext cx="616431" cy="142875"/>
+          </a:xfrm>
+          <a:prstGeom prst="rect">
+            <a:avLst/>
+          </a:prstGeom>
+          <a:noFill/>
+          <a:ln/>
+        </p:spPr>
+        <p:txBody>
+          <a:bodyPr wrap="square" lIns="0" tIns="0" rIns="0" bIns="0" rtlCol="0" anchor="t">
+            <a:normAutofit/>
+          </a:bodyPr>
+          <a:lstStyle/>
+          <a:p>
+            <a:pPr marL="0" indent="0" algn="l">
+              <a:buNone/>
+            </a:pPr>
+            <a:r>
+              <a:rPr lang="en-US" sz="825" dirty="0">
+                <a:solidFill>
+                  <a:srgbClr val="46556B"/>
+                </a:solidFill>
+                <a:latin typeface="Microsoft YaHei" pitchFamily="34" charset="0"/>
+                <a:ea typeface="Microsoft YaHei" pitchFamily="34" charset="-122"/>
+                <a:cs typeface="Microsoft YaHei" pitchFamily="34" charset="-120"/>
+              </a:rPr>
+              <a:t>控制器：CB3</a:t>
+            </a:r>
+            <a:endParaRPr lang="en-US" sz="825" dirty="0"/>
+          </a:p>
+        </p:txBody>
+      </p:sp>
+      <p:sp>
+        <p:nvSpPr>
+          <p:cNvPr id="152" name="Text 150"/>
+          <p:cNvSpPr/>
+          <p:nvPr/>
+        </p:nvSpPr>
+        <p:spPr>
+          <a:xfrm>
+            <a:off x="2419290" y="6642100"/>
+            <a:ext cx="810349" cy="142875"/>
+          </a:xfrm>
+          <a:prstGeom prst="rect">
+            <a:avLst/>
+          </a:prstGeom>
+          <a:noFill/>
+          <a:ln/>
+        </p:spPr>
+        <p:txBody>
+          <a:bodyPr wrap="square" lIns="0" tIns="0" rIns="0" bIns="0" rtlCol="0" anchor="t">
+            <a:normAutofit fontScale="92500"/>
+          </a:bodyPr>
+          <a:lstStyle/>
+          <a:p>
+            <a:pPr marL="0" indent="0" algn="l">
+              <a:buNone/>
+            </a:pPr>
+            <a:r>
+              <a:rPr lang="en-US" sz="825" dirty="0">
+                <a:solidFill>
+                  <a:srgbClr val="46556B"/>
+                </a:solidFill>
+                <a:latin typeface="Microsoft YaHei" pitchFamily="34" charset="0"/>
+                <a:ea typeface="Microsoft YaHei" pitchFamily="34" charset="-122"/>
+                <a:cs typeface="Microsoft YaHei" pitchFamily="34" charset="-120"/>
+              </a:rPr>
+              <a:t>仿真频率：60 Hz</a:t>
+            </a:r>
+            <a:endParaRPr lang="en-US" sz="825" dirty="0"/>
+          </a:p>
+        </p:txBody>
+      </p:sp>
+      <p:sp>
+        <p:nvSpPr>
+          <p:cNvPr id="153" name="Text 151"/>
+          <p:cNvSpPr/>
+          <p:nvPr/>
+        </p:nvSpPr>
+        <p:spPr>
+          <a:xfrm>
+            <a:off x="3752756" y="6642100"/>
+            <a:ext cx="824190" cy="142875"/>
+          </a:xfrm>
+          <a:prstGeom prst="rect">
+            <a:avLst/>
+          </a:prstGeom>
+          <a:noFill/>
+          <a:ln/>
+        </p:spPr>
+        <p:txBody>
+          <a:bodyPr wrap="square" lIns="0" tIns="0" rIns="0" bIns="0" rtlCol="0" anchor="t">
+            <a:normAutofit fontScale="92500"/>
+          </a:bodyPr>
+          <a:lstStyle/>
+          <a:p>
+            <a:pPr marL="0" indent="0" algn="l">
+              <a:buNone/>
+            </a:pPr>
+            <a:r>
+              <a:rPr lang="en-US" sz="825" dirty="0">
+                <a:solidFill>
+                  <a:srgbClr val="46556B"/>
+                </a:solidFill>
+                <a:latin typeface="Microsoft YaHei" pitchFamily="34" charset="0"/>
+                <a:ea typeface="Microsoft YaHei" pitchFamily="34" charset="-122"/>
+                <a:cs typeface="Microsoft YaHei" pitchFamily="34" charset="-120"/>
+              </a:rPr>
+              <a:t>数字孪生时间：--</a:t>
+            </a:r>
+            <a:endParaRPr lang="en-US" sz="825" dirty="0"/>
+          </a:p>
+        </p:txBody>
+      </p:sp>
+      <p:sp>
+        <p:nvSpPr>
+          <p:cNvPr id="154" name="Text 152"/>
+          <p:cNvSpPr/>
+          <p:nvPr/>
+        </p:nvSpPr>
+        <p:spPr>
+          <a:xfrm>
+            <a:off x="5219570" y="6642100"/>
+            <a:ext cx="838179" cy="142875"/>
+          </a:xfrm>
+          <a:prstGeom prst="rect">
+            <a:avLst/>
+          </a:prstGeom>
+          <a:noFill/>
+          <a:ln/>
+        </p:spPr>
+        <p:txBody>
+          <a:bodyPr wrap="square" lIns="0" tIns="0" rIns="0" bIns="0" rtlCol="0" anchor="t">
+            <a:normAutofit fontScale="92500"/>
+          </a:bodyPr>
+          <a:lstStyle/>
+          <a:p>
+            <a:pPr marL="0" indent="0" algn="l">
+              <a:buNone/>
+            </a:pPr>
+            <a:r>
+              <a:rPr lang="en-US" sz="825" dirty="0">
+                <a:solidFill>
+                  <a:srgbClr val="46556B"/>
+                </a:solidFill>
+                <a:latin typeface="Microsoft YaHei" pitchFamily="34" charset="0"/>
+                <a:ea typeface="Microsoft YaHei" pitchFamily="34" charset="-122"/>
+                <a:cs typeface="Microsoft YaHei" pitchFamily="34" charset="-120"/>
+              </a:rPr>
+              <a:t>坐标系：基坐标系</a:t>
+            </a:r>
+            <a:endParaRPr lang="en-US" sz="825" dirty="0"/>
+          </a:p>
+        </p:txBody>
+      </p:sp>
+      <p:sp>
+        <p:nvSpPr>
+          <p:cNvPr id="155" name="Text 153"/>
+          <p:cNvSpPr/>
+          <p:nvPr/>
+        </p:nvSpPr>
+        <p:spPr>
+          <a:xfrm>
+            <a:off x="10429614" y="6642100"/>
+            <a:ext cx="209545" cy="142875"/>
+          </a:xfrm>
+          <a:prstGeom prst="rect">
+            <a:avLst/>
+          </a:prstGeom>
+          <a:noFill/>
+          <a:ln/>
+        </p:spPr>
+        <p:txBody>
+          <a:bodyPr wrap="square" lIns="0" tIns="0" rIns="0" bIns="0" rtlCol="0" anchor="t">
+            <a:normAutofit fontScale="92500"/>
+          </a:bodyPr>
+          <a:lstStyle/>
+          <a:p>
+            <a:pPr marL="0" indent="0" algn="l">
+              <a:buNone/>
+            </a:pPr>
+            <a:r>
+              <a:rPr lang="en-US" sz="825" dirty="0">
+                <a:solidFill>
+                  <a:srgbClr val="46556B"/>
+                </a:solidFill>
+                <a:latin typeface="Microsoft YaHei" pitchFamily="34" charset="0"/>
+                <a:ea typeface="Microsoft YaHei" pitchFamily="34" charset="-122"/>
+                <a:cs typeface="Microsoft YaHei" pitchFamily="34" charset="-120"/>
+              </a:rPr>
+              <a:t>日志</a:t>
+            </a:r>
+            <a:endParaRPr lang="en-US" sz="825" dirty="0"/>
+          </a:p>
+        </p:txBody>
+      </p:sp>
+      <p:sp>
+        <p:nvSpPr>
+          <p:cNvPr id="156" name="Text 154"/>
+          <p:cNvSpPr/>
+          <p:nvPr/>
+        </p:nvSpPr>
+        <p:spPr>
+          <a:xfrm>
+            <a:off x="11239219" y="6642100"/>
+            <a:ext cx="314317" cy="142875"/>
+          </a:xfrm>
+          <a:prstGeom prst="rect">
+            <a:avLst/>
+          </a:prstGeom>
+          <a:noFill/>
+          <a:ln/>
+        </p:spPr>
+        <p:txBody>
+          <a:bodyPr wrap="square" lIns="0" tIns="0" rIns="0" bIns="0" rtlCol="0" anchor="t">
+            <a:normAutofit fontScale="92500"/>
+          </a:bodyPr>
+          <a:lstStyle/>
+          <a:p>
+            <a:pPr marL="0" indent="0" algn="l">
+              <a:buNone/>
+            </a:pPr>
+            <a:r>
+              <a:rPr lang="en-US" sz="825" dirty="0">
+                <a:solidFill>
+                  <a:srgbClr val="46556B"/>
+                </a:solidFill>
+                <a:latin typeface="Microsoft YaHei" pitchFamily="34" charset="0"/>
+                <a:ea typeface="Microsoft YaHei" pitchFamily="34" charset="-122"/>
+                <a:cs typeface="Microsoft YaHei" pitchFamily="34" charset="-120"/>
+              </a:rPr>
+              <a:t>无告警</a:t>
+            </a:r>
+            <a:endParaRPr lang="en-US" sz="825" dirty="0"/>
+          </a:p>
+        </p:txBody>
+      </p:sp>
     </p:spTree>
     <p:extLst>
       <p:ext uri="{BB962C8B-B14F-4D97-AF65-F5344CB8AC3E}">
-        <p14:creationId xmlns:p14="http://schemas.microsoft.com/office/powerpoint/2010/main" val="4040562331"/>
+        <p14:creationId xmlns:p14="http://schemas.microsoft.com/office/powerpoint/2010/main" val="2849631887"/>
+      </p:ext>
+    </p:extLst>
+  </p:cSld>
+  <p:clrMapOvr>
+    <a:masterClrMapping/>
+  </p:clrMapOvr>
+</p:sld>
+</file>
+
+<file path=ppt/slides/slide2.xml><?xml version="1.0" encoding="utf-8"?>
+<p:sld xmlns:a="http://schemas.openxmlformats.org/drawingml/2006/main" xmlns:r="http://schemas.openxmlformats.org/officeDocument/2006/relationships" xmlns:p="http://schemas.openxmlformats.org/presentationml/2006/main">
+  <p:cSld name="Slide 1">
+    <p:spTree>
+      <p:nvGrpSpPr>
+        <p:cNvPr id="1" name=""/>
+        <p:cNvGrpSpPr/>
+        <p:nvPr/>
+      </p:nvGrpSpPr>
+      <p:grpSpPr>
+        <a:xfrm>
+          <a:off x="0" y="0"/>
+          <a:ext cx="0" cy="0"/>
+          <a:chOff x="0" y="0"/>
+          <a:chExt cx="0" cy="0"/>
+        </a:xfrm>
+      </p:grpSpPr>
+      <p:pic>
+        <p:nvPicPr>
+          <p:cNvPr id="158" name="图片 157">
+            <a:extLst>
+              <a:ext uri="{FF2B5EF4-FFF2-40B4-BE49-F238E27FC236}">
+                <a16:creationId xmlns:a16="http://schemas.microsoft.com/office/drawing/2014/main" id="{6F4C00DF-1811-E6F3-F6B2-CC21267686FB}"/>
+              </a:ext>
+            </a:extLst>
+          </p:cNvPr>
+          <p:cNvPicPr>
+            <a:picLocks noChangeAspect="1"/>
+          </p:cNvPicPr>
+          <p:nvPr/>
+        </p:nvPicPr>
+        <p:blipFill>
+          <a:blip r:embed="rId3"/>
+          <a:stretch>
+            <a:fillRect/>
+          </a:stretch>
+        </p:blipFill>
+        <p:spPr>
+          <a:xfrm>
+            <a:off x="0" y="147516"/>
+            <a:ext cx="12192000" cy="6562968"/>
+          </a:xfrm>
+          <a:prstGeom prst="rect">
+            <a:avLst/>
+          </a:prstGeom>
+        </p:spPr>
+      </p:pic>
+    </p:spTree>
+    <p:extLst>
+      <p:ext uri="{BB962C8B-B14F-4D97-AF65-F5344CB8AC3E}">
+        <p14:creationId xmlns:p14="http://schemas.microsoft.com/office/powerpoint/2010/main" val="3035518626"/>
       </p:ext>
     </p:extLst>
   </p:cSld>
@@ -3647,4 +10022,634 @@
     </a:ext>
   </a:extLst>
 </a:theme>
+</file>
+
+<file path=ppt/theme/theme2.xml><?xml version="1.0" encoding="utf-8"?>
+<a:theme xmlns:a="http://schemas.openxmlformats.org/drawingml/2006/main" name="Office Theme">
+  <a:themeElements>
+    <a:clrScheme name="Office">
+      <a:dk1>
+        <a:sysClr val="windowText" lastClr="000000"/>
+      </a:dk1>
+      <a:lt1>
+        <a:sysClr val="window" lastClr="FFFFFF"/>
+      </a:lt1>
+      <a:dk2>
+        <a:srgbClr val="44546A"/>
+      </a:dk2>
+      <a:lt2>
+        <a:srgbClr val="E7E6E6"/>
+      </a:lt2>
+      <a:accent1>
+        <a:srgbClr val="4472C4"/>
+      </a:accent1>
+      <a:accent2>
+        <a:srgbClr val="ED7D31"/>
+      </a:accent2>
+      <a:accent3>
+        <a:srgbClr val="A5A5A5"/>
+      </a:accent3>
+      <a:accent4>
+        <a:srgbClr val="FFC000"/>
+      </a:accent4>
+      <a:accent5>
+        <a:srgbClr val="5B9BD5"/>
+      </a:accent5>
+      <a:accent6>
+        <a:srgbClr val="70AD47"/>
+      </a:accent6>
+      <a:hlink>
+        <a:srgbClr val="0563C1"/>
+      </a:hlink>
+      <a:folHlink>
+        <a:srgbClr val="954F72"/>
+      </a:folHlink>
+    </a:clrScheme>
+    <a:fontScheme name="Office">
+      <a:majorFont>
+        <a:latin typeface="Calibri Light" panose="020F0302020204030204"/>
+        <a:ea typeface=""/>
+        <a:cs typeface=""/>
+        <a:font script="Jpan" typeface="游ゴシック Light"/>
+        <a:font script="Hang" typeface="맑은 고딕"/>
+        <a:font script="Hans" typeface="等线 Light"/>
+        <a:font script="Hant" typeface="新細明體"/>
+        <a:font script="Arab" typeface="Times New Roman"/>
+        <a:font script="Hebr" typeface="Times New Roman"/>
+        <a:font script="Thai" typeface="Angsana New"/>
+        <a:font script="Ethi" typeface="Nyala"/>
+        <a:font script="Beng" typeface="Vrinda"/>
+        <a:font script="Gujr" typeface="Shruti"/>
+        <a:font script="Khmr" typeface="MoolBoran"/>
+        <a:font script="Knda" typeface="Tunga"/>
+        <a:font script="Guru" typeface="Raavi"/>
+        <a:font script="Cans" typeface="Euphemia"/>
+        <a:font script="Cher" typeface="Plantagenet Cherokee"/>
+        <a:font script="Yiii" typeface="Microsoft Yi Baiti"/>
+        <a:font script="Tibt" typeface="Microsoft Himalaya"/>
+        <a:font script="Thaa" typeface="MV Boli"/>
+        <a:font script="Deva" typeface="Mangal"/>
+        <a:font script="Telu" typeface="Gautami"/>
+        <a:font script="Taml" typeface="Latha"/>
+        <a:font script="Syrc" typeface="Estrangelo Edessa"/>
+        <a:font script="Orya" typeface="Kalinga"/>
+        <a:font script="Mlym" typeface="Kartika"/>
+        <a:font script="Laoo" typeface="DokChampa"/>
+        <a:font script="Sinh" typeface="Iskoola Pota"/>
+        <a:font script="Mong" typeface="Mongolian Baiti"/>
+        <a:font script="Viet" typeface="Times New Roman"/>
+        <a:font script="Uigh" typeface="Microsoft Uighur"/>
+        <a:font script="Geor" typeface="Sylfaen"/>
+        <a:font script="Armn" typeface="Arial"/>
+        <a:font script="Bugi" typeface="Leelawadee UI"/>
+        <a:font script="Bopo" typeface="Microsoft JhengHei"/>
+        <a:font script="Java" typeface="Javanese Text"/>
+        <a:font script="Lisu" typeface="Segoe UI"/>
+        <a:font script="Mymr" typeface="Myanmar Text"/>
+        <a:font script="Nkoo" typeface="Ebrima"/>
+        <a:font script="Olck" typeface="Nirmala UI"/>
+        <a:font script="Osma" typeface="Ebrima"/>
+        <a:font script="Phag" typeface="Phagspa"/>
+        <a:font script="Syrn" typeface="Estrangelo Edessa"/>
+        <a:font script="Syrj" typeface="Estrangelo Edessa"/>
+        <a:font script="Syre" typeface="Estrangelo Edessa"/>
+        <a:font script="Sora" typeface="Nirmala UI"/>
+        <a:font script="Tale" typeface="Microsoft Tai Le"/>
+        <a:font script="Talu" typeface="Microsoft New Tai Lue"/>
+        <a:font script="Tfng" typeface="Ebrima"/>
+      </a:majorFont>
+      <a:minorFont>
+        <a:latin typeface="Calibri" panose="020F0502020204030204"/>
+        <a:ea typeface=""/>
+        <a:cs typeface=""/>
+        <a:font script="Jpan" typeface="游ゴシック"/>
+        <a:font script="Hang" typeface="맑은 고딕"/>
+        <a:font script="Hans" typeface="等线"/>
+        <a:font script="Hant" typeface="新細明體"/>
+        <a:font script="Arab" typeface="Arial"/>
+        <a:font script="Hebr" typeface="Arial"/>
+        <a:font script="Thai" typeface="Cordia New"/>
+        <a:font script="Ethi" typeface="Nyala"/>
+        <a:font script="Beng" typeface="Vrinda"/>
+        <a:font script="Gujr" typeface="Shruti"/>
+        <a:font script="Khmr" typeface="DaunPenh"/>
+        <a:font script="Knda" typeface="Tunga"/>
+        <a:font script="Guru" typeface="Raavi"/>
+        <a:font script="Cans" typeface="Euphemia"/>
+        <a:font script="Cher" typeface="Plantagenet Cherokee"/>
+        <a:font script="Yiii" typeface="Microsoft Yi Baiti"/>
+        <a:font script="Tibt" typeface="Microsoft Himalaya"/>
+        <a:font script="Thaa" typeface="MV Boli"/>
+        <a:font script="Deva" typeface="Mangal"/>
+        <a:font script="Telu" typeface="Gautami"/>
+        <a:font script="Taml" typeface="Latha"/>
+        <a:font script="Syrc" typeface="Estrangelo Edessa"/>
+        <a:font script="Orya" typeface="Kalinga"/>
+        <a:font script="Mlym" typeface="Kartika"/>
+        <a:font script="Laoo" typeface="DokChampa"/>
+        <a:font script="Sinh" typeface="Iskoola Pota"/>
+        <a:font script="Mong" typeface="Mongolian Baiti"/>
+        <a:font script="Viet" typeface="Arial"/>
+        <a:font script="Uigh" typeface="Microsoft Uighur"/>
+        <a:font script="Geor" typeface="Sylfaen"/>
+        <a:font script="Armn" typeface="Arial"/>
+        <a:font script="Bugi" typeface="Leelawadee UI"/>
+        <a:font script="Bopo" typeface="Microsoft JhengHei"/>
+        <a:font script="Java" typeface="Javanese Text"/>
+        <a:font script="Lisu" typeface="Segoe UI"/>
+        <a:font script="Mymr" typeface="Myanmar Text"/>
+        <a:font script="Nkoo" typeface="Ebrima"/>
+        <a:font script="Olck" typeface="Nirmala UI"/>
+        <a:font script="Osma" typeface="Ebrima"/>
+        <a:font script="Phag" typeface="Phagspa"/>
+        <a:font script="Syrn" typeface="Estrangelo Edessa"/>
+        <a:font script="Syrj" typeface="Estrangelo Edessa"/>
+        <a:font script="Syre" typeface="Estrangelo Edessa"/>
+        <a:font script="Sora" typeface="Nirmala UI"/>
+        <a:font script="Tale" typeface="Microsoft Tai Le"/>
+        <a:font script="Talu" typeface="Microsoft New Tai Lue"/>
+        <a:font script="Tfng" typeface="Ebrima"/>
+      </a:minorFont>
+    </a:fontScheme>
+    <a:fmtScheme name="Office">
+      <a:fillStyleLst>
+        <a:solidFill>
+          <a:schemeClr val="phClr"/>
+        </a:solidFill>
+        <a:gradFill rotWithShape="1">
+          <a:gsLst>
+            <a:gs pos="0">
+              <a:schemeClr val="phClr">
+                <a:lumMod val="110000"/>
+                <a:satMod val="105000"/>
+                <a:tint val="67000"/>
+              </a:schemeClr>
+            </a:gs>
+            <a:gs pos="50000">
+              <a:schemeClr val="phClr">
+                <a:lumMod val="105000"/>
+                <a:satMod val="103000"/>
+                <a:tint val="73000"/>
+              </a:schemeClr>
+            </a:gs>
+            <a:gs pos="100000">
+              <a:schemeClr val="phClr">
+                <a:lumMod val="105000"/>
+                <a:satMod val="109000"/>
+                <a:tint val="81000"/>
+              </a:schemeClr>
+            </a:gs>
+          </a:gsLst>
+          <a:lin ang="5400000" scaled="0"/>
+        </a:gradFill>
+        <a:gradFill rotWithShape="1">
+          <a:gsLst>
+            <a:gs pos="0">
+              <a:schemeClr val="phClr">
+                <a:satMod val="103000"/>
+                <a:lumMod val="102000"/>
+                <a:tint val="94000"/>
+              </a:schemeClr>
+            </a:gs>
+            <a:gs pos="50000">
+              <a:schemeClr val="phClr">
+                <a:satMod val="110000"/>
+                <a:lumMod val="100000"/>
+                <a:shade val="100000"/>
+              </a:schemeClr>
+            </a:gs>
+            <a:gs pos="100000">
+              <a:schemeClr val="phClr">
+                <a:lumMod val="99000"/>
+                <a:satMod val="120000"/>
+                <a:shade val="78000"/>
+              </a:schemeClr>
+            </a:gs>
+          </a:gsLst>
+          <a:lin ang="5400000" scaled="0"/>
+        </a:gradFill>
+      </a:fillStyleLst>
+      <a:lnStyleLst>
+        <a:ln w="6350" cap="flat" cmpd="sng" algn="ctr">
+          <a:solidFill>
+            <a:schemeClr val="phClr"/>
+          </a:solidFill>
+          <a:prstDash val="solid"/>
+          <a:miter lim="800000"/>
+        </a:ln>
+        <a:ln w="12700" cap="flat" cmpd="sng" algn="ctr">
+          <a:solidFill>
+            <a:schemeClr val="phClr"/>
+          </a:solidFill>
+          <a:prstDash val="solid"/>
+          <a:miter lim="800000"/>
+        </a:ln>
+        <a:ln w="19050" cap="flat" cmpd="sng" algn="ctr">
+          <a:solidFill>
+            <a:schemeClr val="phClr"/>
+          </a:solidFill>
+          <a:prstDash val="solid"/>
+          <a:miter lim="800000"/>
+        </a:ln>
+      </a:lnStyleLst>
+      <a:effectStyleLst>
+        <a:effectStyle>
+          <a:effectLst/>
+        </a:effectStyle>
+        <a:effectStyle>
+          <a:effectLst/>
+        </a:effectStyle>
+        <a:effectStyle>
+          <a:effectLst>
+            <a:outerShdw blurRad="57150" dist="19050" dir="5400000" algn="ctr" rotWithShape="0">
+              <a:srgbClr val="000000">
+                <a:alpha val="63000"/>
+              </a:srgbClr>
+            </a:outerShdw>
+          </a:effectLst>
+        </a:effectStyle>
+      </a:effectStyleLst>
+      <a:bgFillStyleLst>
+        <a:solidFill>
+          <a:schemeClr val="phClr"/>
+        </a:solidFill>
+        <a:solidFill>
+          <a:schemeClr val="phClr">
+            <a:tint val="95000"/>
+            <a:satMod val="170000"/>
+          </a:schemeClr>
+        </a:solidFill>
+        <a:gradFill rotWithShape="1">
+          <a:gsLst>
+            <a:gs pos="0">
+              <a:schemeClr val="phClr">
+                <a:tint val="93000"/>
+                <a:satMod val="150000"/>
+                <a:shade val="98000"/>
+                <a:lumMod val="102000"/>
+              </a:schemeClr>
+            </a:gs>
+            <a:gs pos="50000">
+              <a:schemeClr val="phClr">
+                <a:tint val="98000"/>
+                <a:satMod val="130000"/>
+                <a:shade val="90000"/>
+                <a:lumMod val="103000"/>
+              </a:schemeClr>
+            </a:gs>
+            <a:gs pos="100000">
+              <a:schemeClr val="phClr">
+                <a:shade val="63000"/>
+                <a:satMod val="120000"/>
+              </a:schemeClr>
+            </a:gs>
+          </a:gsLst>
+          <a:lin ang="5400000" scaled="0"/>
+        </a:gradFill>
+      </a:bgFillStyleLst>
+    </a:fmtScheme>
+  </a:themeElements>
+  <a:objectDefaults/>
+  <a:extraClrSchemeLst/>
+  <a:extLst>
+    <a:ext uri="{05A4C25C-085E-4340-85A3-A5531E510DB2}">
+      <thm15:themeFamily xmlns:thm15="http://schemas.microsoft.com/office/thememl/2012/main" name="Office Theme" id="{62F939B6-93AF-4DB8-9C6B-D6C7DFDC589F}" vid="{4A3C46E8-61CC-4603-A589-7422A47A8E4A}"/>
+    </a:ext>
+  </a:extLst>
+</a:theme>
+</file>
+
+<file path=ppt/theme/theme3.xml><?xml version="1.0" encoding="utf-8"?>
+<a:theme xmlns:a="http://schemas.openxmlformats.org/drawingml/2006/main" name="Office 主题​​">
+  <a:themeElements>
+    <a:clrScheme name="Office">
+      <a:dk1>
+        <a:sysClr val="windowText" lastClr="000000"/>
+      </a:dk1>
+      <a:lt1>
+        <a:sysClr val="window" lastClr="FFFFFF"/>
+      </a:lt1>
+      <a:dk2>
+        <a:srgbClr val="0E2841"/>
+      </a:dk2>
+      <a:lt2>
+        <a:srgbClr val="E8E8E8"/>
+      </a:lt2>
+      <a:accent1>
+        <a:srgbClr val="156082"/>
+      </a:accent1>
+      <a:accent2>
+        <a:srgbClr val="E97132"/>
+      </a:accent2>
+      <a:accent3>
+        <a:srgbClr val="196B24"/>
+      </a:accent3>
+      <a:accent4>
+        <a:srgbClr val="0F9ED5"/>
+      </a:accent4>
+      <a:accent5>
+        <a:srgbClr val="A02B93"/>
+      </a:accent5>
+      <a:accent6>
+        <a:srgbClr val="4EA72E"/>
+      </a:accent6>
+      <a:hlink>
+        <a:srgbClr val="467886"/>
+      </a:hlink>
+      <a:folHlink>
+        <a:srgbClr val="96607D"/>
+      </a:folHlink>
+    </a:clrScheme>
+    <a:fontScheme name="Office">
+      <a:majorFont>
+        <a:latin typeface="等线 Light" panose="02110004020202020204"/>
+        <a:ea typeface=""/>
+        <a:cs typeface=""/>
+        <a:font script="Jpan" typeface="游ゴシック Light"/>
+        <a:font script="Hang" typeface="맑은 고딕"/>
+        <a:font script="Hans" typeface="等线 Light"/>
+        <a:font script="Hant" typeface="新細明體"/>
+        <a:font script="Arab" typeface="Times New Roman"/>
+        <a:font script="Hebr" typeface="Times New Roman"/>
+        <a:font script="Thai" typeface="Angsana New"/>
+        <a:font script="Ethi" typeface="Nyala"/>
+        <a:font script="Beng" typeface="Vrinda"/>
+        <a:font script="Gujr" typeface="Shruti"/>
+        <a:font script="Khmr" typeface="MoolBoran"/>
+        <a:font script="Knda" typeface="Tunga"/>
+        <a:font script="Guru" typeface="Raavi"/>
+        <a:font script="Cans" typeface="Euphemia"/>
+        <a:font script="Cher" typeface="Plantagenet Cherokee"/>
+        <a:font script="Yiii" typeface="Microsoft Yi Baiti"/>
+        <a:font script="Tibt" typeface="Microsoft Himalaya"/>
+        <a:font script="Thaa" typeface="MV Boli"/>
+        <a:font script="Deva" typeface="Mangal"/>
+        <a:font script="Telu" typeface="Gautami"/>
+        <a:font script="Taml" typeface="Latha"/>
+        <a:font script="Syrc" typeface="Estrangelo Edessa"/>
+        <a:font script="Orya" typeface="Kalinga"/>
+        <a:font script="Mlym" typeface="Kartika"/>
+        <a:font script="Laoo" typeface="DokChampa"/>
+        <a:font script="Sinh" typeface="Iskoola Pota"/>
+        <a:font script="Mong" typeface="Mongolian Baiti"/>
+        <a:font script="Viet" typeface="Times New Roman"/>
+        <a:font script="Uigh" typeface="Microsoft Uighur"/>
+        <a:font script="Geor" typeface="Sylfaen"/>
+        <a:font script="Armn" typeface="Arial"/>
+        <a:font script="Bugi" typeface="Leelawadee UI"/>
+        <a:font script="Bopo" typeface="Microsoft JhengHei"/>
+        <a:font script="Java" typeface="Javanese Text"/>
+        <a:font script="Lisu" typeface="Segoe UI"/>
+        <a:font script="Mymr" typeface="Myanmar Text"/>
+        <a:font script="Nkoo" typeface="Ebrima"/>
+        <a:font script="Olck" typeface="Nirmala UI"/>
+        <a:font script="Osma" typeface="Ebrima"/>
+        <a:font script="Phag" typeface="Phagspa"/>
+        <a:font script="Syrn" typeface="Estrangelo Edessa"/>
+        <a:font script="Syrj" typeface="Estrangelo Edessa"/>
+        <a:font script="Syre" typeface="Estrangelo Edessa"/>
+        <a:font script="Sora" typeface="Nirmala UI"/>
+        <a:font script="Tale" typeface="Microsoft Tai Le"/>
+        <a:font script="Talu" typeface="Microsoft New Tai Lue"/>
+        <a:font script="Tfng" typeface="Ebrima"/>
+      </a:majorFont>
+      <a:minorFont>
+        <a:latin typeface="等线" panose="02110004020202020204"/>
+        <a:ea typeface=""/>
+        <a:cs typeface=""/>
+        <a:font script="Jpan" typeface="游ゴシック"/>
+        <a:font script="Hang" typeface="맑은 고딕"/>
+        <a:font script="Hans" typeface="等线"/>
+        <a:font script="Hant" typeface="新細明體"/>
+        <a:font script="Arab" typeface="Arial"/>
+        <a:font script="Hebr" typeface="Arial"/>
+        <a:font script="Thai" typeface="Cordia New"/>
+        <a:font script="Ethi" typeface="Nyala"/>
+        <a:font script="Beng" typeface="Vrinda"/>
+        <a:font script="Gujr" typeface="Shruti"/>
+        <a:font script="Khmr" typeface="DaunPenh"/>
+        <a:font script="Knda" typeface="Tunga"/>
+        <a:font script="Guru" typeface="Raavi"/>
+        <a:font script="Cans" typeface="Euphemia"/>
+        <a:font script="Cher" typeface="Plantagenet Cherokee"/>
+        <a:font script="Yiii" typeface="Microsoft Yi Baiti"/>
+        <a:font script="Tibt" typeface="Microsoft Himalaya"/>
+        <a:font script="Thaa" typeface="MV Boli"/>
+        <a:font script="Deva" typeface="Mangal"/>
+        <a:font script="Telu" typeface="Gautami"/>
+        <a:font script="Taml" typeface="Latha"/>
+        <a:font script="Syrc" typeface="Estrangelo Edessa"/>
+        <a:font script="Orya" typeface="Kalinga"/>
+        <a:font script="Mlym" typeface="Kartika"/>
+        <a:font script="Laoo" typeface="DokChampa"/>
+        <a:font script="Sinh" typeface="Iskoola Pota"/>
+        <a:font script="Mong" typeface="Mongolian Baiti"/>
+        <a:font script="Viet" typeface="Arial"/>
+        <a:font script="Uigh" typeface="Microsoft Uighur"/>
+        <a:font script="Geor" typeface="Sylfaen"/>
+        <a:font script="Armn" typeface="Arial"/>
+        <a:font script="Bugi" typeface="Leelawadee UI"/>
+        <a:font script="Bopo" typeface="Microsoft JhengHei"/>
+        <a:font script="Java" typeface="Javanese Text"/>
+        <a:font script="Lisu" typeface="Segoe UI"/>
+        <a:font script="Mymr" typeface="Myanmar Text"/>
+        <a:font script="Nkoo" typeface="Ebrima"/>
+        <a:font script="Olck" typeface="Nirmala UI"/>
+        <a:font script="Osma" typeface="Ebrima"/>
+        <a:font script="Phag" typeface="Phagspa"/>
+        <a:font script="Syrn" typeface="Estrangelo Edessa"/>
+        <a:font script="Syrj" typeface="Estrangelo Edessa"/>
+        <a:font script="Syre" typeface="Estrangelo Edessa"/>
+        <a:font script="Sora" typeface="Nirmala UI"/>
+        <a:font script="Tale" typeface="Microsoft Tai Le"/>
+        <a:font script="Talu" typeface="Microsoft New Tai Lue"/>
+        <a:font script="Tfng" typeface="Ebrima"/>
+      </a:minorFont>
+    </a:fontScheme>
+    <a:fmtScheme name="Office">
+      <a:fillStyleLst>
+        <a:solidFill>
+          <a:schemeClr val="phClr"/>
+        </a:solidFill>
+        <a:gradFill rotWithShape="1">
+          <a:gsLst>
+            <a:gs pos="0">
+              <a:schemeClr val="phClr">
+                <a:lumMod val="110000"/>
+                <a:satMod val="105000"/>
+                <a:tint val="67000"/>
+              </a:schemeClr>
+            </a:gs>
+            <a:gs pos="50000">
+              <a:schemeClr val="phClr">
+                <a:lumMod val="105000"/>
+                <a:satMod val="103000"/>
+                <a:tint val="73000"/>
+              </a:schemeClr>
+            </a:gs>
+            <a:gs pos="100000">
+              <a:schemeClr val="phClr">
+                <a:lumMod val="105000"/>
+                <a:satMod val="109000"/>
+                <a:tint val="81000"/>
+              </a:schemeClr>
+            </a:gs>
+          </a:gsLst>
+          <a:lin ang="5400000" scaled="0"/>
+        </a:gradFill>
+        <a:gradFill rotWithShape="1">
+          <a:gsLst>
+            <a:gs pos="0">
+              <a:schemeClr val="phClr">
+                <a:satMod val="103000"/>
+                <a:lumMod val="102000"/>
+                <a:tint val="94000"/>
+              </a:schemeClr>
+            </a:gs>
+            <a:gs pos="50000">
+              <a:schemeClr val="phClr">
+                <a:satMod val="110000"/>
+                <a:lumMod val="100000"/>
+                <a:shade val="100000"/>
+              </a:schemeClr>
+            </a:gs>
+            <a:gs pos="100000">
+              <a:schemeClr val="phClr">
+                <a:lumMod val="99000"/>
+                <a:satMod val="120000"/>
+                <a:shade val="78000"/>
+              </a:schemeClr>
+            </a:gs>
+          </a:gsLst>
+          <a:lin ang="5400000" scaled="0"/>
+        </a:gradFill>
+      </a:fillStyleLst>
+      <a:lnStyleLst>
+        <a:ln w="12700" cap="flat" cmpd="sng" algn="ctr">
+          <a:solidFill>
+            <a:schemeClr val="phClr"/>
+          </a:solidFill>
+          <a:prstDash val="solid"/>
+          <a:miter lim="800000"/>
+        </a:ln>
+        <a:ln w="19050" cap="flat" cmpd="sng" algn="ctr">
+          <a:solidFill>
+            <a:schemeClr val="phClr"/>
+          </a:solidFill>
+          <a:prstDash val="solid"/>
+          <a:miter lim="800000"/>
+        </a:ln>
+        <a:ln w="25400" cap="flat" cmpd="sng" algn="ctr">
+          <a:solidFill>
+            <a:schemeClr val="phClr"/>
+          </a:solidFill>
+          <a:prstDash val="solid"/>
+          <a:miter lim="800000"/>
+        </a:ln>
+      </a:lnStyleLst>
+      <a:effectStyleLst>
+        <a:effectStyle>
+          <a:effectLst/>
+        </a:effectStyle>
+        <a:effectStyle>
+          <a:effectLst/>
+        </a:effectStyle>
+        <a:effectStyle>
+          <a:effectLst>
+            <a:outerShdw blurRad="57150" dist="19050" dir="5400000" algn="ctr" rotWithShape="0">
+              <a:srgbClr val="000000">
+                <a:alpha val="63000"/>
+              </a:srgbClr>
+            </a:outerShdw>
+          </a:effectLst>
+        </a:effectStyle>
+      </a:effectStyleLst>
+      <a:bgFillStyleLst>
+        <a:solidFill>
+          <a:schemeClr val="phClr"/>
+        </a:solidFill>
+        <a:solidFill>
+          <a:schemeClr val="phClr">
+            <a:tint val="95000"/>
+            <a:satMod val="170000"/>
+          </a:schemeClr>
+        </a:solidFill>
+        <a:gradFill rotWithShape="1">
+          <a:gsLst>
+            <a:gs pos="0">
+              <a:schemeClr val="phClr">
+                <a:tint val="93000"/>
+                <a:satMod val="150000"/>
+                <a:shade val="98000"/>
+                <a:lumMod val="102000"/>
+              </a:schemeClr>
+            </a:gs>
+            <a:gs pos="50000">
+              <a:schemeClr val="phClr">
+                <a:tint val="98000"/>
+                <a:satMod val="130000"/>
+                <a:shade val="90000"/>
+                <a:lumMod val="103000"/>
+              </a:schemeClr>
+            </a:gs>
+            <a:gs pos="100000">
+              <a:schemeClr val="phClr">
+                <a:shade val="63000"/>
+                <a:satMod val="120000"/>
+              </a:schemeClr>
+            </a:gs>
+          </a:gsLst>
+          <a:lin ang="5400000" scaled="0"/>
+        </a:gradFill>
+      </a:bgFillStyleLst>
+    </a:fmtScheme>
+  </a:themeElements>
+  <a:objectDefaults>
+    <a:lnDef>
+      <a:spPr/>
+      <a:bodyPr/>
+      <a:lstStyle/>
+      <a:style>
+        <a:lnRef idx="2">
+          <a:schemeClr val="accent1"/>
+        </a:lnRef>
+        <a:fillRef idx="0">
+          <a:schemeClr val="accent1"/>
+        </a:fillRef>
+        <a:effectRef idx="1">
+          <a:schemeClr val="accent1"/>
+        </a:effectRef>
+        <a:fontRef idx="minor">
+          <a:schemeClr val="tx1"/>
+        </a:fontRef>
+      </a:style>
+    </a:lnDef>
+  </a:objectDefaults>
+  <a:extraClrSchemeLst/>
+  <a:extLst>
+    <a:ext uri="{05A4C25C-085E-4340-85A3-A5531E510DB2}">
+      <thm15:themeFamily xmlns:thm15="http://schemas.microsoft.com/office/thememl/2012/main" name="Office Theme" id="{2E142A2C-CD16-42D6-873A-C26D2A0506FA}" vid="{1BDDFF52-6CD6-40A5-AB3C-68EB2F1E4D0A}"/>
+    </a:ext>
+  </a:extLst>
+</a:theme>
+</file>
+
+<file path=ppt/webextensions/taskpanes.xml><?xml version="1.0" encoding="utf-8"?>
+<wetp:taskpanes xmlns:wetp="http://schemas.microsoft.com/office/webextensions/taskpanes/2010/11">
+  <wetp:taskpane dockstate="right" visibility="0" width="526" row="0">
+    <wetp:webextensionref xmlns:r="http://schemas.openxmlformats.org/officeDocument/2006/relationships" r:id="rId1"/>
+  </wetp:taskpane>
+</wetp:taskpanes>
+</file>
+
+<file path=ppt/webextensions/webextension1.xml><?xml version="1.0" encoding="utf-8"?>
+<we:webextension xmlns:we="http://schemas.microsoft.com/office/webextensions/webextension/2010/11" id="{EFDE4DB5-0F0E-43A8-80DD-CEF98A18A0C8}">
+  <we:reference id="wa200010215" version="2.0.0.0" store="zh-CN" storeType="OMEX"/>
+  <we:alternateReferences>
+    <we:reference id="wa200010215" version="2.0.0.0" store="WA200010215" storeType="OMEX"/>
+  </we:alternateReferences>
+  <we:properties/>
+  <we:bindings/>
+  <we:snapshot xmlns:r="http://schemas.openxmlformats.org/officeDocument/2006/relationships"/>
+</we:webextension>
 </file>